--- a/ADG/03장/3장_DataGuard를위한OracleNet구성.pptx
+++ b/ADG/03장/3장_DataGuard를위한OracleNet구성.pptx
@@ -8486,7 +8486,16 @@
                 </a:solidFill>
                 <a:latin typeface="맑은 고딕"/>
               </a:rPr>
-              <a:t>•  이름은 달라도 **내용(SYS 비밀번호)은 같아야 한다**</a:t>
+              <a:t>•  이름은 달라도 </a:t>
+            </a:r>
+            <a:r>
+              <a:rPr sz="1600" b="1">
+                <a:solidFill>
+                  <a:srgbClr val="222222"/>
+                </a:solidFill>
+                <a:latin typeface="맑은 고딕"/>
+              </a:rPr>
+              <a:t>내용(SYS 비밀번호)은 같아야 한다</a:t>
             </a:r>
           </a:p>
           <a:p>

--- a/ADG/03장/3장_DataGuard를위한OracleNet구성.pptx
+++ b/ADG/03장/3장_DataGuard를위한OracleNet구성.pptx
@@ -41,6 +41,20 @@
     <p:sldId id="289" r:id="rId41"/>
     <p:sldId id="290" r:id="rId42"/>
     <p:sldId id="291" r:id="rId43"/>
+    <p:sldId id="292" r:id="rId44"/>
+    <p:sldId id="293" r:id="rId45"/>
+    <p:sldId id="294" r:id="rId46"/>
+    <p:sldId id="295" r:id="rId47"/>
+    <p:sldId id="296" r:id="rId48"/>
+    <p:sldId id="297" r:id="rId49"/>
+    <p:sldId id="298" r:id="rId50"/>
+    <p:sldId id="299" r:id="rId51"/>
+    <p:sldId id="300" r:id="rId52"/>
+    <p:sldId id="301" r:id="rId53"/>
+    <p:sldId id="302" r:id="rId54"/>
+    <p:sldId id="303" r:id="rId55"/>
+    <p:sldId id="304" r:id="rId56"/>
+    <p:sldId id="305" r:id="rId57"/>
   </p:sldIdLst>
   <p:sldSz cx="12191695" cy="6858000" type="screen4x3"/>
   <p:notesSz cx="6858000" cy="9144000"/>
@@ -537,7 +551,7 @@
           <a:lstStyle/>
           <a:p>
             <a:r>
-              <a:t>이 세 조건이 이 장 전체의 뼈대입니다. ADMIN 과정에서 배운 리스너와 tnsnames 기초는 다시 설명하지 않고, Data Guard가 추가로 요구하는 것만 다룹니다. 각 조건이 무너졌을 때 나타나는 오류가 제각각이고 번호만으로는 계층을 알기 어렵기 때문에, 이 장의 실습은 조건을 하나씩 일부러 무너뜨리고 실제 오류를 관찰하는 방식으로 진행합니다. 세 조건 중 어느 하나만 빠져도 구축이 막히지만, 막히는 지점이 서로 달라 초보자는 원인을 찾기 어렵습니다. 그래서 이 장을 5장 구축 실습보다 앞에 배치했습니다.</a:t>
+              <a:t>애플리케이션이 데이터베이스에 접속하는 과정을 떠올리면 Data Guard의 전송도 같은 그림으로 이해됩니다. 리두를 보내는 Primary의 백그라운드 프로세스가 클라이언트 자리에 서고, Standby 리스너가 그 요청을 받아 서버 프로세스를 하나 만들어 주는데 그것이 RFS입니다. 이 구조 때문에 전송이 안 되는 원인의 상당수는 데이터베이스 내부가 아니라 접속 단계에 있습니다. 리스너가 서비스를 모르거나 인증이 실패하면 RFS는 아예 생기지 않습니다.</a:t>
             </a:r>
           </a:p>
         </p:txBody>
@@ -607,7 +621,7 @@
           <a:lstStyle/>
           <a:p>
             <a:r>
-              <a:t>UNKNOWN이 "모른다"인 것이 핵심입니다. 정적 등록은 리스너가 인스턴스와 통신해 얻은 정보가 아니라 파일에 적힌 선언이므로, 그 인스턴스가 떠 있는지조차 모릅니다. 장점은 NOMOUNT에도 접속할 수 있다는 것이고, 단점은 인스턴스가 죽어 있어도 서비스를 광고한다는 것입니다. Data Guard에서는 장점이 훨씬 큽니다. 실습 02에서 chicago의 lsnrctl status를 보면 같은 서비스에 UNKNOWN과 READY가 나란히 있습니다. 오류가 아니라 정적 등록과 동적 등록이 함께 있는 정상적인 모습이라는 점을 짚어 주십시오.</a:t>
+              <a:t>리스너는 설정 파일이 없어도 기본 이름과 1521 포트로 기동됩니다. Data Guard 환경에서 listener.ora를 손대야 하는 이유는 대개 두 가지로, 정적 등록 서비스를 넣어야 하고 SDU와 소켓 버퍼를 키워야 하기 때문입니다. 데이터베이스마다 리스너를 따로 두면 하나씩 내리고 올릴 수 있는 장점이 있지만 리스너마다 다른 포트를 써야 하고, 정적 등록 블록 이름도 리스너 이름을 따라 달라집니다.</a:t>
             </a:r>
           </a:p>
         </p:txBody>
@@ -677,7 +691,7 @@
           <a:lstStyle/>
           <a:p>
             <a:r>
-              <a:t>FAL은 Fetch Archive Log의 약자로 갭이 생겼을 때 빠진 로그를 요청하는 경로입니다. chicago의 FAL_SERVER가 boston이라는 것은 "갭이 생기면 boston에게 요청하겠다"는 뜻입니다. Primary에 이 값을 두는 이유는 역할 전환 이후를 대비하기 위해서입니다. Data Guard 파라미터의 상당수가 이런 식으로 "미래의 역할"을 위해 미리 설정됩니다.</a:t>
+              <a:t>동적 등록 덕분에 대부분의 데이터베이스는 listener.ora에 아무것도 적지 않아도 접속이 됩니다. Standby에서 DB_UNIQUE_NAME 설정을 빠뜨리면 기본값이 DB_NAME이 되어, Primary와 Standby가 같은 서비스 이름을 등록하는 일이 생깁니다. 리스너를 재기동하면 등록 정보가 잠시 비는데, LREG가 다음 주기에 다시 채우므로 기다리거나 ALTER SYSTEM REGISTER로 앞당깁니다. 서비스를 업무별로 나눌 때는 DBMS_SERVICE나 srvctl을 쓰는 편이 19c의 권장 방식입니다.</a:t>
             </a:r>
           </a:p>
         </p:txBody>
@@ -747,7 +761,7 @@
           <a:lstStyle/>
           <a:p>
             <a:r>
-              <a:t>이 실측이 흥미로운 이유는 기대와 다르기 때문입니다. "중요한 파라미터를 비웠으니 뭔가 깨지겠지"라고 예상하는데 아무 일도 일어나지 않습니다. 그런데 바로 그 점이 위험합니다. 즉시 문제가 드러나지 않으니 발견이 늦어지고, 그동안 안전망 없이 운영되는 것입니다. 기대와 다른 결과라 학습자가 당황합니다. 실습 04에서 이 관찰을 직접 하게 하고 다음 슬라이드로 이어 가십시오.</a:t>
+              <a:t>Data Guard 작업 중에는 아직 데이터베이스가 없는 인스턴스에 원격으로 접속해야 하는 순간이 자주 옵니다. RMAN DUPLICATE의 auxiliary는 NOMOUNT 상태이고, Broker는 역할 전환 중에 인스턴스를 내렸다가 원격에서 다시 올립니다. 이때 동적 등록에 기대면 서비스가 아예 없거나 BLOCKED라서 접속이 거절됩니다. ORA-12514는 리스너가 서비스를 모르는 경우이고, ORA-12528은 알고는 있지만 인스턴스가 막고 있는 경우라 두 번호를 구분해 두면 진단이 빨라집니다.</a:t>
             </a:r>
           </a:p>
         </p:txBody>
@@ -817,7 +831,7 @@
           <a:lstStyle/>
           <a:p>
             <a:r>
-              <a:t>실습 04에서 값을 비운 상태로 db_unique_name=boston을 설정했을 때 아무 검사 없이 통과한 것이 결정적 증거입니다. 방금 전까지 ORA-16053으로 오배송을 막아 주던 장치가 사라진 것입니다. 오타 하나로 리두가 엉뚱한 데이터베이스로 갈 수 있는 상태가 됩니다. 방금 전까지 ORA-16053으로 오배송을 막아 주던 장치가 사라진 것이며, 오타 하나로 리두가 엉뚱한 곳으로 갈 수 있는 상태가 됩니다.</a:t>
+              <a:t>정적 등록에서는 리스너가 인스턴스와 대화하지 않습니다. 적힌 SID와 ORACLE_HOME으로 서버 프로세스를 직접 띄우기 때문에 NOMOUNT 인스턴스에도 접속을 넘겨줄 수 있습니다. 반대로 SID_NAME이나 ORACLE_HOME이 실제와 다르면 접속은 되는데 엉뚱한 유휴 인스턴스에 붙는 이상한 결과가 나옵니다. 리스너 이름이 LISTENER2인데 블록 이름을 SID_LIST_LISTENER로 적으면 리스너가 그 블록을 무시한다는 점도 실무에서 자주 걸립니다.</a:t>
             </a:r>
           </a:p>
         </p:txBody>
@@ -887,7 +901,7 @@
           <a:lstStyle/>
           <a:p>
             <a:r>
-              <a:t>왜 이름이 다른데 내용은 같아야 하는지 헷갈리기 쉽습니다. 파일 이름은 그 서버의 인스턴스를 가리키는 것이고, 내용은 인증에 쓰이는 비밀번호입니다. 그래서 설치 가이드가 Primary의 파일을 복사해 이름만 바꾸도록 지시합니다. md5sum이 참고용인 이유는 파일 안에 DB 식별 정보가 들어가 같은 비밀번호라도 해시가 다를 수 있기 때문입니다. 실무에서는 SYS 비밀번호를 바꿀 때 이 요건이 문제가 됩니다. 한쪽만 바꾸면 그 순간부터 전송이 멈추므로, 비밀번호 변경은 반드시 양쪽 파일을 함께 갱신하는 절차로 만들어 두어야 합니다.</a:t>
+              <a:t>Broker는 역할 전환 도중 옛 Primary를 종료했다가 새 역할로 다시 기동합니다. 인스턴스가 내려간 사이에는 동적 서비스가 없으니 정적으로 등록된 _DGMGRL 서비스로 접속해 STARTUP을 냅니다. 이 서비스가 없어도 구성 생성이나 평상시 모니터링은 멀쩡해 보이고, Switchover를 처음 해 보는 날 마지막 단계에서 수동 기동하라는 메시지를 받게 됩니다. 이름에 도메인을 붙이는 규칙도 DB_DOMAIN 사용 여부에 맞춰야 합니다.</a:t>
             </a:r>
           </a:p>
         </p:txBody>
@@ -957,7 +971,7 @@
           <a:lstStyle/>
           <a:p>
             <a:r>
-              <a:t>이것이 실습 중 실제로 겪은 사고입니다. 비밀번호를 바꾸려다 실패했는데, 그 전에 실행한 rm은 이미 성공해 파일이 사라진 상태가 됐습니다. 명령 하나가 실패했다고 아무 일도 일어나지 않은 것이 아닙니다. 설정 파일이나 인증 파일을 손대는 작업은 반드시 백업부터 해야 한다는 교훈을 실물로 보여 주는 사례입니다. 명령 하나가 실패했다고 아무 일도 일어나지 않은 것이 아니라는 교훈을 실물로 보여 주는 사례입니다. 설정 파일이나 인증 파일을 손대는 작업은 반드시 백업부터 해야 합니다. 백업이 없다면 Primary의 파일을 복사해 이름만 바꾸는 방법으로 복구할 수 있습니다.</a:t>
+              <a:t>UNKNOWN이라는 표시는 말 그대로 리스너가 인스턴스 상태를 확인하지 않았다는 표시입니다. 정적 등록은 파일에 적힌 선언일 뿐이라 인스턴스가 꺼져 있어도 서비스를 광고합니다. 그 상태에서 접속하면 리스너는 통과하고 서버 프로세스 단계에서 ORA-01034가 납니다. 같은 서비스 이름 아래 UNKNOWN과 READY 항목이 함께 보이는 것은 정적과 동적이 동시에 등록된 정상 모습입니다. 고친 파일이 반영되지 않는다면 출력의 Parameter File 경로부터 확인합니다.</a:t>
             </a:r>
           </a:p>
         </p:txBody>
@@ -1027,7 +1041,7 @@
           <a:lstStyle/>
           <a:p>
             <a:r>
-              <a:t>ORA-16191은 Data Guard에서 패스워드 문제를 가리키는 대표 오류입니다. 문면 자체가 원인을 정확히 말해 줍니다. 다만 뒤에서 보듯 네트워크 문제일 때도 같은 번호가 나오므로, tnsping 결과와 함께 봐야 원인이 특정됩니다. 오류가 지연되어 나타난다는 점도 실무에서 중요한 관찰입니다. 설정을 바꾼 직후 한 번 조회하고 '문제없다'고 판단하면 안 되며, 로그 스위치를 내고 잠시 기다린 뒤 다시 확인해야 합니다.</a:t>
+              <a:t>정적 등록은 Standby를 만들 때 처음 필요해지기 때문에 Standby에만 넣고 끝내는 경우가 많습니다. 그런데 Switchover 뒤에는 chicago가 Standby가 되고, Broker가 chicago를 원격으로 재기동해야 합니다. 이때 chicago 리스너에 _DGMGRL 서비스가 없으면 전환이 마지막 단계에서 멈춥니다. 구축 문서에 서버별로 GLOBAL_DBNAME, tnsnames.ora의 SERVICE_NAME, DB_DOMAIN 값을 표로 남겨 두면 나중에 이름을 바꿀 때 어디까지 손대야 하는지 한눈에 보입니다.</a:t>
             </a:r>
           </a:p>
         </p:txBody>
@@ -1097,7 +1111,7 @@
           <a:lstStyle/>
           <a:p>
             <a:r>
-              <a:t>이 원칙은 Data Guard 문제 해결에서 반복해서 만나게 됩니다. 여기서 처음 부딪히지만 실습 06(방화벽)에서 또 만나고, 이후 장들에서도 계속 나옵니다. REOPEN 속성으로 지정한 시간(기본 300초)이 지나면 자동 재시도하기도 하지만 확실하지 않으므로, 즉시 회복하려면 DEFER/ENABLE이 확실합니다. 이 원칙은 이후 장들에서 계속 반복됩니다. 실습 06(방화벽)에서 또 만나고, 7장의 갭 해소에서도 비슷한 상황이 나옵니다. 여기서 확실히 각인시켜 두면 나중에 학습자가 스스로 DEFER/ENABLE을 떠올리게 됩니다.</a:t>
+              <a:t>리두 전송에 쓰는 비밀번호는 사람이 입력하지 않습니다. 인스턴스가 자기 패스워드 파일에서 꺼내 쓰고, 받는 쪽은 자기 파일의 정보와 비교합니다. 두 서버의 파일이 어긋나면 사람이 원격으로 SYSDBA 접속할 때와 똑같이 거절됩니다. SSL 인증은 인증서와 디렉터리 서버 같은 기반이 필요해 대부분의 구성은 패스워드 파일을 씁니다. 패스워드 파일은 리두 전송만이 아니라 FAL, Broker, RMAN DUPLICATE 모두의 공통 자격 증명입니다.</a:t>
             </a:r>
           </a:p>
         </p:txBody>
@@ -1167,7 +1181,7 @@
           <a:lstStyle/>
           <a:p>
             <a:r>
-              <a:t>교재의 절차를 그대로 따르기 전에 현재 상태를 확인해야 한다는 사례입니다. 설치 가이드는 firewalld가 돌고 있다고 가정하지만 이 이미지에서는 애초에 활성화되어 있지 않습니다. 그래서 실습에서는 iptables로 직접 규칙을 넣어 차단을 재현합니다. 양방향이어야 하는 이유를 강조해 주십시오. 평소에는 Primary에서 Standby로만 가지만, 갭 해소 요청(FAL)과 역할 전환 이후에는 반대 방향이 필요합니다. 한쪽만 열어 두면 평소에는 멀쩡하다가 장애 상황에서 막힙니다.</a:t>
+              <a:t>chicago 서버의 orapwchicago를 boston 서버에 그대로 복사하면 boston 인스턴스는 파일을 찾지 못합니다. 이름의 SID 부분을 orapwboston으로 바꿔야 합니다. 12.2부터는 Primary에서 SQL로 바꾼 비밀번호나 관리 권한이 리두를 타고 물리 Standby 파일에 반영되지만, orapwd로 파일을 다시 만든 경우는 리두에 남지 않아 직접 복사해야 합니다. 적용이 멈춘 Standby나 Far Sync 인스턴스에도 자동 반영은 일어나지 않습니다.</a:t>
             </a:r>
           </a:p>
         </p:txBody>
@@ -1237,7 +1251,7 @@
           <a:lstStyle/>
           <a:p>
             <a:r>
-              <a:t>응답 속도로 원인을 가른다는 것이 이 슬라이드의 핵심입니다. 즉시 실패했다면 거부이고, 한참 기다렸다면 침묵입니다. 침묵은 대개 방화벽입니다. 오류 번호를 확인하기 전에 "얼마나 기다렸는지"를 먼저 떠올리는 습관이 진단을 빠르게 만듭니다. DROP과 REJECT의 차이도 함께 설명하면 좋습니다. REJECT는 거부 응답을 보내므로 즉시 오류가 나고, DROP은 침묵하므로 타임아웃을 기다립니다. 보안 정책에서 어느 쪽을 쓰는지에 따라 증상이 달라진다는 점을 알아 두면 진단이 빨라집니다.</a:t>
+              <a:t>SYS 비밀번호를 주기적으로 바꾸는 조직에서는 바꿀 때마다 리두 전송이 멈출 위험을 안게 됩니다. 전송 전용 사용자를 두면 SYS 비밀번호 변경과 전송 인증이 분리됩니다. 사용자에게 SYSOPER를 주는 이유는 그래야 패스워드 파일에 등록되기 때문입니다. 역할이 바뀌면 지금의 Standby가 송신자가 되므로 Primary에만 지정해서는 안 되고, Far Sync 인스턴스를 포함한 모든 구성원에 같은 값을 둡니다.</a:t>
             </a:r>
           </a:p>
         </p:txBody>
@@ -1307,7 +1321,7 @@
           <a:lstStyle/>
           <a:p>
             <a:r>
-              <a:t>Switchover 이후에는 boston이 chicago로 리두를 보내야 하므로 boston에도 chicago 항목이 있어야 합니다. 지금 당장 쓰지 않더라도 미리 넣어 두는 것이 표준입니다. _DG 항목도 마찬가지로 13장에서야 쓰지만 나중에 다시 손대지 않으려고 처음부터 넣어 두었습니다. 이런 "미리 넣어 두기"가 Data Guard 구성의 일반적인 방식입니다.</a:t>
+              <a:t>경로는 여럿이지만 쓰는 재료는 같습니다. tnsnames.ora, 리스너, 패스워드 파일 세 가지입니다. 한 파일의 오타가 여러 경로를 동시에 망가뜨리기도 합니다. 리두 전송이 정상이면 구성이 끝났다고 생각하기 쉬운데, FAL과 역할 전환은 반대 방향 연결을 쓰기 때문에 평소에는 시험받지 않습니다. 갭이 생기거나 Switchover를 하는 날 처음으로 그 경로가 쓰이고, 그때 문제가 드러납니다.</a:t>
             </a:r>
           </a:p>
         </p:txBody>
@@ -1377,7 +1391,7 @@
           <a:lstStyle/>
           <a:p>
             <a:r>
-              <a:t>ORA-16191은 "로그온하지 못했다"는 결과만 말해 줍니다. 로그온에 실패한 이유까지는 알려 주지 않습니다. 오류 번호 하나로 원인을 단정하면 안 되는 대표적인 사례이며, 항상 두 개 이상의 근거를 맞춰 봐야 한다는 원칙을 보여 줍니다. 오류 번호 하나로 원인을 단정하면 안 되는 대표적인 사례입니다. 항상 두 개 이상의 근거를 맞춰 봐야 합니다. 실습 05와 06을 연달아 진행하면 학습자가 같은 번호를 두 번 만나면서 이 교훈을 스스로 깨닫게 됩니다.</a:t>
+              <a:t>ORA-16191은 전송 클라이언트가 Standby에 로그온하지 못했다는 결과만 말합니다. 원인이 패스워드 파일인지 네트워크 차단인지는 tnsping과 원격 SYSDBA 접속을 따로 해 봐야 갈립니다. 원인을 고친 뒤에도 목적지 오류가 그대로 남아 있어 당황하는 경우가 많은데, 실패한 목적지는 REOPEN 간격이 지나야 다시 시도하기 때문입니다. 기본 간격은 300초이고, 기다리지 않으려면 목적지 상태를 DEFER로 바꿨다가 ENABLE로 되돌립니다.</a:t>
             </a:r>
           </a:p>
         </p:txBody>
@@ -1447,7 +1461,7 @@
           <a:lstStyle/>
           <a:p>
             <a:r>
-              <a:t>위에서 아래로 갈수록 상위 계층입니다. 하위 계층이 상위 계층의 전제이므로 위에서부터 확인하는 것이 빠릅니다. 이름이 안 풀리는데 인증을 의심할 필요는 없습니다. 반대로 인증까지 성공했다면 그 아래 모든 계층이 정상임이 자동으로 증명됩니다. 이 표를 출력해 옆에 두고 실습하게 하면 효과가 좋습니다. 실습 03·05·06에서 만나는 오류를 하나씩 표에서 찾아 표시해 가면, 장이 끝날 무렵에는 지도가 완성되고 각 번호의 위치가 몸에 익습니다.</a:t>
+              <a:t>이 사례에서는 업무 쪽 증상이 전혀 없었기 때문에 하루가 지나서야 발견됐습니다. 새 비밀번호로 boston에 원격 접속하면 실패하고 옛 비밀번호로는 성공한다는 사실이 원인을 가리킵니다. orapwd 재생성은 리두로 전달되지 않으니 boston은 옛 파일을 쓰고 있었던 것입니다. 이후 절차서에 모든 구성원 파일 복사, 원격 SYSDBA 확인, 목적지 상태 확인 세 단계를 넣었고, 장기적으로는 REDO_TRANSPORT_USER 도입을 검토했습니다.</a:t>
             </a:r>
           </a:p>
         </p:txBody>
@@ -1517,7 +1531,7 @@
           <a:lstStyle/>
           <a:p>
             <a:r>
-              <a:t>세 번의 확인으로 여섯 계층이 정리된다는 것이 이 절차의 효율입니다. 특히 ③의 실제 SYS 접속 한 번이 서비스 등록·인스턴스 상태·인증 세 계층을 동시에 검증합니다. 그리고 ⑥과 ⑦을 빠뜨리지 않는 것이 중요합니다. 설정이 맞다는 것과 리두가 흐른다는 것은 다른 이야기이며, 이 장 전체가 그 차이를 반복해서 보여 주었습니다. 이 절차는 3장뿐 아니라 이 과정 전체에서 쓰입니다. 15장의 문제 해결에서 다시 확장되며, 그때는 적용 계층까지 포함한 더 큰 지도가 됩니다. 여기서 만든 절차가 그 바탕이 됩니다.</a:t>
+              <a:t>DG_CONFIG에는 Primary, Standby, Far Sync, 캐스케이드 대상까지 구성원의 고유 이름을 모두 적습니다. 순서는 상관없습니다. 목록이 있으면 목적지에 오타가 난 고유 이름을 넣는 순간 ORA-16053으로 거부되어 실수를 일찍 잡아 줍니다. 두 노드 구성에서는 목록을 비워도 전송이 돌아가는 경우가 있지만, 그러면 이 검사가 사라지고 Broker와 일부 기능이 기대하는 전제가 깨집니다. Broker 구성에서는 Broker가 이 값을 직접 관리합니다.</a:t>
             </a:r>
           </a:p>
         </p:txBody>
@@ -1587,7 +1601,7 @@
           <a:lstStyle/>
           <a:p>
             <a:r>
-              <a:t>ORA-12514는 "그 서비스를 모른다"고만 말할 뿐 클라이언트가 무엇을 요청했는지는 알려 주지 않습니다. 리스너 로그에는 요청된 SERVICE_NAME이 그대로 기록되므로, tnsnames 쪽 오타인지 listener.ora 쪽 누락인지 즉시 구분할 수 있습니다. 2장에서 본 Fatal NI connect error 12537 같은 항목은 데이터베이스 알림 로그에 남으므로, 두 로그를 함께 보는 습관이 필요합니다.</a:t>
+              <a:t>LOG_ARCHIVE_CONFIG에는 구성원 목록 말고도 이 데이터베이스가 리두를 보내도 되는지, 받아도 되는지를 함께 적을 수 있습니다. 특정 구성원의 송신이나 수신을 잠시 막을 때 쓰는 옵션이지만, 작업 뒤 원래대로 돌려놓지 않으면 몇 달 뒤 역할 전환을 했을 때 전송이 시작되지 않는 문제로 나타납니다. 이런 이유로 상시 설정으로는 거의 쓰지 않고, 쓴다면 변경 기록과 원복 절차를 같이 남겨 둡니다.</a:t>
             </a:r>
           </a:p>
         </p:txBody>
@@ -1657,7 +1671,357 @@
           <a:lstStyle/>
           <a:p>
             <a:r>
-              <a:t>다섯 단계가 각각 다른 계층을 검증하므로 하나라도 빠지면 불완전합니다. 특히 ⑤를 빠뜨리는 경우가 많습니다. 목적지가 VALID라는 것과 실제로 리두가 적용되고 있다는 것은 다른 이야기입니다. Standby에서 시퀀스가 오르는 것을 직접 확인해야 작업이 끝난 것입니다. ①도 자주 놓칩니다. tnsnames는 양쪽에 같은 내용을 두어야 하는데 한쪽만 고치고 끝내는 일이 흔합니다. 역할 전환 전까지는 문제가 드러나지 않으므로 더 위험합니다. 목적지가 VALID라는 것과 실제로 리두가 적용되고 있다는 것은 다른 이야기입니다. Standby에서 시퀀스가 오르는 것을 직접 확인해야 작업이 끝난 것입니다.</a:t>
+              <a:t>FAL_SERVER 값은 tnsnames.ora에서 풀리는 별칭이어야 하며 여러 개를 나열할 수도 있습니다. Primary에도 Standby 별칭을 미리 넣어 두는 이유는 역할이 바뀐 뒤를 위해서입니다. FAL_CLIENT는 예전에는 FAL 서버가 응답을 보낼 이름으로 반드시 필요했지만, 지금은 요청한 쪽의 목적지 정보로 응답 경로를 찾으므로 생략해도 됩니다. 갭이 생기고 해소되는 동작 자체는 7장에서 다루고, 여기서는 이 요청 역시 네트워크와 인증을 통과해야 한다는 데 집중합니다.</a:t>
+            </a:r>
+          </a:p>
+        </p:txBody>
+      </p:sp>
+      <p:sp>
+        <p:nvSpPr>
+          <p:cNvPr id="4" name="Slide Number Placeholder 3"/>
+          <p:cNvSpPr>
+            <a:spLocks noGrp="1"/>
+          </p:cNvSpPr>
+          <p:nvPr>
+            <p:ph type="sldNum" idx="5" sz="quarter"/>
+          </p:nvPr>
+        </p:nvSpPr>
+        <p:spPr/>
+      </p:sp>
+    </p:spTree>
+  </p:cSld>
+  <p:clrMapOvr>
+    <a:masterClrMapping/>
+  </p:clrMapOvr>
+</p:notes>
+</file>
+
+<file path=ppt/notesSlides/notesSlide25.xml><?xml version="1.0" encoding="utf-8"?>
+<p:notes xmlns:a="http://schemas.openxmlformats.org/drawingml/2006/main" xmlns:p="http://schemas.openxmlformats.org/presentationml/2006/main" xmlns:r="http://schemas.openxmlformats.org/officeDocument/2006/relationships">
+  <p:cSld>
+    <p:spTree>
+      <p:nvGrpSpPr>
+        <p:cNvPr id="1" name=""/>
+        <p:cNvGrpSpPr/>
+        <p:nvPr/>
+      </p:nvGrpSpPr>
+      <p:grpSpPr>
+        <a:xfrm>
+          <a:off x="0" y="0"/>
+          <a:ext cx="0" cy="0"/>
+          <a:chOff x="0" y="0"/>
+          <a:chExt cx="0" cy="0"/>
+        </a:xfrm>
+      </p:grpSpPr>
+      <p:sp>
+        <p:nvSpPr>
+          <p:cNvPr id="2" name="Slide Image Placeholder 1"/>
+          <p:cNvSpPr>
+            <a:spLocks noGrp="1"/>
+          </p:cNvSpPr>
+          <p:nvPr>
+            <p:ph type="sldImg" idx="2"/>
+          </p:nvPr>
+        </p:nvSpPr>
+        <p:spPr/>
+      </p:sp>
+      <p:sp>
+        <p:nvSpPr>
+          <p:cNvPr id="3" name="Notes Placeholder 2"/>
+          <p:cNvSpPr>
+            <a:spLocks noGrp="1"/>
+          </p:cNvSpPr>
+          <p:nvPr>
+            <p:ph type="body" idx="3" sz="quarter"/>
+          </p:nvPr>
+        </p:nvSpPr>
+        <p:spPr/>
+        <p:txBody>
+          <a:bodyPr/>
+          <a:lstStyle/>
+          <a:p>
+            <a:r>
+              <a:t>SDU는 Oracle Net이 데이터를 모았다가 네트워크로 내보내는 버퍼 크기입니다. 일반 질의 결과에는 기본값 8KB로 충분하지만, 리두는 큰 덩어리로 끊임없이 흐르기 때문에 작은 SDU로는 조각 수가 많아집니다. SDU는 양쪽이 협상해 작은 쪽으로 정해지므로 송신 쪽 tnsnames.ora만 키우고 수신 쪽 리스너를 그대로 두면 효과가 없습니다. 동적 등록 서비스까지 일괄 적용하려면 sqlnet.ora의 DEFAULT_SDU_SIZE를 씁니다.</a:t>
+            </a:r>
+          </a:p>
+        </p:txBody>
+      </p:sp>
+      <p:sp>
+        <p:nvSpPr>
+          <p:cNvPr id="4" name="Slide Number Placeholder 3"/>
+          <p:cNvSpPr>
+            <a:spLocks noGrp="1"/>
+          </p:cNvSpPr>
+          <p:nvPr>
+            <p:ph type="sldNum" idx="5" sz="quarter"/>
+          </p:nvPr>
+        </p:nvSpPr>
+        <p:spPr/>
+      </p:sp>
+    </p:spTree>
+  </p:cSld>
+  <p:clrMapOvr>
+    <a:masterClrMapping/>
+  </p:clrMapOvr>
+</p:notes>
+</file>
+
+<file path=ppt/notesSlides/notesSlide26.xml><?xml version="1.0" encoding="utf-8"?>
+<p:notes xmlns:a="http://schemas.openxmlformats.org/drawingml/2006/main" xmlns:p="http://schemas.openxmlformats.org/presentationml/2006/main" xmlns:r="http://schemas.openxmlformats.org/officeDocument/2006/relationships">
+  <p:cSld>
+    <p:spTree>
+      <p:nvGrpSpPr>
+        <p:cNvPr id="1" name=""/>
+        <p:cNvGrpSpPr/>
+        <p:nvPr/>
+      </p:nvGrpSpPr>
+      <p:grpSpPr>
+        <a:xfrm>
+          <a:off x="0" y="0"/>
+          <a:ext cx="0" cy="0"/>
+          <a:chOff x="0" y="0"/>
+          <a:chExt cx="0" cy="0"/>
+        </a:xfrm>
+      </p:grpSpPr>
+      <p:sp>
+        <p:nvSpPr>
+          <p:cNvPr id="2" name="Slide Image Placeholder 1"/>
+          <p:cNvSpPr>
+            <a:spLocks noGrp="1"/>
+          </p:cNvSpPr>
+          <p:nvPr>
+            <p:ph type="sldImg" idx="2"/>
+          </p:nvPr>
+        </p:nvSpPr>
+        <p:spPr/>
+      </p:sp>
+      <p:sp>
+        <p:nvSpPr>
+          <p:cNvPr id="3" name="Notes Placeholder 2"/>
+          <p:cNvSpPr>
+            <a:spLocks noGrp="1"/>
+          </p:cNvSpPr>
+          <p:nvPr>
+            <p:ph type="body" idx="3" sz="quarter"/>
+          </p:nvPr>
+        </p:nvSpPr>
+        <p:spPr/>
+        <p:txBody>
+          <a:bodyPr/>
+          <a:lstStyle/>
+          <a:p>
+            <a:r>
+              <a:t>지연이 긴 구간에서는 응답을 기다리는 동안 보낼 수 있는 양이 소켓 버퍼 크기에 묶입니다. 선로가 비어 있어도 버퍼가 작으면 기다려야 합니다. 교재 예처럼 622Mbit/s, 30ms 구간이면 BDP가 약 2.3MB이고 세 배는 약 7MB라서, 10MB와 비교해 큰 쪽인 10MB를 씁니다. 역할이 바뀌면 송신과 수신도 바뀌므로 버퍼 설정은 두 서버의 tnsnames.ora와 listener.ora에 똑같이 둡니다.</a:t>
+            </a:r>
+          </a:p>
+        </p:txBody>
+      </p:sp>
+      <p:sp>
+        <p:nvSpPr>
+          <p:cNvPr id="4" name="Slide Number Placeholder 3"/>
+          <p:cNvSpPr>
+            <a:spLocks noGrp="1"/>
+          </p:cNvSpPr>
+          <p:nvPr>
+            <p:ph type="sldNum" idx="5" sz="quarter"/>
+          </p:nvPr>
+        </p:nvSpPr>
+        <p:spPr/>
+      </p:sp>
+    </p:spTree>
+  </p:cSld>
+  <p:clrMapOvr>
+    <a:masterClrMapping/>
+  </p:clrMapOvr>
+</p:notes>
+</file>
+
+<file path=ppt/notesSlides/notesSlide27.xml><?xml version="1.0" encoding="utf-8"?>
+<p:notes xmlns:a="http://schemas.openxmlformats.org/drawingml/2006/main" xmlns:p="http://schemas.openxmlformats.org/presentationml/2006/main" xmlns:r="http://schemas.openxmlformats.org/officeDocument/2006/relationships">
+  <p:cSld>
+    <p:spTree>
+      <p:nvGrpSpPr>
+        <p:cNvPr id="1" name=""/>
+        <p:cNvGrpSpPr/>
+        <p:nvPr/>
+      </p:nvGrpSpPr>
+      <p:grpSpPr>
+        <a:xfrm>
+          <a:off x="0" y="0"/>
+          <a:ext cx="0" cy="0"/>
+          <a:chOff x="0" y="0"/>
+          <a:chExt cx="0" cy="0"/>
+        </a:xfrm>
+      </p:grpSpPr>
+      <p:sp>
+        <p:nvSpPr>
+          <p:cNvPr id="2" name="Slide Image Placeholder 1"/>
+          <p:cNvSpPr>
+            <a:spLocks noGrp="1"/>
+          </p:cNvSpPr>
+          <p:nvPr>
+            <p:ph type="sldImg" idx="2"/>
+          </p:nvPr>
+        </p:nvSpPr>
+        <p:spPr/>
+      </p:sp>
+      <p:sp>
+        <p:nvSpPr>
+          <p:cNvPr id="3" name="Notes Placeholder 2"/>
+          <p:cNvSpPr>
+            <a:spLocks noGrp="1"/>
+          </p:cNvSpPr>
+          <p:nvPr>
+            <p:ph type="body" idx="3" sz="quarter"/>
+          </p:nvPr>
+        </p:nvSpPr>
+        <p:spPr/>
+        <p:txBody>
+          <a:bodyPr/>
+          <a:lstStyle/>
+          <a:p>
+            <a:r>
+              <a:t>소켓 버퍼를 10MB로 적었는데 처리량이 그대로라면 커널 한도를 의심합니다. 운영체제는 허용 최대값보다 큰 요청을 오류 없이 깎아서 적용합니다. oracle-database-preinstall-19c 패키지가 커널 값을 올려 주기는 하지만 Data Guard 권고값에는 못 미치므로, 교재 퀴즈에서도 패키지만으로 충분하다는 진술은 거짓으로 처리합니다. sysctl.conf에 값을 넣고 sysctl -p로 반영한 뒤, 리스너와 전송 연결을 다시 맺어야 새 버퍼가 쓰입니다.</a:t>
+            </a:r>
+          </a:p>
+        </p:txBody>
+      </p:sp>
+      <p:sp>
+        <p:nvSpPr>
+          <p:cNvPr id="4" name="Slide Number Placeholder 3"/>
+          <p:cNvSpPr>
+            <a:spLocks noGrp="1"/>
+          </p:cNvSpPr>
+          <p:nvPr>
+            <p:ph type="sldNum" idx="5" sz="quarter"/>
+          </p:nvPr>
+        </p:nvSpPr>
+        <p:spPr/>
+      </p:sp>
+    </p:spTree>
+  </p:cSld>
+  <p:clrMapOvr>
+    <a:masterClrMapping/>
+  </p:clrMapOvr>
+</p:notes>
+</file>
+
+<file path=ppt/notesSlides/notesSlide28.xml><?xml version="1.0" encoding="utf-8"?>
+<p:notes xmlns:a="http://schemas.openxmlformats.org/drawingml/2006/main" xmlns:p="http://schemas.openxmlformats.org/presentationml/2006/main" xmlns:r="http://schemas.openxmlformats.org/officeDocument/2006/relationships">
+  <p:cSld>
+    <p:spTree>
+      <p:nvGrpSpPr>
+        <p:cNvPr id="1" name=""/>
+        <p:cNvGrpSpPr/>
+        <p:nvPr/>
+      </p:nvGrpSpPr>
+      <p:grpSpPr>
+        <a:xfrm>
+          <a:off x="0" y="0"/>
+          <a:ext cx="0" cy="0"/>
+          <a:chOff x="0" y="0"/>
+          <a:chExt cx="0" cy="0"/>
+        </a:xfrm>
+      </p:grpSpPr>
+      <p:sp>
+        <p:nvSpPr>
+          <p:cNvPr id="2" name="Slide Image Placeholder 1"/>
+          <p:cNvSpPr>
+            <a:spLocks noGrp="1"/>
+          </p:cNvSpPr>
+          <p:nvPr>
+            <p:ph type="sldImg" idx="2"/>
+          </p:nvPr>
+        </p:nvSpPr>
+        <p:spPr/>
+      </p:sp>
+      <p:sp>
+        <p:nvSpPr>
+          <p:cNvPr id="3" name="Notes Placeholder 2"/>
+          <p:cNvSpPr>
+            <a:spLocks noGrp="1"/>
+          </p:cNvSpPr>
+          <p:nvPr>
+            <p:ph type="body" idx="3" sz="quarter"/>
+          </p:nvPr>
+        </p:nvSpPr>
+        <p:spPr/>
+        <p:txBody>
+          <a:bodyPr/>
+          <a:lstStyle/>
+          <a:p>
+            <a:r>
+              <a:t>Nagle 알고리즘은 작은 패킷을 모아서 한 번에 보내 패킷 수를 줄이는 장치입니다. 대화형 트래픽에는 유리하지만, 리두 전송에서는 보낼 데이터를 잠깐 붙잡아 두는 지연으로 나타납니다. SYNC 전송은 Standby의 응답을 받아야 커밋이 끝나므로 이런 지연이 사용자의 커밋 시간에 그대로 얹힙니다. ASYNC라면 커밋에는 영향이 없지만 transport lag에 반영됩니다. 교재는 sqlnet.ora에 양쪽 모두 명시하도록 권합니다.</a:t>
+            </a:r>
+          </a:p>
+        </p:txBody>
+      </p:sp>
+      <p:sp>
+        <p:nvSpPr>
+          <p:cNvPr id="4" name="Slide Number Placeholder 3"/>
+          <p:cNvSpPr>
+            <a:spLocks noGrp="1"/>
+          </p:cNvSpPr>
+          <p:nvPr>
+            <p:ph type="sldNum" idx="5" sz="quarter"/>
+          </p:nvPr>
+        </p:nvSpPr>
+        <p:spPr/>
+      </p:sp>
+    </p:spTree>
+  </p:cSld>
+  <p:clrMapOvr>
+    <a:masterClrMapping/>
+  </p:clrMapOvr>
+</p:notes>
+</file>
+
+<file path=ppt/notesSlides/notesSlide29.xml><?xml version="1.0" encoding="utf-8"?>
+<p:notes xmlns:a="http://schemas.openxmlformats.org/drawingml/2006/main" xmlns:p="http://schemas.openxmlformats.org/presentationml/2006/main" xmlns:r="http://schemas.openxmlformats.org/officeDocument/2006/relationships">
+  <p:cSld>
+    <p:spTree>
+      <p:nvGrpSpPr>
+        <p:cNvPr id="1" name=""/>
+        <p:cNvGrpSpPr/>
+        <p:nvPr/>
+      </p:nvGrpSpPr>
+      <p:grpSpPr>
+        <a:xfrm>
+          <a:off x="0" y="0"/>
+          <a:ext cx="0" cy="0"/>
+          <a:chOff x="0" y="0"/>
+          <a:chExt cx="0" cy="0"/>
+        </a:xfrm>
+      </p:grpSpPr>
+      <p:sp>
+        <p:nvSpPr>
+          <p:cNvPr id="2" name="Slide Image Placeholder 1"/>
+          <p:cNvSpPr>
+            <a:spLocks noGrp="1"/>
+          </p:cNvSpPr>
+          <p:nvPr>
+            <p:ph type="sldImg" idx="2"/>
+          </p:nvPr>
+        </p:nvSpPr>
+        <p:spPr/>
+      </p:sp>
+      <p:sp>
+        <p:nvSpPr>
+          <p:cNvPr id="3" name="Notes Placeholder 2"/>
+          <p:cNvSpPr>
+            <a:spLocks noGrp="1"/>
+          </p:cNvSpPr>
+          <p:nvPr>
+            <p:ph type="body" idx="3" sz="quarter"/>
+          </p:nvPr>
+        </p:nvSpPr>
+        <p:spPr/>
+        <p:txBody>
+          <a:bodyPr/>
+          <a:lstStyle/>
+          <a:p>
+            <a:r>
+              <a:t>네트워크 조정은 구간에 따라 효과 차이가 큽니다. 같은 데이터센터 안이라면 거의 변화가 없고, 멀리 떨어진 WAN 구간일수록 차이가 커집니다. 바꾸기 전 값을 기록해 두지 않으면 조정이 효과가 있었는지 판단할 근거가 없습니다. 공식 교재의 listener.ora 예제에 SEND_SDU, RECV_SDU라는 이름이 보이는데 Oracle Net에 없는 파라미터라서, 설명 본문과 tnsnames.ora 예처럼 SEND_BUF_SIZE와 RECV_BUF_SIZE로 읽어야 합니다.</a:t>
             </a:r>
           </a:p>
         </p:txBody>
@@ -1727,7 +2091,427 @@
           <a:lstStyle/>
           <a:p>
             <a:r>
-              <a:t>"tnsping은 OK인데 접속이 안 된다"는 신고가 자주 들어옵니다. 그때 tnsnames를 다시 들여다보는 것은 시간 낭비입니다. tnsping이 통과했다면 이름 해석은 이미 검증된 것이므로 리스너 위쪽을 봐야 합니다. 반대로 tnsping부터 실패하면 서비스 등록이나 인증은 볼 필요가 없습니다. 이 한 줄의 판단이 진단 시간을 크게 줄입니다. 실습 03에서 tnsping은 OK인데 접속만 실패하는 상태를 직접 만들어 봅니다. 그 경험이 있으면 이후 현장에서 같은 신고를 받았을 때 tnsnames를 다시 뒤지는 시간 낭비를 피할 수 있습니다.</a:t>
+              <a:t>구축할 때 Primary에서 Standby로 가는 길만 확인하고 끝내는 경우가 많습니다. 하지만 Standby가 빠진 로그를 요청할 때는 Standby가 Primary의 리스너에 접속하고, 역할이 바뀐 뒤에는 boston이 chicago로 리두를 보냅니다. 두 서버의 네트워크 설정을 거울처럼 같은 모양으로 만들어 두면 이런 순간에 따로 손댈 것이 없습니다. 방화벽도 리스너 포트를 양방향으로 열어 두어야 합니다.</a:t>
+            </a:r>
+          </a:p>
+        </p:txBody>
+      </p:sp>
+      <p:sp>
+        <p:nvSpPr>
+          <p:cNvPr id="4" name="Slide Number Placeholder 3"/>
+          <p:cNvSpPr>
+            <a:spLocks noGrp="1"/>
+          </p:cNvSpPr>
+          <p:nvPr>
+            <p:ph type="sldNum" idx="5" sz="quarter"/>
+          </p:nvPr>
+        </p:nvSpPr>
+        <p:spPr/>
+      </p:sp>
+    </p:spTree>
+  </p:cSld>
+  <p:clrMapOvr>
+    <a:masterClrMapping/>
+  </p:clrMapOvr>
+</p:notes>
+</file>
+
+<file path=ppt/notesSlides/notesSlide30.xml><?xml version="1.0" encoding="utf-8"?>
+<p:notes xmlns:a="http://schemas.openxmlformats.org/drawingml/2006/main" xmlns:p="http://schemas.openxmlformats.org/presentationml/2006/main" xmlns:r="http://schemas.openxmlformats.org/officeDocument/2006/relationships">
+  <p:cSld>
+    <p:spTree>
+      <p:nvGrpSpPr>
+        <p:cNvPr id="1" name=""/>
+        <p:cNvGrpSpPr/>
+        <p:nvPr/>
+      </p:nvGrpSpPr>
+      <p:grpSpPr>
+        <a:xfrm>
+          <a:off x="0" y="0"/>
+          <a:ext cx="0" cy="0"/>
+          <a:chOff x="0" y="0"/>
+          <a:chExt cx="0" cy="0"/>
+        </a:xfrm>
+      </p:grpSpPr>
+      <p:sp>
+        <p:nvSpPr>
+          <p:cNvPr id="2" name="Slide Image Placeholder 1"/>
+          <p:cNvSpPr>
+            <a:spLocks noGrp="1"/>
+          </p:cNvSpPr>
+          <p:nvPr>
+            <p:ph type="sldImg" idx="2"/>
+          </p:nvPr>
+        </p:nvSpPr>
+        <p:spPr/>
+      </p:sp>
+      <p:sp>
+        <p:nvSpPr>
+          <p:cNvPr id="3" name="Notes Placeholder 2"/>
+          <p:cNvSpPr>
+            <a:spLocks noGrp="1"/>
+          </p:cNvSpPr>
+          <p:nvPr>
+            <p:ph type="body" idx="3" sz="quarter"/>
+          </p:nvPr>
+        </p:nvSpPr>
+        <p:spPr/>
+        <p:txBody>
+          <a:bodyPr/>
+          <a:lstStyle/>
+          <a:p>
+            <a:r>
+              <a:t>tnsping은 리스너가 응답하는지까지만 확인합니다. 리스너가 그 서비스를 아는지, 인스턴스가 떠 있는지, 인증이 통과하는지는 보지 않으므로 tnsping이 OK여도 접속이 실패하는 일이 흔합니다. 원격 SYSDBA 접속은 전송 프로세스와 같은 길을 같은 방식으로 지나가기 때문에 3단계까지를 한 번에 확인하는 가장 확실한 방법입니다. 이 순서를 chicago와 boston 양쪽에서 각각 밟아야 FAL과 역할 전환 경로까지 점검됩니다.</a:t>
+            </a:r>
+          </a:p>
+        </p:txBody>
+      </p:sp>
+      <p:sp>
+        <p:nvSpPr>
+          <p:cNvPr id="4" name="Slide Number Placeholder 3"/>
+          <p:cNvSpPr>
+            <a:spLocks noGrp="1"/>
+          </p:cNvSpPr>
+          <p:nvPr>
+            <p:ph type="sldNum" idx="5" sz="quarter"/>
+          </p:nvPr>
+        </p:nvSpPr>
+        <p:spPr/>
+      </p:sp>
+    </p:spTree>
+  </p:cSld>
+  <p:clrMapOvr>
+    <a:masterClrMapping/>
+  </p:clrMapOvr>
+</p:notes>
+</file>
+
+<file path=ppt/notesSlides/notesSlide31.xml><?xml version="1.0" encoding="utf-8"?>
+<p:notes xmlns:a="http://schemas.openxmlformats.org/drawingml/2006/main" xmlns:p="http://schemas.openxmlformats.org/presentationml/2006/main" xmlns:r="http://schemas.openxmlformats.org/officeDocument/2006/relationships">
+  <p:cSld>
+    <p:spTree>
+      <p:nvGrpSpPr>
+        <p:cNvPr id="1" name=""/>
+        <p:cNvGrpSpPr/>
+        <p:nvPr/>
+      </p:nvGrpSpPr>
+      <p:grpSpPr>
+        <a:xfrm>
+          <a:off x="0" y="0"/>
+          <a:ext cx="0" cy="0"/>
+          <a:chOff x="0" y="0"/>
+          <a:chExt cx="0" cy="0"/>
+        </a:xfrm>
+      </p:grpSpPr>
+      <p:sp>
+        <p:nvSpPr>
+          <p:cNvPr id="2" name="Slide Image Placeholder 1"/>
+          <p:cNvSpPr>
+            <a:spLocks noGrp="1"/>
+          </p:cNvSpPr>
+          <p:nvPr>
+            <p:ph type="sldImg" idx="2"/>
+          </p:nvPr>
+        </p:nvSpPr>
+        <p:spPr/>
+      </p:sp>
+      <p:sp>
+        <p:nvSpPr>
+          <p:cNvPr id="3" name="Notes Placeholder 2"/>
+          <p:cNvSpPr>
+            <a:spLocks noGrp="1"/>
+          </p:cNvSpPr>
+          <p:nvPr>
+            <p:ph type="body" idx="3" sz="quarter"/>
+          </p:nvPr>
+        </p:nvSpPr>
+        <p:spPr/>
+        <p:txBody>
+          <a:bodyPr/>
+          <a:lstStyle/>
+          <a:p>
+            <a:r>
+              <a:t>오류가 나는 데 걸린 시간도 단서가 됩니다. ORA-12541은 즉시 돌아오며, 그 포트에서 기다리는 프로세스가 없는 경우입니다. ORA-12170이나 TNS-12535는 한참 기다린 끝에 돌아오며, 방화벽이 패킷을 버리거나 라우팅이 끊긴 경우가 많습니다. 같은 이름 해석 실패라도 tnsping은 TNS 접두어로, SQL*Plus는 ORA 접두어로 보고합니다. 리스너 계층의 두 오류는 정적 등록으로 해결되는 경우가 대부분입니다.</a:t>
+            </a:r>
+          </a:p>
+        </p:txBody>
+      </p:sp>
+      <p:sp>
+        <p:nvSpPr>
+          <p:cNvPr id="4" name="Slide Number Placeholder 3"/>
+          <p:cNvSpPr>
+            <a:spLocks noGrp="1"/>
+          </p:cNvSpPr>
+          <p:nvPr>
+            <p:ph type="sldNum" idx="5" sz="quarter"/>
+          </p:nvPr>
+        </p:nvSpPr>
+        <p:spPr/>
+      </p:sp>
+    </p:spTree>
+  </p:cSld>
+  <p:clrMapOvr>
+    <a:masterClrMapping/>
+  </p:clrMapOvr>
+</p:notes>
+</file>
+
+<file path=ppt/notesSlides/notesSlide32.xml><?xml version="1.0" encoding="utf-8"?>
+<p:notes xmlns:a="http://schemas.openxmlformats.org/drawingml/2006/main" xmlns:p="http://schemas.openxmlformats.org/presentationml/2006/main" xmlns:r="http://schemas.openxmlformats.org/officeDocument/2006/relationships">
+  <p:cSld>
+    <p:spTree>
+      <p:nvGrpSpPr>
+        <p:cNvPr id="1" name=""/>
+        <p:cNvGrpSpPr/>
+        <p:nvPr/>
+      </p:nvGrpSpPr>
+      <p:grpSpPr>
+        <a:xfrm>
+          <a:off x="0" y="0"/>
+          <a:ext cx="0" cy="0"/>
+          <a:chOff x="0" y="0"/>
+          <a:chExt cx="0" cy="0"/>
+        </a:xfrm>
+      </p:grpSpPr>
+      <p:sp>
+        <p:nvSpPr>
+          <p:cNvPr id="2" name="Slide Image Placeholder 1"/>
+          <p:cNvSpPr>
+            <a:spLocks noGrp="1"/>
+          </p:cNvSpPr>
+          <p:nvPr>
+            <p:ph type="sldImg" idx="2"/>
+          </p:nvPr>
+        </p:nvSpPr>
+        <p:spPr/>
+      </p:sp>
+      <p:sp>
+        <p:nvSpPr>
+          <p:cNvPr id="3" name="Notes Placeholder 2"/>
+          <p:cNvSpPr>
+            <a:spLocks noGrp="1"/>
+          </p:cNvSpPr>
+          <p:nvPr>
+            <p:ph type="body" idx="3" sz="quarter"/>
+          </p:nvPr>
+        </p:nvSpPr>
+        <p:spPr/>
+        <p:txBody>
+          <a:bodyPr/>
+          <a:lstStyle/>
+          <a:p>
+            <a:r>
+              <a:t>ORA-01034는 정적 등록 서비스로 접속했는데 인스턴스가 꺼져 있을 때 자주 봅니다. 리스너는 상태를 모르니 일단 넘겨주고, 서버 프로세스가 붙을 인스턴스가 없다고 알려 주는 것입니다. 리두 전송은 아래층의 실패를 ORA-16191 같은 Data Guard 오류로 감싸 기록하기도 합니다. 그럴 때는 전송 프로세스의 트레이스 파일에 원래 Oracle Net 오류가 함께 남아 있으니, alert log만 보고 판단이 서지 않으면 트레이스를 엽니다.</a:t>
+            </a:r>
+          </a:p>
+        </p:txBody>
+      </p:sp>
+      <p:sp>
+        <p:nvSpPr>
+          <p:cNvPr id="4" name="Slide Number Placeholder 3"/>
+          <p:cNvSpPr>
+            <a:spLocks noGrp="1"/>
+          </p:cNvSpPr>
+          <p:nvPr>
+            <p:ph type="sldNum" idx="5" sz="quarter"/>
+          </p:nvPr>
+        </p:nvSpPr>
+        <p:spPr/>
+      </p:sp>
+    </p:spTree>
+  </p:cSld>
+  <p:clrMapOvr>
+    <a:masterClrMapping/>
+  </p:clrMapOvr>
+</p:notes>
+</file>
+
+<file path=ppt/notesSlides/notesSlide33.xml><?xml version="1.0" encoding="utf-8"?>
+<p:notes xmlns:a="http://schemas.openxmlformats.org/drawingml/2006/main" xmlns:p="http://schemas.openxmlformats.org/presentationml/2006/main" xmlns:r="http://schemas.openxmlformats.org/officeDocument/2006/relationships">
+  <p:cSld>
+    <p:spTree>
+      <p:nvGrpSpPr>
+        <p:cNvPr id="1" name=""/>
+        <p:cNvGrpSpPr/>
+        <p:nvPr/>
+      </p:nvGrpSpPr>
+      <p:grpSpPr>
+        <a:xfrm>
+          <a:off x="0" y="0"/>
+          <a:ext cx="0" cy="0"/>
+          <a:chOff x="0" y="0"/>
+          <a:chExt cx="0" cy="0"/>
+        </a:xfrm>
+      </p:grpSpPr>
+      <p:sp>
+        <p:nvSpPr>
+          <p:cNvPr id="2" name="Slide Image Placeholder 1"/>
+          <p:cNvSpPr>
+            <a:spLocks noGrp="1"/>
+          </p:cNvSpPr>
+          <p:nvPr>
+            <p:ph type="sldImg" idx="2"/>
+          </p:nvPr>
+        </p:nvSpPr>
+        <p:spPr/>
+      </p:sp>
+      <p:sp>
+        <p:nvSpPr>
+          <p:cNvPr id="3" name="Notes Placeholder 2"/>
+          <p:cNvSpPr>
+            <a:spLocks noGrp="1"/>
+          </p:cNvSpPr>
+          <p:nvPr>
+            <p:ph type="body" idx="3" sz="quarter"/>
+          </p:nvPr>
+        </p:nvSpPr>
+        <p:spPr/>
+        <p:txBody>
+          <a:bodyPr/>
+          <a:lstStyle/>
+          <a:p>
+            <a:r>
+              <a:t>목적지의 STATUS가 VALID이고 ERROR가 비어 있으면 전송 경로는 살아 있습니다. ERROR 열은 마지막 실패를 그대로 들고 있으므로, 원인을 고친 뒤 다시 조회해서 사라졌는지까지 봐야 합니다. Broker를 구성한 뒤에는 두 VALIDATE 명령이 구성원 사이의 접속과 정적 서비스 접속을 대신 시험해 줍니다. 다만 Broker 구성이 있어야 쓸 수 있으므로 구축 단계에서는 수동 점검이 기준이 되고, 출력 해석은 14장에서 다룹니다.</a:t>
+            </a:r>
+          </a:p>
+        </p:txBody>
+      </p:sp>
+      <p:sp>
+        <p:nvSpPr>
+          <p:cNvPr id="4" name="Slide Number Placeholder 3"/>
+          <p:cNvSpPr>
+            <a:spLocks noGrp="1"/>
+          </p:cNvSpPr>
+          <p:nvPr>
+            <p:ph type="sldNum" idx="5" sz="quarter"/>
+          </p:nvPr>
+        </p:nvSpPr>
+        <p:spPr/>
+      </p:sp>
+    </p:spTree>
+  </p:cSld>
+  <p:clrMapOvr>
+    <a:masterClrMapping/>
+  </p:clrMapOvr>
+</p:notes>
+</file>
+
+<file path=ppt/notesSlides/notesSlide34.xml><?xml version="1.0" encoding="utf-8"?>
+<p:notes xmlns:a="http://schemas.openxmlformats.org/drawingml/2006/main" xmlns:p="http://schemas.openxmlformats.org/presentationml/2006/main" xmlns:r="http://schemas.openxmlformats.org/officeDocument/2006/relationships">
+  <p:cSld>
+    <p:spTree>
+      <p:nvGrpSpPr>
+        <p:cNvPr id="1" name=""/>
+        <p:cNvGrpSpPr/>
+        <p:nvPr/>
+      </p:nvGrpSpPr>
+      <p:grpSpPr>
+        <a:xfrm>
+          <a:off x="0" y="0"/>
+          <a:ext cx="0" cy="0"/>
+          <a:chOff x="0" y="0"/>
+          <a:chExt cx="0" cy="0"/>
+        </a:xfrm>
+      </p:grpSpPr>
+      <p:sp>
+        <p:nvSpPr>
+          <p:cNvPr id="2" name="Slide Image Placeholder 1"/>
+          <p:cNvSpPr>
+            <a:spLocks noGrp="1"/>
+          </p:cNvSpPr>
+          <p:nvPr>
+            <p:ph type="sldImg" idx="2"/>
+          </p:nvPr>
+        </p:nvSpPr>
+        <p:spPr/>
+      </p:sp>
+      <p:sp>
+        <p:nvSpPr>
+          <p:cNvPr id="3" name="Notes Placeholder 2"/>
+          <p:cNvSpPr>
+            <a:spLocks noGrp="1"/>
+          </p:cNvSpPr>
+          <p:nvPr>
+            <p:ph type="body" idx="3" sz="quarter"/>
+          </p:nvPr>
+        </p:nvSpPr>
+        <p:spPr/>
+        <p:txBody>
+          <a:bodyPr/>
+          <a:lstStyle/>
+          <a:p>
+            <a:r>
+              <a:t>Standby 생성은 5장과 6장에서 하는데, 그 과정의 RMAN DUPLICATE는 네트워크, 정적 등록, 인증을 한꺼번에 쓰는 작업입니다. 이 점검표를 건너뛰고 DUPLICATE에서 실패하면 RMAN 오류 메시지 뒤에 숨은 원인을 찾느라 시간이 훨씬 오래 걸립니다. 특히 boston을 NOMOUNT로 띄운 상태에서 chicago 서버로부터 원격 SYSDBA 접속이 되는지 확인해 두면 DUPLICATE의 접속 단계 실패는 거의 사라집니다.</a:t>
+            </a:r>
+          </a:p>
+        </p:txBody>
+      </p:sp>
+      <p:sp>
+        <p:nvSpPr>
+          <p:cNvPr id="4" name="Slide Number Placeholder 3"/>
+          <p:cNvSpPr>
+            <a:spLocks noGrp="1"/>
+          </p:cNvSpPr>
+          <p:nvPr>
+            <p:ph type="sldNum" idx="5" sz="quarter"/>
+          </p:nvPr>
+        </p:nvSpPr>
+        <p:spPr/>
+      </p:sp>
+    </p:spTree>
+  </p:cSld>
+  <p:clrMapOvr>
+    <a:masterClrMapping/>
+  </p:clrMapOvr>
+</p:notes>
+</file>
+
+<file path=ppt/notesSlides/notesSlide35.xml><?xml version="1.0" encoding="utf-8"?>
+<p:notes xmlns:a="http://schemas.openxmlformats.org/drawingml/2006/main" xmlns:p="http://schemas.openxmlformats.org/presentationml/2006/main" xmlns:r="http://schemas.openxmlformats.org/officeDocument/2006/relationships">
+  <p:cSld>
+    <p:spTree>
+      <p:nvGrpSpPr>
+        <p:cNvPr id="1" name=""/>
+        <p:cNvGrpSpPr/>
+        <p:nvPr/>
+      </p:nvGrpSpPr>
+      <p:grpSpPr>
+        <a:xfrm>
+          <a:off x="0" y="0"/>
+          <a:ext cx="0" cy="0"/>
+          <a:chOff x="0" y="0"/>
+          <a:chExt cx="0" cy="0"/>
+        </a:xfrm>
+      </p:grpSpPr>
+      <p:sp>
+        <p:nvSpPr>
+          <p:cNvPr id="2" name="Slide Image Placeholder 1"/>
+          <p:cNvSpPr>
+            <a:spLocks noGrp="1"/>
+          </p:cNvSpPr>
+          <p:nvPr>
+            <p:ph type="sldImg" idx="2"/>
+          </p:nvPr>
+        </p:nvSpPr>
+        <p:spPr/>
+      </p:sp>
+      <p:sp>
+        <p:nvSpPr>
+          <p:cNvPr id="3" name="Notes Placeholder 2"/>
+          <p:cNvSpPr>
+            <a:spLocks noGrp="1"/>
+          </p:cNvSpPr>
+          <p:nvPr>
+            <p:ph type="body" idx="3" sz="quarter"/>
+          </p:nvPr>
+        </p:nvSpPr>
+        <p:spPr/>
+        <p:txBody>
+          <a:bodyPr/>
+          <a:lstStyle/>
+          <a:p>
+            <a:r>
+              <a:t>이 장의 설정은 대부분 평소에는 문제를 드러내지 않습니다. 한쪽 파일만 고쳐도 지금 방향의 전송은 돌아가고, 문제는 갭 해소나 역할 전환 때 터집니다. 중간 방화벽의 유휴 세션 차단 시간이 짧으면 오래 열려 있는 전송 연결이 끊기기도 하므로 네트워크 담당자와 값을 맞춰 둡니다. 서버 교체나 OS 재설치 때는 커널 한도와 SDU 설정이 빠지기 쉬워, 값과 계산 근거를 문서로 남겨 두는 것이 가장 손쉬운 예방책입니다.</a:t>
             </a:r>
           </a:p>
         </p:txBody>
@@ -1797,7 +2581,7 @@
           <a:lstStyle/>
           <a:p>
             <a:r>
-              <a:t>두 번째 항목이 특히 놓치기 쉽습니다. DBA가 자기 셸에서 TNS_ADMIN을 설정하고 파일을 고쳐도, 인스턴스가 다른 환경에서 떠 있었다면 그 파일을 보지 않습니다. 리두 전송은 백그라운드 프로세스가 수행하므로 이 문제가 그대로 드러납니다. 인증 문제가 아무리 봐도 안 풀릴 때 sqlnet.ora의 인증 버전을 확인해 보라는 것도 실무에서 유용한 조언입니다.</a:t>
+              <a:t>Data Guard 서버는 리두를 보내는 클라이언트이면서 접속을 받는 서버이므로 세 파일을 모두 가집니다. 자주 생기는 함정은 파일 위치입니다. Grid 홈, 데이터베이스 홈, 클라이언트 홈이 따로 있는 서버에서는 셸에서 고친 파일과 인스턴스가 읽는 파일이 다를 수 있습니다. 또 전송 프로세스는 인스턴스를 띄울 때의 TNS_ADMIN을 그대로 쓰기 때문에, 이 값을 바꿨다면 인스턴스 재기동까지 해야 새 파일을 읽습니다.</a:t>
             </a:r>
           </a:p>
         </p:txBody>
@@ -1867,7 +2651,7 @@
           <a:lstStyle/>
           <a:p>
             <a:r>
-              <a:t>이것이 이 장에서 정적 등록을 그토록 강조하는 이유입니다. Data Guard 구축의 가장 중요한 단계인 RMAN DUPLICATE가 바로 이 지점에서 막히기 때문입니다. 5장에서 학습자가 실제로 이 문제를 만나게 되므로, 여기서 미리 원리를 이해해 두면 그때 당황하지 않습니다. 정적 등록의 필요성을 말로만 설명하면 잘 와닿지 않습니다. 그래서 실습 03에서 정적 등록을 실제로 제거하고 NOMOUNT로 내려 접속이 막히는 것을 눈으로 보게 합니다. 그 뒤 복원해서 같은 NOMOUNT 상태인데 접속이 되는 것을 확인하면 원리가 확실히 각인됩니다.</a:t>
+              <a:t>접속 기술자는 주소와 대상, 이 두 정보로 이뤄집니다. 주소는 리스너가 기다리는 곳이고, 대상은 리스너가 알아듣는 서비스 이름입니다. 둘 중 어느 쪽이 틀렸느냐에 따라 오류 번호가 달라집니다. 주소가 틀리면 리스너가 없다거나 시간이 초과됐다는 오류가 나고, 서비스가 틀리면 리스너는 응답하지만 그런 서비스는 모른다고 답합니다. 3.8절의 오류 지도는 이 구분 위에 서 있습니다.</a:t>
             </a:r>
           </a:p>
         </p:txBody>
@@ -1937,7 +2721,7 @@
           <a:lstStyle/>
           <a:p>
             <a:r>
-              <a:t>마지막 항목이 중요합니다. 두 노드의 DB_NAME이 chicago로 같기 때문에 DB_NAME을 쓰면 구별이 되지 않습니다. 구별하는 이름은 DB_UNIQUE_NAME이며, listener.ora의 GLOBAL_DBNAME도 이 값을 씁니다. 1장에서 DB_UNIQUE_NAME이 "둘을 구별하는 유일한 이름"이라고 한 것이 여기서 또 한 번 확인됩니다. SID_DESC가 노드마다 두 건인 것도 짚어 주십시오. 서비스 이름만 다르고 SID_NAME은 같습니다. 하나는 일반 접속용, 하나는 Broker용이며 같은 인스턴스를 가리킵니다.</a:t>
+              <a:t>서버에 있는 파일만으로 이름이 풀리는 로컬 이름 지정이 Data Guard에서 가장 다루기 쉽습니다. 전송이 실패했을 때 무엇을 읽었는지 쉽게 추적할 수 있기 때문입니다. Broker는 목적지 파라미터를 직접 관리할 때 별칭 대신 접속 기술자 전체를 SERVICE 값에 넣는데, 이렇게 하면 이름 해석 단계가 없어집니다. DNS가 불안정한 구간이라면 호스트 자리에 IP를 써서 DNS 장애가 전송을 멈추지 않게 하는 방법도 쓰입니다.</a:t>
             </a:r>
           </a:p>
         </p:txBody>
@@ -2007,7 +2791,7 @@
           <a:lstStyle/>
           <a:p>
             <a:r>
-              <a:t>이 장면이 tnsping의 한계를 가장 분명하게 보여 줍니다. 리스너는 살아서 응답하지만 요청한 서비스를 모릅니다. tnsping은 리스너 생존까지만 보므로 이 차이를 잡아내지 못합니다. 실습 03에서 학습자가 직접 이 상태를 만들어 보게 됩니다. 리스너가 살아 있다는 것과 서비스를 안다는 것이 다르다는 점이 핵심입니다. 실습 03에서 학습자가 직접 이 상태를 만들어 보게 되며, 그 뒤로는 ORA-12514를 보면 곧바로 lsnrctl status를 확인하게 됩니다.</a:t>
+              <a:t>Primary와 Standby는 DB_NAME이 같으므로 DB_NAME을 서비스 이름으로 쓰면 어느 쪽에 붙을지 정해지지 않고, 구성원마다 다른 DB_UNIQUE_NAME 기반 서비스를 써야 합니다. 자기 별칭은 RMAN의 target 접속이나 원격 방식의 자기 점검에 쓰입니다. 같은 서버를 한 곳에서는 짧은 이름으로, 다른 곳에서는 도메인을 붙여 적어 두면 지금은 둘 다 풀려도 hosts 파일이나 DNS가 바뀌는 날 한쪽만 깨지니 표기를 하나로 맞춥니다.</a:t>
             </a:r>
           </a:p>
         </p:txBody>
@@ -2077,7 +2861,7 @@
           <a:lstStyle/>
           <a:p>
             <a:r>
-              <a:t>두 오류의 차이를 정확히 짚어 주십시오. ORA-12514는 리스너가 서비스 자체를 모르는 경우이고, ORA-12528은 알지만 인스턴스가 접속을 거부하는 경우입니다. 원인은 다르지만 해법은 같습니다. 정적 등록을 넣으면 리스너가 "이 SID로 넘겨라"는 근거를 갖게 되어 두 경우 모두 해결됩니다. 두 오류의 원인은 다르지만 해법은 같습니다. 정적 등록을 넣으면 리스너가 '이 SID로 넘겨라'는 근거를 갖게 되어 두 경우 모두 해결됩니다. 그래서 실무에서는 ORA-12514든 ORA-12528이든 listener.ora부터 확인합니다.</a:t>
+              <a:t>LOG_ARCHIVE_DEST_2에 SERVICE=boston이라고 적으면 그 boston은 별칭입니다. 별칭이 풀려 나온 기술자의 SERVICE_NAME이 리스너에서 다시 서비스로 찾아지고, 같은 줄의 DB_UNIQUE_NAME=boston은 상대 데이터베이스의 실제 고유 이름입니다. 셋을 같은 글자로 맞춰 두는 구성이 많아 차이가 보이지 않는데, 별칭만 STBY1로 바꿔 보면 어느 값이 어느 층인지 드러납니다. DB_DOMAIN을 쓰면 서비스 이름에 도메인이 붙는 것도 같이 챙겨야 합니다.</a:t>
             </a:r>
           </a:p>
         </p:txBody>
@@ -2147,7 +2931,7 @@
           <a:lstStyle/>
           <a:p>
             <a:r>
-              <a:t>이 슬라이드가 3장의 결론입니다. 인스턴스는 여전히 NOMOUNT인데 원격 SYS 접속이 성립했습니다. 정적 등록 덕분에 리스너가 인스턴스 상태를 따지지 않고 접속을 넘겨준 것입니다. 실습 03에서 이 세 단계(제거 → NOMOUNT → 복원)를 순서대로 밟으면 원리가 확실히 각인됩니다. 특히 마지막 단계에서 V$INSTANCE.STATUS가 STARTED인 것을 직접 확인하게 하십시오. NOMOUNT인데 접속됐다는 사실이 눈으로 확인되는 순간입니다.</a:t>
+              <a:t>교재 예제에는 FAILOVER=on이 적혀 있지만 ADDRESS_LIST를 쓰면 이미 켜져 있는 값입니다. 교재는 ADDRESS_LIST 없이 주소만 나열하면 꺼진다고 설명하는데, 19c Net Services Reference 기준으로는 DESCRIPTION 수준에서도 기본값이 on입니다. 중요한 함정은 Standby 리스너도 살아 있다는 사실입니다. 리스너에만 닿으면 되는 구조라서, 어디서나 등록되는 서비스 이름을 쓰면 클라이언트가 Standby에 붙어 버립니다. 역할별 서비스는 16장에서 만듭니다.</a:t>
             </a:r>
           </a:p>
         </p:txBody>
@@ -5397,7 +6181,7 @@
                 </a:solidFill>
                 <a:latin typeface="맑은 고딕"/>
               </a:rPr>
-              <a:t>Oracle Net Services for Data Guard — 전송이 성립하기 위한 받침</a:t>
+              <a:t>이름, 리스너, 인증, 그리고 양방향 연결</a:t>
             </a:r>
           </a:p>
         </p:txBody>
@@ -5436,7 +6220,7 @@
                 </a:solidFill>
                 <a:latin typeface="맑은 고딕"/>
               </a:rPr>
-              <a:t>정적 등록 · 패스워드 파일 · DG_CONFIG · 오류 계층 지도</a:t>
+              <a:t>제3장</a:t>
             </a:r>
           </a:p>
         </p:txBody>
@@ -5537,7 +6321,7 @@
                 </a:solidFill>
                 <a:latin typeface="맑은 고딕"/>
               </a:rPr>
-              <a:t>동적 등록의 한계</a:t>
+              <a:t>접속 기술자의 두 요소</a:t>
             </a:r>
           </a:p>
         </p:txBody>
@@ -5576,7 +6360,7 @@
                 </a:solidFill>
                 <a:latin typeface="맑은 고딕"/>
               </a:rPr>
-              <a:t>왜 정적 등록이 필요한가</a:t>
+              <a:t>어디로 가서, 누구를 찾는가</a:t>
             </a:r>
           </a:p>
         </p:txBody>
@@ -5615,7 +6399,7 @@
                 </a:solidFill>
                 <a:latin typeface="맑은 고딕"/>
               </a:rPr>
-              <a:t>•  동적 등록: 인스턴스가 기동하며 스스로 리스너에 알린다</a:t>
+              <a:t>•  ADDRESS: 프로토콜, 호스트, 포트</a:t>
             </a:r>
           </a:p>
           <a:p>
@@ -5631,7 +6415,7 @@
                 </a:solidFill>
                 <a:latin typeface="맑은 고딕"/>
               </a:rPr>
-              <a:t>•  전제: 인스턴스가 등록할 수 있는 상태여야 한다</a:t>
+              <a:t>•  CONNECT_DATA: SERVICE_NAME 또는 SID</a:t>
             </a:r>
           </a:p>
           <a:p>
@@ -5647,7 +6431,7 @@
                 </a:solidFill>
                 <a:latin typeface="맑은 고딕"/>
               </a:rPr>
-              <a:t>•  NOMOUNT에서는 정상 등록이 안 되고, 되더라도 status BLOCKED</a:t>
+              <a:t>•  주소가 틀리면 리스너에 닿지 못함</a:t>
             </a:r>
           </a:p>
           <a:p>
@@ -5663,23 +6447,7 @@
                 </a:solidFill>
                 <a:latin typeface="맑은 고딕"/>
               </a:rPr>
-              <a:t>•  5장 RMAN DUPLICATE는 auxiliary가 NOMOUNT여야 하고 원격 접속이 필요하다</a:t>
-            </a:r>
-          </a:p>
-          <a:p>
-            <a:pPr algn="l">
-              <a:spcAft>
-                <a:spcPts val="1000"/>
-              </a:spcAft>
-            </a:pPr>
-            <a:r>
-              <a:rPr sz="1700" b="0">
-                <a:solidFill>
-                  <a:srgbClr val="222222"/>
-                </a:solidFill>
-                <a:latin typeface="맑은 고딕"/>
-              </a:rPr>
-              <a:t>•  → 동적 등록만으로는 여기서 막힌다</a:t>
+              <a:t>•  서비스가 틀리면 리스너가 거절함</a:t>
             </a:r>
           </a:p>
         </p:txBody>
@@ -5780,7 +6548,7 @@
                 </a:solidFill>
                 <a:latin typeface="맑은 고딕"/>
               </a:rPr>
-              <a:t>SID_LIST_LISTENER의 구조</a:t>
+              <a:t>이름 해석 방법</a:t>
             </a:r>
           </a:p>
         </p:txBody>
@@ -5819,7 +6587,7 @@
                 </a:solidFill>
                 <a:latin typeface="맑은 고딕"/>
               </a:rPr>
-              <a:t>세 요소</a:t>
+              <a:t>이 과정은 로컬 이름 지정을 쓴다</a:t>
             </a:r>
           </a:p>
         </p:txBody>
@@ -5858,7 +6626,7 @@
                 </a:solidFill>
                 <a:latin typeface="맑은 고딕"/>
               </a:rPr>
-              <a:t>•  GLOBAL_DBNAME — 클라이언트가 SERVICE_NAME으로 요청할 이름</a:t>
+              <a:t>•  로컬(tnsnames.ora), 디렉터리(LDAP)</a:t>
             </a:r>
           </a:p>
           <a:p>
@@ -5874,7 +6642,7 @@
                 </a:solidFill>
                 <a:latin typeface="맑은 고딕"/>
               </a:rPr>
-              <a:t>•  ORACLE_HOME — 리스너가 인스턴스에 연결할 때 쓸 경로</a:t>
+              <a:t>•  Easy Connect, 외부 이름 서비스</a:t>
             </a:r>
           </a:p>
           <a:p>
@@ -5890,7 +6658,7 @@
                 </a:solidFill>
                 <a:latin typeface="맑은 고딕"/>
               </a:rPr>
-              <a:t>•  SID_NAME — 실제 인스턴스의 SID (그 서버의 ORACLE_SID)</a:t>
+              <a:t>•  순서는 sqlnet.ora의 NAMES.DIRECTORY_PATH</a:t>
             </a:r>
           </a:p>
           <a:p>
@@ -5906,7 +6674,7 @@
                 </a:solidFill>
                 <a:latin typeface="맑은 고딕"/>
               </a:rPr>
-              <a:t>•  실습 환경은 노드마다 SID_DESC 두 건 (일반용 + _DGMGRL)</a:t>
+              <a:t>•  Broker는 별칭 대신 완전한 기술자를 쓰기도 함</a:t>
             </a:r>
           </a:p>
           <a:p>
@@ -5922,7 +6690,7 @@
                 </a:solidFill>
                 <a:latin typeface="맑은 고딕"/>
               </a:rPr>
-              <a:t>•  GLOBAL_DBNAME은 DB_NAME이 아니라 DB_UNIQUE_NAME을 쓴다</a:t>
+              <a:t>•  호스트에 IP를 쓰면 DNS 조회를 건너뜀</a:t>
             </a:r>
           </a:p>
         </p:txBody>
@@ -6023,7 +6791,7 @@
                 </a:solidFill>
                 <a:latin typeface="맑은 고딕"/>
               </a:rPr>
-              <a:t>정적 등록을 제거하면</a:t>
+              <a:t>Data Guard용 tnsnames.ora</a:t>
             </a:r>
           </a:p>
         </p:txBody>
@@ -6062,7 +6830,7 @@
                 </a:solidFill>
                 <a:latin typeface="맑은 고딕"/>
               </a:rPr>
-              <a:t>실측 ①  ORA-12514</a:t>
+              <a:t>모든 구성원 별칭을 모든 서버에</a:t>
             </a:r>
           </a:p>
         </p:txBody>
@@ -6101,7 +6869,7 @@
                 </a:solidFill>
                 <a:latin typeface="맑은 고딕"/>
               </a:rPr>
-              <a:t>•  SID_LIST_LISTENER를 빼고 리스너 재기동</a:t>
+              <a:t>•  CHICAGO, BOSTON 별칭을 양쪽에 같은 내용으로</a:t>
             </a:r>
           </a:p>
           <a:p>
@@ -6117,7 +6885,7 @@
                 </a:solidFill>
                 <a:latin typeface="맑은 고딕"/>
               </a:rPr>
-              <a:t>•  "The listener supports no services"</a:t>
+              <a:t>•  자기 자신을 가리키는 별칭도 둔다</a:t>
             </a:r>
           </a:p>
           <a:p>
@@ -6133,7 +6901,7 @@
                 </a:solidFill>
                 <a:latin typeface="맑은 고딕"/>
               </a:rPr>
-              <a:t>•  접속 시도 → ORA-12514: listener does not currently know of service requested</a:t>
+              <a:t>•  SERVICE_NAME은 DB_UNIQUE_NAME 기반으로</a:t>
             </a:r>
           </a:p>
           <a:p>
@@ -6149,23 +6917,7 @@
                 </a:solidFill>
                 <a:latin typeface="맑은 고딕"/>
               </a:rPr>
-              <a:t>•  그런데 tnsping은 여전히 OK</a:t>
-            </a:r>
-          </a:p>
-          <a:p>
-            <a:pPr algn="l">
-              <a:spcAft>
-                <a:spcPts val="1000"/>
-              </a:spcAft>
-            </a:pPr>
-            <a:r>
-              <a:rPr sz="1700" b="0">
-                <a:solidFill>
-                  <a:srgbClr val="222222"/>
-                </a:solidFill>
-                <a:latin typeface="맑은 고딕"/>
-              </a:rPr>
-              <a:t>•  → "tnsping OK인데 접속 실패"의 전형적인 모습</a:t>
+              <a:t>•  호스트 이름 표기는 한 가지로 통일</a:t>
             </a:r>
           </a:p>
         </p:txBody>
@@ -6266,7 +7018,7 @@
                 </a:solidFill>
                 <a:latin typeface="맑은 고딕"/>
               </a:rPr>
-              <a:t>NOMOUNT로 내리면</a:t>
+              <a:t>세 가지 이름의 층</a:t>
             </a:r>
           </a:p>
         </p:txBody>
@@ -6305,7 +7057,7 @@
                 </a:solidFill>
                 <a:latin typeface="맑은 고딕"/>
               </a:rPr>
-              <a:t>실측 ②  ORA-12528 / status BLOCKED</a:t>
+              <a:t>같은 boston이라도 층이 다르다</a:t>
             </a:r>
           </a:p>
         </p:txBody>
@@ -6344,7 +7096,7 @@
                 </a:solidFill>
                 <a:latin typeface="맑은 고딕"/>
               </a:rPr>
-              <a:t>•  boston을 STARTUP NOMOUNT</a:t>
+              <a:t>•  넷 서비스 이름: tnsnames.ora의 별칭</a:t>
             </a:r>
           </a:p>
           <a:p>
@@ -6360,7 +7112,7 @@
                 </a:solidFill>
                 <a:latin typeface="맑은 고딕"/>
               </a:rPr>
-              <a:t>•  접속 시도 → ORA-12528: all appropriate instances are blocking new connections</a:t>
+              <a:t>•  서비스 이름: 인스턴스가 리스너에 등록</a:t>
             </a:r>
           </a:p>
           <a:p>
@@ -6376,7 +7128,7 @@
                 </a:solidFill>
                 <a:latin typeface="맑은 고딕"/>
               </a:rPr>
-              <a:t>•  lsnrctl status → Instance "boston", status BLOCKED</a:t>
+              <a:t>•  DB_UNIQUE_NAME: 구성원 고유 이름</a:t>
             </a:r>
           </a:p>
           <a:p>
@@ -6392,23 +7144,7 @@
                 </a:solidFill>
                 <a:latin typeface="맑은 고딕"/>
               </a:rPr>
-              <a:t>•  오류 번호가 12514에서 12528로 바뀌었다</a:t>
-            </a:r>
-          </a:p>
-          <a:p>
-            <a:pPr algn="l">
-              <a:spcAft>
-                <a:spcPts val="1000"/>
-              </a:spcAft>
-            </a:pPr>
-            <a:r>
-              <a:rPr sz="1700" b="0">
-                <a:solidFill>
-                  <a:srgbClr val="222222"/>
-                </a:solidFill>
-                <a:latin typeface="맑은 고딕"/>
-              </a:rPr>
-              <a:t>•  리스너는 서비스를 알게 됐지만 인스턴스가 막고 있다</a:t>
+              <a:t>•  DEST의 SERVICE는 별칭, DB_UNIQUE_NAME은 실제 이름</a:t>
             </a:r>
           </a:p>
         </p:txBody>
@@ -6509,7 +7245,7 @@
                 </a:solidFill>
                 <a:latin typeface="맑은 고딕"/>
               </a:rPr>
-              <a:t>정적 등록을 복원하면</a:t>
+              <a:t>역할 전환에 대비한 접속</a:t>
             </a:r>
           </a:p>
         </p:txBody>
@@ -6548,7 +7284,7 @@
                 </a:solidFill>
                 <a:latin typeface="맑은 고딕"/>
               </a:rPr>
-              <a:t>실측 ③  status UNKNOWN</a:t>
+              <a:t>접속 시 페일오버와 대기 상한</a:t>
             </a:r>
           </a:p>
         </p:txBody>
@@ -6587,7 +7323,7 @@
                 </a:solidFill>
                 <a:latin typeface="맑은 고딕"/>
               </a:rPr>
-              <a:t>•  listener.ora 복원 후 재기동</a:t>
+              <a:t>•  ADDRESS_LIST에 두 호스트를 함께</a:t>
             </a:r>
           </a:p>
           <a:p>
@@ -6603,7 +7339,7 @@
                 </a:solidFill>
                 <a:latin typeface="맑은 고딕"/>
               </a:rPr>
-              <a:t>•  Instance "boston", status UNKNOWN</a:t>
+              <a:t>•  앞 리스너가 응답 없으면 다음 주소로</a:t>
             </a:r>
           </a:p>
           <a:p>
@@ -6619,7 +7355,7 @@
                 </a:solidFill>
                 <a:latin typeface="맑은 고딕"/>
               </a:rPr>
-              <a:t>•  접속 성공 — V$INSTANCE.STATUS = STARTED (여전히 NOMOUNT!)</a:t>
+              <a:t>•  FAILOVER=on은 기본값이라 생략 가능</a:t>
             </a:r>
           </a:p>
           <a:p>
@@ -6635,7 +7371,23 @@
                 </a:solidFill>
                 <a:latin typeface="맑은 고딕"/>
               </a:rPr>
-              <a:t>•  ★ 5장 RMAN DUPLICATE가 가능한 이유가 정확히 이것이다</a:t>
+              <a:t>•  SQLNET.OUTBOUND_CONNECT_TIMEOUT으로 빨리 포기</a:t>
+            </a:r>
+          </a:p>
+          <a:p>
+            <a:pPr algn="l">
+              <a:spcAft>
+                <a:spcPts val="1000"/>
+              </a:spcAft>
+            </a:pPr>
+            <a:r>
+              <a:rPr sz="1700" b="0">
+                <a:solidFill>
+                  <a:srgbClr val="222222"/>
+                </a:solidFill>
+                <a:latin typeface="맑은 고딕"/>
+              </a:rPr>
+              <a:t>•  Primary에서만 뜨는 서비스 이름을 쓴다</a:t>
             </a:r>
           </a:p>
         </p:txBody>
@@ -6667,7 +7419,7 @@
         <p:spPr>
           <a:xfrm>
             <a:off x="0" y="0"/>
-            <a:ext cx="12191695" cy="1005840"/>
+            <a:ext cx="12191695" cy="6858000"/>
           </a:xfrm>
           <a:prstGeom prst="rect">
             <a:avLst/>
@@ -6710,8 +7462,8 @@
         </p:nvSpPr>
         <p:spPr>
           <a:xfrm>
-            <a:off x="548640" y="91440"/>
-            <a:ext cx="10972800" cy="777240"/>
+            <a:off x="822960" y="2011680"/>
+            <a:ext cx="10515600" cy="1097280"/>
           </a:xfrm>
           <a:prstGeom prst="rect">
             <a:avLst/>
@@ -6730,13 +7482,13 @@
               </a:spcAft>
             </a:pPr>
             <a:r>
-              <a:rPr sz="2600" b="1">
+              <a:rPr sz="4000" b="1">
                 <a:solidFill>
                   <a:srgbClr val="FFFFFF"/>
                 </a:solidFill>
                 <a:latin typeface="맑은 고딕"/>
               </a:rPr>
-              <a:t>READY · BLOCKED · UNKNOWN</a:t>
+              <a:t>3.4</a:t>
             </a:r>
           </a:p>
         </p:txBody>
@@ -6749,8 +7501,8 @@
         </p:nvSpPr>
         <p:spPr>
           <a:xfrm>
-            <a:off x="640080" y="1078992"/>
-            <a:ext cx="10881360" cy="457200"/>
+            <a:off x="822960" y="3017520"/>
+            <a:ext cx="10515600" cy="914400"/>
           </a:xfrm>
           <a:prstGeom prst="rect">
             <a:avLst/>
@@ -6769,27 +7521,71 @@
               </a:spcAft>
             </a:pPr>
             <a:r>
-              <a:rPr sz="1500" b="0">
-                <a:solidFill>
-                  <a:srgbClr val="5A6672"/>
-                </a:solidFill>
-                <a:latin typeface="맑은 고딕"/>
-              </a:rPr>
-              <a:t>status 세 가지</a:t>
-            </a:r>
-          </a:p>
-        </p:txBody>
-      </p:sp>
-      <p:sp>
-        <p:nvSpPr>
-          <p:cNvPr id="5" name="TextBox 4"/>
+              <a:rPr sz="2800" b="1">
+                <a:solidFill>
+                  <a:srgbClr val="FFFFFF"/>
+                </a:solidFill>
+                <a:latin typeface="맑은 고딕"/>
+              </a:rPr>
+              <a:t>리스너와 서비스 등록</a:t>
+            </a:r>
+          </a:p>
+        </p:txBody>
+      </p:sp>
+      <p:sp>
+        <p:nvSpPr>
+          <p:cNvPr id="5" name="Rectangle 4"/>
+          <p:cNvSpPr/>
+          <p:nvPr/>
+        </p:nvSpPr>
+        <p:spPr>
+          <a:xfrm>
+            <a:off x="822960" y="4114800"/>
+            <a:ext cx="5486400" cy="54864"/>
+          </a:xfrm>
+          <a:prstGeom prst="rect">
+            <a:avLst/>
+          </a:prstGeom>
+          <a:solidFill>
+            <a:srgbClr val="FFFFFF"/>
+          </a:solidFill>
+          <a:ln>
+            <a:noFill/>
+          </a:ln>
+          <a:effectLst/>
+        </p:spPr>
+        <p:style>
+          <a:lnRef idx="1">
+            <a:schemeClr val="accent1"/>
+          </a:lnRef>
+          <a:fillRef idx="3">
+            <a:schemeClr val="accent1"/>
+          </a:fillRef>
+          <a:effectRef idx="2">
+            <a:schemeClr val="accent1"/>
+          </a:effectRef>
+          <a:fontRef idx="minor">
+            <a:schemeClr val="lt1"/>
+          </a:fontRef>
+        </p:style>
+        <p:txBody>
+          <a:bodyPr rtlCol="0" anchor="ctr"/>
+          <a:lstStyle/>
+          <a:p>
+            <a:pPr algn="ctr"/>
+          </a:p>
+        </p:txBody>
+      </p:sp>
+      <p:sp>
+        <p:nvSpPr>
+          <p:cNvPr id="6" name="TextBox 5"/>
           <p:cNvSpPr txBox="1"/>
           <p:nvPr/>
         </p:nvSpPr>
         <p:spPr>
           <a:xfrm>
-            <a:off x="640080" y="1737360"/>
-            <a:ext cx="10881360" cy="4754880"/>
+            <a:off x="822960" y="4297680"/>
+            <a:ext cx="10058400" cy="2011680"/>
           </a:xfrm>
           <a:prstGeom prst="rect">
             <a:avLst/>
@@ -6804,81 +7600,49 @@
           <a:p>
             <a:pPr algn="l">
               <a:spcAft>
-                <a:spcPts val="1000"/>
-              </a:spcAft>
-            </a:pPr>
-            <a:r>
-              <a:rPr sz="1700" b="0">
-                <a:solidFill>
-                  <a:srgbClr val="222222"/>
-                </a:solidFill>
-                <a:latin typeface="맑은 고딕"/>
-              </a:rPr>
-              <a:t>•  READY — 동적 등록, 인스턴스 OPEN, 접속 가능</a:t>
-            </a:r>
-          </a:p>
-          <a:p>
-            <a:pPr algn="l">
-              <a:spcAft>
-                <a:spcPts val="1000"/>
-              </a:spcAft>
-            </a:pPr>
-            <a:r>
-              <a:rPr sz="1700" b="0">
-                <a:solidFill>
-                  <a:srgbClr val="222222"/>
-                </a:solidFill>
-                <a:latin typeface="맑은 고딕"/>
-              </a:rPr>
-              <a:t>•  BLOCKED — 동적 등록, NOMOUNT/MOUNT, 접속 불가 (ORA-12528)</a:t>
-            </a:r>
-          </a:p>
-          <a:p>
-            <a:pPr algn="l">
-              <a:spcAft>
-                <a:spcPts val="1000"/>
-              </a:spcAft>
-            </a:pPr>
-            <a:r>
-              <a:rPr sz="1700" b="0">
-                <a:solidFill>
-                  <a:srgbClr val="222222"/>
-                </a:solidFill>
-                <a:latin typeface="맑은 고딕"/>
-              </a:rPr>
-              <a:t>•  UNKNOWN — 정적 등록, 리스너가 인스턴스 상태를 모름, 시도해 봐야 안다</a:t>
-            </a:r>
-          </a:p>
-          <a:p>
-            <a:pPr algn="l">
-              <a:spcAft>
-                <a:spcPts val="1000"/>
-              </a:spcAft>
-            </a:pPr>
-            <a:r>
-              <a:rPr sz="1700" b="0">
-                <a:solidFill>
-                  <a:srgbClr val="222222"/>
-                </a:solidFill>
-                <a:latin typeface="맑은 고딕"/>
-              </a:rPr>
-              <a:t>•  실측: Service "chicago" has 2 instance(s) — UNKNOWN + READY</a:t>
-            </a:r>
-          </a:p>
-          <a:p>
-            <a:pPr algn="l">
-              <a:spcAft>
-                <a:spcPts val="1000"/>
-              </a:spcAft>
-            </a:pPr>
-            <a:r>
-              <a:rPr sz="1700" b="0">
-                <a:solidFill>
-                  <a:srgbClr val="222222"/>
-                </a:solidFill>
-                <a:latin typeface="맑은 고딕"/>
-              </a:rPr>
-              <a:t>•  같은 인스턴스를 두 경로로 알고 있는 정상적인 모습</a:t>
+                <a:spcPts val="800"/>
+              </a:spcAft>
+            </a:pPr>
+            <a:r>
+              <a:rPr sz="1600" b="0">
+                <a:solidFill>
+                  <a:srgbClr val="FFFFFF"/>
+                </a:solidFill>
+                <a:latin typeface="맑은 고딕"/>
+              </a:rPr>
+              <a:t>•  동적 등록과 그 한계</a:t>
+            </a:r>
+          </a:p>
+          <a:p>
+            <a:pPr algn="l">
+              <a:spcAft>
+                <a:spcPts val="800"/>
+              </a:spcAft>
+            </a:pPr>
+            <a:r>
+              <a:rPr sz="1600" b="0">
+                <a:solidFill>
+                  <a:srgbClr val="FFFFFF"/>
+                </a:solidFill>
+                <a:latin typeface="맑은 고딕"/>
+              </a:rPr>
+              <a:t>•  정적 등록 SID_LIST와 GLOBAL_DBNAME</a:t>
+            </a:r>
+          </a:p>
+          <a:p>
+            <a:pPr algn="l">
+              <a:spcAft>
+                <a:spcPts val="800"/>
+              </a:spcAft>
+            </a:pPr>
+            <a:r>
+              <a:rPr sz="1600" b="0">
+                <a:solidFill>
+                  <a:srgbClr val="FFFFFF"/>
+                </a:solidFill>
+                <a:latin typeface="맑은 고딕"/>
+              </a:rPr>
+              <a:t>•  Broker의 _DGMGRL 서비스</a:t>
             </a:r>
           </a:p>
         </p:txBody>
@@ -6910,7 +7674,7 @@
         <p:spPr>
           <a:xfrm>
             <a:off x="0" y="0"/>
-            <a:ext cx="12191695" cy="6858000"/>
+            <a:ext cx="12191695" cy="1005840"/>
           </a:xfrm>
           <a:prstGeom prst="rect">
             <a:avLst/>
@@ -6953,8 +7717,8 @@
         </p:nvSpPr>
         <p:spPr>
           <a:xfrm>
-            <a:off x="822960" y="2011680"/>
-            <a:ext cx="10515600" cy="1097280"/>
+            <a:off x="548640" y="91440"/>
+            <a:ext cx="10972800" cy="777240"/>
           </a:xfrm>
           <a:prstGeom prst="rect">
             <a:avLst/>
@@ -6973,13 +7737,13 @@
               </a:spcAft>
             </a:pPr>
             <a:r>
-              <a:rPr sz="4000" b="1">
+              <a:rPr sz="2600" b="1">
                 <a:solidFill>
                   <a:srgbClr val="FFFFFF"/>
                 </a:solidFill>
                 <a:latin typeface="맑은 고딕"/>
               </a:rPr>
-              <a:t>3.4</a:t>
+              <a:t>listener.ora의 구조</a:t>
             </a:r>
           </a:p>
         </p:txBody>
@@ -6992,8 +7756,8 @@
         </p:nvSpPr>
         <p:spPr>
           <a:xfrm>
-            <a:off x="822960" y="3017520"/>
-            <a:ext cx="10515600" cy="914400"/>
+            <a:off x="640080" y="1078992"/>
+            <a:ext cx="10881360" cy="457200"/>
           </a:xfrm>
           <a:prstGeom prst="rect">
             <a:avLst/>
@@ -7012,71 +7776,27 @@
               </a:spcAft>
             </a:pPr>
             <a:r>
-              <a:rPr sz="2800" b="1">
-                <a:solidFill>
-                  <a:srgbClr val="FFFFFF"/>
-                </a:solidFill>
-                <a:latin typeface="맑은 고딕"/>
-              </a:rPr>
-              <a:t>LOG_ARCHIVE_CONFIG와 DG_CONFIG</a:t>
-            </a:r>
-          </a:p>
-        </p:txBody>
-      </p:sp>
-      <p:sp>
-        <p:nvSpPr>
-          <p:cNvPr id="5" name="Rectangle 4"/>
-          <p:cNvSpPr/>
-          <p:nvPr/>
-        </p:nvSpPr>
-        <p:spPr>
-          <a:xfrm>
-            <a:off x="822960" y="4114800"/>
-            <a:ext cx="5486400" cy="54864"/>
-          </a:xfrm>
-          <a:prstGeom prst="rect">
-            <a:avLst/>
-          </a:prstGeom>
-          <a:solidFill>
-            <a:srgbClr val="FFFFFF"/>
-          </a:solidFill>
-          <a:ln>
-            <a:noFill/>
-          </a:ln>
-          <a:effectLst/>
-        </p:spPr>
-        <p:style>
-          <a:lnRef idx="1">
-            <a:schemeClr val="accent1"/>
-          </a:lnRef>
-          <a:fillRef idx="3">
-            <a:schemeClr val="accent1"/>
-          </a:fillRef>
-          <a:effectRef idx="2">
-            <a:schemeClr val="accent1"/>
-          </a:effectRef>
-          <a:fontRef idx="minor">
-            <a:schemeClr val="lt1"/>
-          </a:fontRef>
-        </p:style>
-        <p:txBody>
-          <a:bodyPr rtlCol="0" anchor="ctr"/>
-          <a:lstStyle/>
-          <a:p>
-            <a:pPr algn="ctr"/>
-          </a:p>
-        </p:txBody>
-      </p:sp>
-      <p:sp>
-        <p:nvSpPr>
-          <p:cNvPr id="6" name="TextBox 5"/>
+              <a:rPr sz="1500" b="0">
+                <a:solidFill>
+                  <a:srgbClr val="5A6672"/>
+                </a:solidFill>
+                <a:latin typeface="맑은 고딕"/>
+              </a:rPr>
+              <a:t>기본값만으로도 리스너는 뜬다</a:t>
+            </a:r>
+          </a:p>
+        </p:txBody>
+      </p:sp>
+      <p:sp>
+        <p:nvSpPr>
+          <p:cNvPr id="5" name="TextBox 4"/>
           <p:cNvSpPr txBox="1"/>
           <p:nvPr/>
         </p:nvSpPr>
         <p:spPr>
           <a:xfrm>
-            <a:off x="822960" y="4297680"/>
-            <a:ext cx="10058400" cy="2011680"/>
+            <a:off x="640080" y="1737360"/>
+            <a:ext cx="10881360" cy="4754880"/>
           </a:xfrm>
           <a:prstGeom prst="rect">
             <a:avLst/>
@@ -7091,49 +7811,65 @@
           <a:p>
             <a:pPr algn="l">
               <a:spcAft>
-                <a:spcPts val="800"/>
-              </a:spcAft>
-            </a:pPr>
-            <a:r>
-              <a:rPr sz="1600" b="0">
-                <a:solidFill>
-                  <a:srgbClr val="FFFFFF"/>
-                </a:solidFill>
-                <a:latin typeface="맑은 고딕"/>
-              </a:rPr>
-              <a:t>•  무엇을 선언하는가</a:t>
-            </a:r>
-          </a:p>
-          <a:p>
-            <a:pPr algn="l">
-              <a:spcAft>
-                <a:spcPts val="800"/>
-              </a:spcAft>
-            </a:pPr>
-            <a:r>
-              <a:rPr sz="1600" b="0">
-                <a:solidFill>
-                  <a:srgbClr val="FFFFFF"/>
-                </a:solidFill>
-                <a:latin typeface="맑은 고딕"/>
-              </a:rPr>
-              <a:t>•  비우면 무슨 일이 일어나는가 (그리고 안 일어나는가)</a:t>
-            </a:r>
-          </a:p>
-          <a:p>
-            <a:pPr algn="l">
-              <a:spcAft>
-                <a:spcPts val="800"/>
-              </a:spcAft>
-            </a:pPr>
-            <a:r>
-              <a:rPr sz="1600" b="0">
-                <a:solidFill>
-                  <a:srgbClr val="FFFFFF"/>
-                </a:solidFill>
-                <a:latin typeface="맑은 고딕"/>
-              </a:rPr>
-              <a:t>•  안전망이라는 성격</a:t>
+                <a:spcPts val="1000"/>
+              </a:spcAft>
+            </a:pPr>
+            <a:r>
+              <a:rPr sz="1700" b="0">
+                <a:solidFill>
+                  <a:srgbClr val="222222"/>
+                </a:solidFill>
+                <a:latin typeface="맑은 고딕"/>
+              </a:rPr>
+              <a:t>•  수신 주소, 서비스 정보, 동작 파라미터</a:t>
+            </a:r>
+          </a:p>
+          <a:p>
+            <a:pPr algn="l">
+              <a:spcAft>
+                <a:spcPts val="1000"/>
+              </a:spcAft>
+            </a:pPr>
+            <a:r>
+              <a:rPr sz="1700" b="0">
+                <a:solidFill>
+                  <a:srgbClr val="222222"/>
+                </a:solidFill>
+                <a:latin typeface="맑은 고딕"/>
+              </a:rPr>
+              <a:t>•  기본 이름 LISTENER는 명령에서 생략 가능</a:t>
+            </a:r>
+          </a:p>
+          <a:p>
+            <a:pPr algn="l">
+              <a:spcAft>
+                <a:spcPts val="1000"/>
+              </a:spcAft>
+            </a:pPr>
+            <a:r>
+              <a:rPr sz="1700" b="0">
+                <a:solidFill>
+                  <a:srgbClr val="222222"/>
+                </a:solidFill>
+                <a:latin typeface="맑은 고딕"/>
+              </a:rPr>
+              <a:t>•  리스너를 나누면 포트도 달라야 함</a:t>
+            </a:r>
+          </a:p>
+          <a:p>
+            <a:pPr algn="l">
+              <a:spcAft>
+                <a:spcPts val="1000"/>
+              </a:spcAft>
+            </a:pPr>
+            <a:r>
+              <a:rPr sz="1700" b="0">
+                <a:solidFill>
+                  <a:srgbClr val="222222"/>
+                </a:solidFill>
+                <a:latin typeface="맑은 고딕"/>
+              </a:rPr>
+              <a:t>•  DG 때문에 바꾸는 이유: 정적 등록과 성능 조정</a:t>
             </a:r>
           </a:p>
         </p:txBody>
@@ -7234,7 +7970,7 @@
                 </a:solidFill>
                 <a:latin typeface="맑은 고딕"/>
               </a:rPr>
-              <a:t>DG_CONFIG가 하는 일</a:t>
+              <a:t>동적 등록</a:t>
             </a:r>
           </a:p>
         </p:txBody>
@@ -7247,8 +7983,8 @@
         </p:nvSpPr>
         <p:spPr>
           <a:xfrm>
-            <a:off x="640080" y="1371600"/>
-            <a:ext cx="10881360" cy="5120640"/>
+            <a:off x="640080" y="1078992"/>
+            <a:ext cx="10881360" cy="457200"/>
           </a:xfrm>
           <a:prstGeom prst="rect">
             <a:avLst/>
@@ -7263,17 +7999,56 @@
           <a:p>
             <a:pPr algn="l">
               <a:spcAft>
+                <a:spcPts val="600"/>
+              </a:spcAft>
+            </a:pPr>
+            <a:r>
+              <a:rPr sz="1500" b="0">
+                <a:solidFill>
+                  <a:srgbClr val="5A6672"/>
+                </a:solidFill>
+                <a:latin typeface="맑은 고딕"/>
+              </a:rPr>
+              <a:t>LREG가 리스너에게 알려 준다</a:t>
+            </a:r>
+          </a:p>
+        </p:txBody>
+      </p:sp>
+      <p:sp>
+        <p:nvSpPr>
+          <p:cNvPr id="5" name="TextBox 4"/>
+          <p:cNvSpPr txBox="1"/>
+          <p:nvPr/>
+        </p:nvSpPr>
+        <p:spPr>
+          <a:xfrm>
+            <a:off x="640080" y="1737360"/>
+            <a:ext cx="10881360" cy="4754880"/>
+          </a:xfrm>
+          <a:prstGeom prst="rect">
+            <a:avLst/>
+          </a:prstGeom>
+          <a:noFill/>
+        </p:spPr>
+        <p:txBody>
+          <a:bodyPr wrap="square">
+            <a:spAutoFit/>
+          </a:bodyPr>
+          <a:lstStyle/>
+          <a:p>
+            <a:pPr algn="l">
+              <a:spcAft>
                 <a:spcPts val="1000"/>
               </a:spcAft>
             </a:pPr>
             <a:r>
-              <a:rPr sz="1600" b="0">
+              <a:rPr sz="1700" b="0">
                 <a:solidFill>
                   <a:srgbClr val="222222"/>
                 </a:solidFill>
                 <a:latin typeface="맑은 고딕"/>
               </a:rPr>
-              <a:t>•  구성에 속한 모든 DB_UNIQUE_NAME을 나열한다</a:t>
+              <a:t>•  서비스 이름, 인스턴스 이름, 상태를 등록</a:t>
             </a:r>
           </a:p>
           <a:p>
@@ -7283,13 +8058,13 @@
               </a:spcAft>
             </a:pPr>
             <a:r>
-              <a:rPr sz="1600" b="0">
+              <a:rPr sz="1700" b="0">
                 <a:solidFill>
                   <a:srgbClr val="222222"/>
                 </a:solidFill>
                 <a:latin typeface="맑은 고딕"/>
               </a:rPr>
-              <a:t>•  ① 목적지에 지정할 수 있는 이름을 제한 → 2장의 ORA-16053</a:t>
+              <a:t>•  기본 서비스 이름은 DB_UNIQUE_NAME.DB_DOMAIN</a:t>
             </a:r>
           </a:p>
           <a:p>
@@ -7299,13 +8074,13 @@
               </a:spcAft>
             </a:pPr>
             <a:r>
-              <a:rPr sz="1600" b="0">
+              <a:rPr sz="1700" b="0">
                 <a:solidFill>
                   <a:srgbClr val="222222"/>
                 </a:solidFill>
                 <a:latin typeface="맑은 고딕"/>
               </a:rPr>
-              <a:t>•  ② 어떤 구성원이 보낸 리두를 받아들일지 결정</a:t>
+              <a:t>•  1521이 아니면 LOCAL_LISTENER 지정</a:t>
             </a:r>
           </a:p>
           <a:p>
@@ -7315,29 +8090,13 @@
               </a:spcAft>
             </a:pPr>
             <a:r>
-              <a:rPr sz="1600" b="0">
+              <a:rPr sz="1700" b="0">
                 <a:solidFill>
                   <a:srgbClr val="222222"/>
                 </a:solidFill>
                 <a:latin typeface="맑은 고딕"/>
               </a:rPr>
-              <a:t>•  실습 환경 : dg_config=(chicago,boston)</a:t>
-            </a:r>
-          </a:p>
-          <a:p>
-            <a:pPr algn="l">
-              <a:spcAft>
-                <a:spcPts val="1000"/>
-              </a:spcAft>
-            </a:pPr>
-            <a:r>
-              <a:rPr sz="1600" b="0">
-                <a:solidFill>
-                  <a:srgbClr val="222222"/>
-                </a:solidFill>
-                <a:latin typeface="맑은 고딕"/>
-              </a:rPr>
-              <a:t>•  함께 볼 것 : FAL_SERVER=boston, FAL_CLIENT=chicago</a:t>
+              <a:t>•  즉시 반영은 ALTER SYSTEM REGISTER</a:t>
             </a:r>
           </a:p>
         </p:txBody>
@@ -7438,7 +8197,7 @@
                 </a:solidFill>
                 <a:latin typeface="맑은 고딕"/>
               </a:rPr>
-              <a:t>비웠는데 아무 일도 안 일어났다</a:t>
+              <a:t>동적 등록만으로 부족한 순간</a:t>
             </a:r>
           </a:p>
         </p:txBody>
@@ -7477,7 +8236,7 @@
                 </a:solidFill>
                 <a:latin typeface="맑은 고딕"/>
               </a:rPr>
-              <a:t>실측</a:t>
+              <a:t>인스턴스가 없거나 NOMOUNT일 때</a:t>
             </a:r>
           </a:p>
         </p:txBody>
@@ -7516,7 +8275,7 @@
                 </a:solidFill>
                 <a:latin typeface="맑은 고딕"/>
               </a:rPr>
-              <a:t>•  ALTER SYSTEM SET log_archive_config='' SCOPE=BOTH → System altered</a:t>
+              <a:t>•  인스턴스가 내려가면 동적 서비스 정보 소멸</a:t>
             </a:r>
           </a:p>
           <a:p>
@@ -7532,7 +8291,7 @@
                 </a:solidFill>
                 <a:latin typeface="맑은 고딕"/>
               </a:rPr>
-              <a:t>•  목적지 재설정도 통과 (db_unique_name=boston 이 검증 없이 통과)</a:t>
+              <a:t>•  그 서비스로 접속하면 ORA-12514</a:t>
             </a:r>
           </a:p>
           <a:p>
@@ -7548,7 +8307,7 @@
                 </a:solidFill>
                 <a:latin typeface="맑은 고딕"/>
               </a:rPr>
-              <a:t>•  로그 스위치 후에도 dest_2는 VALID, 전송 계속</a:t>
+              <a:t>•  NOMOUNT, MOUNT는 BLOCKED로 등록</a:t>
             </a:r>
           </a:p>
           <a:p>
@@ -7564,7 +8323,7 @@
                 </a:solidFill>
                 <a:latin typeface="맑은 고딕"/>
               </a:rPr>
-              <a:t>•  이유: 이미 확립된 연결과 설정된 목적지는 즉시 끊기지 않는다</a:t>
+              <a:t>•  BLOCKED 서비스 접속은 ORA-12528</a:t>
             </a:r>
           </a:p>
           <a:p>
@@ -7580,7 +8339,7 @@
                 </a:solidFill>
                 <a:latin typeface="맑은 고딕"/>
               </a:rPr>
-              <a:t>•  DG_CONFIG는 런타임 스위치가 아니라 설정·재기동 시점의 검증 장치</a:t>
+              <a:t>•  DUPLICATE와 Broker 재기동이 이 순간을 만남</a:t>
             </a:r>
           </a:p>
         </p:txBody>
@@ -7681,7 +8440,7 @@
                 </a:solidFill>
                 <a:latin typeface="맑은 고딕"/>
               </a:rPr>
-              <a:t>그럼에도 비우면 안 되는 이유</a:t>
+              <a:t>정적 등록 SID_LIST</a:t>
             </a:r>
           </a:p>
         </p:txBody>
@@ -7720,7 +8479,7 @@
                 </a:solidFill>
                 <a:latin typeface="맑은 고딕"/>
               </a:rPr>
-              <a:t>안전망이 사라진다</a:t>
+              <a:t>파일에 적힌 선언을 리스너가 믿는다</a:t>
             </a:r>
           </a:p>
         </p:txBody>
@@ -7759,7 +8518,7 @@
                 </a:solidFill>
                 <a:latin typeface="맑은 고딕"/>
               </a:rPr>
-              <a:t>•  ① 새 목적지 추가 시 오배송 검증이 사라진다 (ORA-16053이 안 난다)</a:t>
+              <a:t>•  SID_LIST_ 뒤에 리스너 이름을 붙인다</a:t>
             </a:r>
           </a:p>
           <a:p>
@@ -7775,7 +8534,7 @@
                 </a:solidFill>
                 <a:latin typeface="맑은 고딕"/>
               </a:rPr>
-              <a:t>•  ② Broker 구성 생성이 실패한다 (13장)</a:t>
+              <a:t>•  SID_DESC 하나가 정적 서비스 하나</a:t>
             </a:r>
           </a:p>
           <a:p>
@@ -7791,7 +8550,7 @@
                 </a:solidFill>
                 <a:latin typeface="맑은 고딕"/>
               </a:rPr>
-              <a:t>•  ③ 인스턴스 재기동 시 잘못된 설정이 그대로 살아난다</a:t>
+              <a:t>•  GLOBAL_DBNAME은 SERVICE_NAME과 글자 그대로 일치</a:t>
             </a:r>
           </a:p>
           <a:p>
@@ -7807,7 +8566,7 @@
                 </a:solidFill>
                 <a:latin typeface="맑은 고딕"/>
               </a:rPr>
-              <a:t>•  즉 "지금 막는 스위치"가 아니라 "실수를 걸러 주는 안전망"</a:t>
+              <a:t>•  SID_NAME, ORACLE_HOME은 실제 인스턴스 환경</a:t>
             </a:r>
           </a:p>
           <a:p>
@@ -7823,7 +8582,7 @@
                 </a:solidFill>
                 <a:latin typeface="맑은 고딕"/>
               </a:rPr>
-              <a:t>•  관리 원칙 : 모든 노드에 · Far Sync도 포함 · 비우지 않는다 · Broker 쓰면 손대지 않는다</a:t>
+              <a:t>•  변경 후 lsnrctl reload</a:t>
             </a:r>
           </a:p>
         </p:txBody>
@@ -7924,7 +8683,7 @@
                 </a:solidFill>
                 <a:latin typeface="맑은 고딕"/>
               </a:rPr>
-              <a:t>학습 목표 (Objectives)</a:t>
+              <a:t>학습 목표</a:t>
             </a:r>
           </a:p>
         </p:txBody>
@@ -7963,7 +8722,7 @@
                 </a:solidFill>
                 <a:latin typeface="맑은 고딕"/>
               </a:rPr>
-              <a:t>•  Data Guard가 일반 접속과 달리 요구하는 세 가지 Oracle Net 조건을 설명한다.</a:t>
+              <a:t>•  데이터베이스가 클라이언트가 되는 구조를 설명한다</a:t>
             </a:r>
           </a:p>
           <a:p>
@@ -7979,7 +8738,7 @@
                 </a:solidFill>
                 <a:latin typeface="맑은 고딕"/>
               </a:rPr>
-              <a:t>•  양쪽 노드에 대칭적인 tnsnames.ora를 구성하고 tnsping으로 검증한다.</a:t>
+              <a:t>•  별칭, 서비스 이름, DB_UNIQUE_NAME을 구분한다</a:t>
             </a:r>
           </a:p>
           <a:p>
@@ -7995,7 +8754,7 @@
                 </a:solidFill>
                 <a:latin typeface="맑은 고딕"/>
               </a:rPr>
-              <a:t>•  listener.ora 정적 등록이 왜 필요한지를 NOMOUNT 접속 실패로 실증한다.</a:t>
+              <a:t>•  동적 등록과 정적 등록, _DGMGRL 서비스를 구성한다</a:t>
             </a:r>
           </a:p>
           <a:p>
@@ -8011,7 +8770,7 @@
                 </a:solidFill>
                 <a:latin typeface="맑은 고딕"/>
               </a:rPr>
-              <a:t>•  LOG_ARCHIVE_CONFIG의 DG_CONFIG가 하는 일과 누락 시 증상을 안다.</a:t>
+              <a:t>•  패스워드 파일과 REDO_TRANSPORT_USER로 인증을 맞춘다</a:t>
             </a:r>
           </a:p>
           <a:p>
@@ -8027,7 +8786,7 @@
                 </a:solidFill>
                 <a:latin typeface="맑은 고딕"/>
               </a:rPr>
-              <a:t>•  패스워드 파일 인증의 요건을 알고 불일치를 재현·해소한다.</a:t>
+              <a:t>•  DG_CONFIG의 역할과 네트워크 성능 조정값을 정한다</a:t>
             </a:r>
           </a:p>
           <a:p>
@@ -8043,23 +8802,7 @@
                 </a:solidFill>
                 <a:latin typeface="맑은 고딕"/>
               </a:rPr>
-              <a:t>•  방화벽·포트 문제를 진단하고 오류 번호로 계층을 가른다.</a:t>
-            </a:r>
-          </a:p>
-          <a:p>
-            <a:pPr algn="l">
-              <a:spcAft>
-                <a:spcPts val="1000"/>
-              </a:spcAft>
-            </a:pPr>
-            <a:r>
-              <a:rPr sz="1600" b="0">
-                <a:solidFill>
-                  <a:srgbClr val="222222"/>
-                </a:solidFill>
-                <a:latin typeface="맑은 고딕"/>
-              </a:rPr>
-              <a:t>•  ORA-12514·ORA-12528·ORA-01017·ORA-16191·TNS-12535를 구분해 조치를 댄다.</a:t>
+              <a:t>•  계층별 순서로 연결을 검증하고 오류를 해석한다</a:t>
             </a:r>
           </a:p>
         </p:txBody>
@@ -8091,7 +8834,7 @@
         <p:spPr>
           <a:xfrm>
             <a:off x="0" y="0"/>
-            <a:ext cx="12191695" cy="6858000"/>
+            <a:ext cx="12191695" cy="1005840"/>
           </a:xfrm>
           <a:prstGeom prst="rect">
             <a:avLst/>
@@ -8134,8 +8877,8 @@
         </p:nvSpPr>
         <p:spPr>
           <a:xfrm>
-            <a:off x="822960" y="2011680"/>
-            <a:ext cx="10515600" cy="1097280"/>
+            <a:off x="548640" y="91440"/>
+            <a:ext cx="10972800" cy="777240"/>
           </a:xfrm>
           <a:prstGeom prst="rect">
             <a:avLst/>
@@ -8154,13 +8897,13 @@
               </a:spcAft>
             </a:pPr>
             <a:r>
-              <a:rPr sz="4000" b="1">
+              <a:rPr sz="2600" b="1">
                 <a:solidFill>
                   <a:srgbClr val="FFFFFF"/>
                 </a:solidFill>
                 <a:latin typeface="맑은 고딕"/>
               </a:rPr>
-              <a:t>3.5</a:t>
+              <a:t>Broker의 _DGMGRL 서비스</a:t>
             </a:r>
           </a:p>
         </p:txBody>
@@ -8173,8 +8916,8 @@
         </p:nvSpPr>
         <p:spPr>
           <a:xfrm>
-            <a:off x="822960" y="3017520"/>
-            <a:ext cx="10515600" cy="914400"/>
+            <a:off x="640080" y="1078992"/>
+            <a:ext cx="10881360" cy="457200"/>
           </a:xfrm>
           <a:prstGeom prst="rect">
             <a:avLst/>
@@ -8193,71 +8936,27 @@
               </a:spcAft>
             </a:pPr>
             <a:r>
-              <a:rPr sz="2800" b="1">
-                <a:solidFill>
-                  <a:srgbClr val="FFFFFF"/>
-                </a:solidFill>
-                <a:latin typeface="맑은 고딕"/>
-              </a:rPr>
-              <a:t>인증 — 패스워드 파일</a:t>
-            </a:r>
-          </a:p>
-        </p:txBody>
-      </p:sp>
-      <p:sp>
-        <p:nvSpPr>
-          <p:cNvPr id="5" name="Rectangle 4"/>
-          <p:cNvSpPr/>
-          <p:nvPr/>
-        </p:nvSpPr>
-        <p:spPr>
-          <a:xfrm>
-            <a:off x="822960" y="4114800"/>
-            <a:ext cx="5486400" cy="54864"/>
-          </a:xfrm>
-          <a:prstGeom prst="rect">
-            <a:avLst/>
-          </a:prstGeom>
-          <a:solidFill>
-            <a:srgbClr val="FFFFFF"/>
-          </a:solidFill>
-          <a:ln>
-            <a:noFill/>
-          </a:ln>
-          <a:effectLst/>
-        </p:spPr>
-        <p:style>
-          <a:lnRef idx="1">
-            <a:schemeClr val="accent1"/>
-          </a:lnRef>
-          <a:fillRef idx="3">
-            <a:schemeClr val="accent1"/>
-          </a:fillRef>
-          <a:effectRef idx="2">
-            <a:schemeClr val="accent1"/>
-          </a:effectRef>
-          <a:fontRef idx="minor">
-            <a:schemeClr val="lt1"/>
-          </a:fontRef>
-        </p:style>
-        <p:txBody>
-          <a:bodyPr rtlCol="0" anchor="ctr"/>
-          <a:lstStyle/>
-          <a:p>
-            <a:pPr algn="ctr"/>
-          </a:p>
-        </p:txBody>
-      </p:sp>
-      <p:sp>
-        <p:nvSpPr>
-          <p:cNvPr id="6" name="TextBox 5"/>
+              <a:rPr sz="1500" b="0">
+                <a:solidFill>
+                  <a:srgbClr val="5A6672"/>
+                </a:solidFill>
+                <a:latin typeface="맑은 고딕"/>
+              </a:rPr>
+              <a:t>인스턴스를 다시 올릴 때 쓰는 문</a:t>
+            </a:r>
+          </a:p>
+        </p:txBody>
+      </p:sp>
+      <p:sp>
+        <p:nvSpPr>
+          <p:cNvPr id="5" name="TextBox 4"/>
           <p:cNvSpPr txBox="1"/>
           <p:nvPr/>
         </p:nvSpPr>
         <p:spPr>
           <a:xfrm>
-            <a:off x="822960" y="4297680"/>
-            <a:ext cx="10058400" cy="2011680"/>
+            <a:off x="640080" y="1737360"/>
+            <a:ext cx="10881360" cy="4754880"/>
           </a:xfrm>
           <a:prstGeom prst="rect">
             <a:avLst/>
@@ -8272,49 +8971,81 @@
           <a:p>
             <a:pPr algn="l">
               <a:spcAft>
-                <a:spcPts val="800"/>
-              </a:spcAft>
-            </a:pPr>
-            <a:r>
-              <a:rPr sz="1600" b="0">
-                <a:solidFill>
-                  <a:srgbClr val="FFFFFF"/>
-                </a:solidFill>
-                <a:latin typeface="맑은 고딕"/>
-              </a:rPr>
-              <a:t>•  원격 SYS 접속이 필요하다</a:t>
-            </a:r>
-          </a:p>
-          <a:p>
-            <a:pPr algn="l">
-              <a:spcAft>
-                <a:spcPts val="800"/>
-              </a:spcAft>
-            </a:pPr>
-            <a:r>
-              <a:rPr sz="1600" b="0">
-                <a:solidFill>
-                  <a:srgbClr val="FFFFFF"/>
-                </a:solidFill>
-                <a:latin typeface="맑은 고딕"/>
-              </a:rPr>
-              <a:t>•  이름은 달라도 내용은 같아야 한다</a:t>
-            </a:r>
-          </a:p>
-          <a:p>
-            <a:pPr algn="l">
-              <a:spcAft>
-                <a:spcPts val="800"/>
-              </a:spcAft>
-            </a:pPr>
-            <a:r>
-              <a:rPr sz="1600" b="0">
-                <a:solidFill>
-                  <a:srgbClr val="FFFFFF"/>
-                </a:solidFill>
-                <a:latin typeface="맑은 고딕"/>
-              </a:rPr>
-              <a:t>•  ORA-01017 → ORA-16191</a:t>
+                <a:spcPts val="1000"/>
+              </a:spcAft>
+            </a:pPr>
+            <a:r>
+              <a:rPr sz="1700" b="0">
+                <a:solidFill>
+                  <a:srgbClr val="222222"/>
+                </a:solidFill>
+                <a:latin typeface="맑은 고딕"/>
+              </a:rPr>
+              <a:t>•  이름 규칙: db_unique_name_DGMGRL.db_domain</a:t>
+            </a:r>
+          </a:p>
+          <a:p>
+            <a:pPr algn="l">
+              <a:spcAft>
+                <a:spcPts val="1000"/>
+              </a:spcAft>
+            </a:pPr>
+            <a:r>
+              <a:rPr sz="1700" b="0">
+                <a:solidFill>
+                  <a:srgbClr val="222222"/>
+                </a:solidFill>
+                <a:latin typeface="맑은 고딕"/>
+              </a:rPr>
+              <a:t>•  StaticConnectIdentifier 속성이 이 서비스를 가리킴</a:t>
+            </a:r>
+          </a:p>
+          <a:p>
+            <a:pPr algn="l">
+              <a:spcAft>
+                <a:spcPts val="1000"/>
+              </a:spcAft>
+            </a:pPr>
+            <a:r>
+              <a:rPr sz="1700" b="0">
+                <a:solidFill>
+                  <a:srgbClr val="222222"/>
+                </a:solidFill>
+                <a:latin typeface="맑은 고딕"/>
+              </a:rPr>
+              <a:t>•  없으면 Switchover 마지막 재기동에서 실패</a:t>
+            </a:r>
+          </a:p>
+          <a:p>
+            <a:pPr algn="l">
+              <a:spcAft>
+                <a:spcPts val="1000"/>
+              </a:spcAft>
+            </a:pPr>
+            <a:r>
+              <a:rPr sz="1700" b="0">
+                <a:solidFill>
+                  <a:srgbClr val="222222"/>
+                </a:solidFill>
+                <a:latin typeface="맑은 고딕"/>
+              </a:rPr>
+              <a:t>•  _DGB 서비스는 DMON용 동적 등록</a:t>
+            </a:r>
+          </a:p>
+          <a:p>
+            <a:pPr algn="l">
+              <a:spcAft>
+                <a:spcPts val="1000"/>
+              </a:spcAft>
+            </a:pPr>
+            <a:r>
+              <a:rPr sz="1700" b="0">
+                <a:solidFill>
+                  <a:srgbClr val="222222"/>
+                </a:solidFill>
+                <a:latin typeface="맑은 고딕"/>
+              </a:rPr>
+              <a:t>•  Clusterware 관리 DB에는 불필요</a:t>
             </a:r>
           </a:p>
         </p:txBody>
@@ -8415,7 +9146,7 @@
                 </a:solidFill>
                 <a:latin typeface="맑은 고딕"/>
               </a:rPr>
-              <a:t>패스워드 파일의 요건</a:t>
+              <a:t>lsnrctl status로 상태 읽기</a:t>
             </a:r>
           </a:p>
         </p:txBody>
@@ -8428,8 +9159,8 @@
         </p:nvSpPr>
         <p:spPr>
           <a:xfrm>
-            <a:off x="640080" y="1371600"/>
-            <a:ext cx="10881360" cy="5120640"/>
+            <a:off x="640080" y="1078992"/>
+            <a:ext cx="10881360" cy="457200"/>
           </a:xfrm>
           <a:prstGeom prst="rect">
             <a:avLst/>
@@ -8444,17 +9175,56 @@
           <a:p>
             <a:pPr algn="l">
               <a:spcAft>
+                <a:spcPts val="600"/>
+              </a:spcAft>
+            </a:pPr>
+            <a:r>
+              <a:rPr sz="1500" b="0">
+                <a:solidFill>
+                  <a:srgbClr val="5A6672"/>
+                </a:solidFill>
+                <a:latin typeface="맑은 고딕"/>
+              </a:rPr>
+              <a:t>READY, BLOCKED, UNKNOWN</a:t>
+            </a:r>
+          </a:p>
+        </p:txBody>
+      </p:sp>
+      <p:sp>
+        <p:nvSpPr>
+          <p:cNvPr id="5" name="TextBox 4"/>
+          <p:cNvSpPr txBox="1"/>
+          <p:nvPr/>
+        </p:nvSpPr>
+        <p:spPr>
+          <a:xfrm>
+            <a:off x="640080" y="1737360"/>
+            <a:ext cx="10881360" cy="4754880"/>
+          </a:xfrm>
+          <a:prstGeom prst="rect">
+            <a:avLst/>
+          </a:prstGeom>
+          <a:noFill/>
+        </p:spPr>
+        <p:txBody>
+          <a:bodyPr wrap="square">
+            <a:spAutoFit/>
+          </a:bodyPr>
+          <a:lstStyle/>
+          <a:p>
+            <a:pPr algn="l">
+              <a:spcAft>
                 <a:spcPts val="1000"/>
               </a:spcAft>
             </a:pPr>
             <a:r>
-              <a:rPr sz="1600" b="0">
+              <a:rPr sz="1700" b="0">
                 <a:solidFill>
                   <a:srgbClr val="222222"/>
                 </a:solidFill>
                 <a:latin typeface="맑은 고딕"/>
               </a:rPr>
-              <a:t>•  REMOTE_LOGIN_PASSWORDFILE = EXCLUSIVE (양쪽)</a:t>
+              <a:t>•  READY: 동적 등록, 접속 가능</a:t>
             </a:r>
           </a:p>
           <a:p>
@@ -8464,13 +9234,13 @@
               </a:spcAft>
             </a:pPr>
             <a:r>
-              <a:rPr sz="1600" b="0">
+              <a:rPr sz="1700" b="0">
                 <a:solidFill>
                   <a:srgbClr val="222222"/>
                 </a:solidFill>
                 <a:latin typeface="맑은 고딕"/>
               </a:rPr>
-              <a:t>•  파일 이름 : orapw&lt;ORACLE_SID&gt; — orapwchicago / orapwboston</a:t>
+              <a:t>•  BLOCKED: 동적 등록, NOMOUNT·MOUNT라 거부</a:t>
             </a:r>
           </a:p>
           <a:p>
@@ -8480,13 +9250,13 @@
               </a:spcAft>
             </a:pPr>
             <a:r>
-              <a:rPr sz="1600" b="0">
+              <a:rPr sz="1700" b="0">
                 <a:solidFill>
                   <a:srgbClr val="222222"/>
                 </a:solidFill>
                 <a:latin typeface="맑은 고딕"/>
               </a:rPr>
-              <a:t>•  이름은 달라도 **내용(SYS 비밀번호)은 같아야 한다**</a:t>
+              <a:t>•  UNKNOWN: 정적 등록, 리스너는 상태를 모름</a:t>
             </a:r>
           </a:p>
           <a:p>
@@ -8496,13 +9266,13 @@
               </a:spcAft>
             </a:pPr>
             <a:r>
-              <a:rPr sz="1600" b="0">
+              <a:rPr sz="1700" b="0">
                 <a:solidFill>
                   <a:srgbClr val="222222"/>
                 </a:solidFill>
                 <a:latin typeface="맑은 고딕"/>
               </a:rPr>
-              <a:t>•  권한 640, 소유자 oracle</a:t>
+              <a:t>•  같은 서비스에 정적·동적 항목이 함께 보일 수 있음</a:t>
             </a:r>
           </a:p>
           <a:p>
@@ -8512,13 +9282,13 @@
               </a:spcAft>
             </a:pPr>
             <a:r>
-              <a:rPr sz="1600" b="0">
+              <a:rPr sz="1700" b="0">
                 <a:solidFill>
                   <a:srgbClr val="222222"/>
                 </a:solidFill>
                 <a:latin typeface="맑은 고딕"/>
               </a:rPr>
-              <a:t>•  확실한 검증은 실제 원격 접속 — md5sum 대조는 참고용</a:t>
+              <a:t>•  Listener Parameter File 줄로 실제 파일 경로 확인</a:t>
             </a:r>
           </a:p>
         </p:txBody>
@@ -8619,7 +9389,7 @@
                 </a:solidFill>
                 <a:latin typeface="맑은 고딕"/>
               </a:rPr>
-              <a:t>orapwd와 19c 복잡성 규칙</a:t>
+              <a:t>정적 등록은 양쪽에 같은 모양으로</a:t>
             </a:r>
           </a:p>
         </p:txBody>
@@ -8658,7 +9428,7 @@
                 </a:solidFill>
                 <a:latin typeface="맑은 고딕"/>
               </a:rPr>
-              <a:t>실측 OPW-00029</a:t>
+              <a:t>역할이 바뀌면 chicago도 NOMOUNT가 된다</a:t>
             </a:r>
           </a:p>
         </p:txBody>
@@ -8697,7 +9467,7 @@
                 </a:solidFill>
                 <a:latin typeface="맑은 고딕"/>
               </a:rPr>
-              <a:t>•  orapwd file=... password=WrongPass123 force=y</a:t>
+              <a:t>•  두 서버에 db_unique_name 서비스와 _DGMGRL 서비스</a:t>
             </a:r>
           </a:p>
           <a:p>
@@ -8713,7 +9483,7 @@
                 </a:solidFill>
                 <a:latin typeface="맑은 고딕"/>
               </a:rPr>
-              <a:t>•  OPW-00029: Password must contain at least 1 special character.</a:t>
+              <a:t>•  GLOBAL_DBNAME, SERVICE_NAME, DB_DOMAIN을 한 표로</a:t>
             </a:r>
           </a:p>
           <a:p>
@@ -8729,39 +9499,7 @@
                 </a:solidFill>
                 <a:latin typeface="맑은 고딕"/>
               </a:rPr>
-              <a:t>•  ★ rm은 이미 성공했고 orapwd만 실패했다 → 패스워드 파일이 없는 상태</a:t>
-            </a:r>
-          </a:p>
-          <a:p>
-            <a:pPr algn="l">
-              <a:spcAft>
-                <a:spcPts val="1000"/>
-              </a:spcAft>
-            </a:pPr>
-            <a:r>
-              <a:rPr sz="1700" b="0">
-                <a:solidFill>
-                  <a:srgbClr val="222222"/>
-                </a:solidFill>
-                <a:latin typeface="맑은 고딕"/>
-              </a:rPr>
-              <a:t>•  작업 전 백업이 필수인 이유</a:t>
-            </a:r>
-          </a:p>
-          <a:p>
-            <a:pPr algn="l">
-              <a:spcAft>
-                <a:spcPts val="1000"/>
-              </a:spcAft>
-            </a:pPr>
-            <a:r>
-              <a:rPr sz="1700" b="0">
-                <a:solidFill>
-                  <a:srgbClr val="222222"/>
-                </a:solidFill>
-                <a:latin typeface="맑은 고딕"/>
-              </a:rPr>
-              <a:t>•  참고: 실습 환경의 'oracle'도 이 규칙을 통과하지 못한다 (DBCA 생성 파일을 물려받음)</a:t>
+              <a:t>•  셋 중 하나를 바꾸면 나머지 둘도 확인</a:t>
             </a:r>
           </a:p>
         </p:txBody>
@@ -8793,7 +9531,7 @@
         <p:spPr>
           <a:xfrm>
             <a:off x="0" y="0"/>
-            <a:ext cx="12191695" cy="1005840"/>
+            <a:ext cx="12191695" cy="6858000"/>
           </a:xfrm>
           <a:prstGeom prst="rect">
             <a:avLst/>
@@ -8836,8 +9574,8 @@
         </p:nvSpPr>
         <p:spPr>
           <a:xfrm>
-            <a:off x="548640" y="91440"/>
-            <a:ext cx="10972800" cy="777240"/>
+            <a:off x="822960" y="2011680"/>
+            <a:ext cx="10515600" cy="1097280"/>
           </a:xfrm>
           <a:prstGeom prst="rect">
             <a:avLst/>
@@ -8856,13 +9594,13 @@
               </a:spcAft>
             </a:pPr>
             <a:r>
-              <a:rPr sz="2600" b="1">
+              <a:rPr sz="4000" b="1">
                 <a:solidFill>
                   <a:srgbClr val="FFFFFF"/>
                 </a:solidFill>
                 <a:latin typeface="맑은 고딕"/>
               </a:rPr>
-              <a:t>ORA-01017 → ORA-16191</a:t>
+              <a:t>3.5</a:t>
             </a:r>
           </a:p>
         </p:txBody>
@@ -8875,8 +9613,8 @@
         </p:nvSpPr>
         <p:spPr>
           <a:xfrm>
-            <a:off x="640080" y="1078992"/>
-            <a:ext cx="10881360" cy="457200"/>
+            <a:off x="822960" y="3017520"/>
+            <a:ext cx="10515600" cy="914400"/>
           </a:xfrm>
           <a:prstGeom prst="rect">
             <a:avLst/>
@@ -8895,27 +9633,71 @@
               </a:spcAft>
             </a:pPr>
             <a:r>
-              <a:rPr sz="1500" b="0">
-                <a:solidFill>
-                  <a:srgbClr val="5A6672"/>
-                </a:solidFill>
-                <a:latin typeface="맑은 고딕"/>
-              </a:rPr>
-              <a:t>실측</a:t>
-            </a:r>
-          </a:p>
-        </p:txBody>
-      </p:sp>
-      <p:sp>
-        <p:nvSpPr>
-          <p:cNvPr id="5" name="TextBox 4"/>
+              <a:rPr sz="2800" b="1">
+                <a:solidFill>
+                  <a:srgbClr val="FFFFFF"/>
+                </a:solidFill>
+                <a:latin typeface="맑은 고딕"/>
+              </a:rPr>
+              <a:t>리두 전송 인증</a:t>
+            </a:r>
+          </a:p>
+        </p:txBody>
+      </p:sp>
+      <p:sp>
+        <p:nvSpPr>
+          <p:cNvPr id="5" name="Rectangle 4"/>
+          <p:cNvSpPr/>
+          <p:nvPr/>
+        </p:nvSpPr>
+        <p:spPr>
+          <a:xfrm>
+            <a:off x="822960" y="4114800"/>
+            <a:ext cx="5486400" cy="54864"/>
+          </a:xfrm>
+          <a:prstGeom prst="rect">
+            <a:avLst/>
+          </a:prstGeom>
+          <a:solidFill>
+            <a:srgbClr val="FFFFFF"/>
+          </a:solidFill>
+          <a:ln>
+            <a:noFill/>
+          </a:ln>
+          <a:effectLst/>
+        </p:spPr>
+        <p:style>
+          <a:lnRef idx="1">
+            <a:schemeClr val="accent1"/>
+          </a:lnRef>
+          <a:fillRef idx="3">
+            <a:schemeClr val="accent1"/>
+          </a:fillRef>
+          <a:effectRef idx="2">
+            <a:schemeClr val="accent1"/>
+          </a:effectRef>
+          <a:fontRef idx="minor">
+            <a:schemeClr val="lt1"/>
+          </a:fontRef>
+        </p:style>
+        <p:txBody>
+          <a:bodyPr rtlCol="0" anchor="ctr"/>
+          <a:lstStyle/>
+          <a:p>
+            <a:pPr algn="ctr"/>
+          </a:p>
+        </p:txBody>
+      </p:sp>
+      <p:sp>
+        <p:nvSpPr>
+          <p:cNvPr id="6" name="TextBox 5"/>
           <p:cNvSpPr txBox="1"/>
           <p:nvPr/>
         </p:nvSpPr>
         <p:spPr>
           <a:xfrm>
-            <a:off x="640080" y="1737360"/>
-            <a:ext cx="10881360" cy="4754880"/>
+            <a:off x="822960" y="4297680"/>
+            <a:ext cx="10058400" cy="2011680"/>
           </a:xfrm>
           <a:prstGeom prst="rect">
             <a:avLst/>
@@ -8930,81 +9712,49 @@
           <a:p>
             <a:pPr algn="l">
               <a:spcAft>
-                <a:spcPts val="1000"/>
-              </a:spcAft>
-            </a:pPr>
-            <a:r>
-              <a:rPr sz="1700" b="0">
-                <a:solidFill>
-                  <a:srgbClr val="222222"/>
-                </a:solidFill>
-                <a:latin typeface="맑은 고딕"/>
-              </a:rPr>
-              <a:t>•  원격 SYS 접속 → ORA-01017: invalid username/password</a:t>
-            </a:r>
-          </a:p>
-          <a:p>
-            <a:pPr algn="l">
-              <a:spcAft>
-                <a:spcPts val="1000"/>
-              </a:spcAft>
-            </a:pPr>
-            <a:r>
-              <a:rPr sz="1700" b="0">
-                <a:solidFill>
-                  <a:srgbClr val="222222"/>
-                </a:solidFill>
-                <a:latin typeface="맑은 고딕"/>
-              </a:rPr>
-              <a:t>•  리두 전송 → ORA-16191: Primary log shipping client not logged on standby</a:t>
-            </a:r>
-          </a:p>
-          <a:p>
-            <a:pPr algn="l">
-              <a:spcAft>
-                <a:spcPts val="1000"/>
-              </a:spcAft>
-            </a:pPr>
-            <a:r>
-              <a:rPr sz="1700" b="0">
-                <a:solidFill>
-                  <a:srgbClr val="222222"/>
-                </a:solidFill>
-                <a:latin typeface="맑은 고딕"/>
-              </a:rPr>
-              <a:t>•  ★ 첫 조회에서는 VALID였고 잠시 뒤 ERROR로 바뀌었다</a:t>
-            </a:r>
-          </a:p>
-          <a:p>
-            <a:pPr algn="l">
-              <a:spcAft>
-                <a:spcPts val="1000"/>
-              </a:spcAft>
-            </a:pPr>
-            <a:r>
-              <a:rPr sz="1700" b="0">
-                <a:solidFill>
-                  <a:srgbClr val="222222"/>
-                </a:solidFill>
-                <a:latin typeface="맑은 고딕"/>
-              </a:rPr>
-              <a:t>•  전송 시도가 실제로 일어나야 오류가 기록되기 때문</a:t>
-            </a:r>
-          </a:p>
-          <a:p>
-            <a:pPr algn="l">
-              <a:spcAft>
-                <a:spcPts val="1000"/>
-              </a:spcAft>
-            </a:pPr>
-            <a:r>
-              <a:rPr sz="1700" b="0">
-                <a:solidFill>
-                  <a:srgbClr val="222222"/>
-                </a:solidFill>
-                <a:latin typeface="맑은 고딕"/>
-              </a:rPr>
-              <a:t>•  설정 직후 한 번 조회하고 "문제없다"고 판단하면 안 되는 이유</a:t>
+                <a:spcPts val="800"/>
+              </a:spcAft>
+            </a:pPr>
+            <a:r>
+              <a:rPr sz="1600" b="0">
+                <a:solidFill>
+                  <a:srgbClr val="FFFFFF"/>
+                </a:solidFill>
+                <a:latin typeface="맑은 고딕"/>
+              </a:rPr>
+              <a:t>•  패스워드 파일 기반 인증</a:t>
+            </a:r>
+          </a:p>
+          <a:p>
+            <a:pPr algn="l">
+              <a:spcAft>
+                <a:spcPts val="800"/>
+              </a:spcAft>
+            </a:pPr>
+            <a:r>
+              <a:rPr sz="1600" b="0">
+                <a:solidFill>
+                  <a:srgbClr val="FFFFFF"/>
+                </a:solidFill>
+                <a:latin typeface="맑은 고딕"/>
+              </a:rPr>
+              <a:t>•  REDO_TRANSPORT_USER</a:t>
+            </a:r>
+          </a:p>
+          <a:p>
+            <a:pPr algn="l">
+              <a:spcAft>
+                <a:spcPts val="800"/>
+              </a:spcAft>
+            </a:pPr>
+            <a:r>
+              <a:rPr sz="1600" b="0">
+                <a:solidFill>
+                  <a:srgbClr val="FFFFFF"/>
+                </a:solidFill>
+                <a:latin typeface="맑은 고딕"/>
+              </a:rPr>
+              <a:t>•  인증 실패의 증상과 회복</a:t>
             </a:r>
           </a:p>
         </p:txBody>
@@ -9105,7 +9855,7 @@
                 </a:solidFill>
                 <a:latin typeface="맑은 고딕"/>
               </a:rPr>
-              <a:t>고쳐도 저절로 풀리지 않는다</a:t>
+              <a:t>전송 세션도 로그온한다</a:t>
             </a:r>
           </a:p>
         </p:txBody>
@@ -9144,7 +9894,7 @@
                 </a:solidFill>
                 <a:latin typeface="맑은 고딕"/>
               </a:rPr>
-              <a:t>이 장의 핵심 원칙</a:t>
+              <a:t>패스워드 파일로 서로를 확인</a:t>
             </a:r>
           </a:p>
         </p:txBody>
@@ -9183,7 +9933,7 @@
                 </a:solidFill>
                 <a:latin typeface="맑은 고딕"/>
               </a:rPr>
-              <a:t>•  패스워드 파일 복원 → 원격 SYS 접속 성공 (원인 제거 확인)</a:t>
+              <a:t>•  인증 방식: SSL 또는 원격 로그인 패스워드 파일</a:t>
             </a:r>
           </a:p>
           <a:p>
@@ -9199,7 +9949,7 @@
                 </a:solidFill>
                 <a:latin typeface="맑은 고딕"/>
               </a:rPr>
-              <a:t>•  그런데 dest_2는 여전히 ORA-16191</a:t>
+              <a:t>•  대부분 패스워드 파일 방식을 사용</a:t>
             </a:r>
           </a:p>
           <a:p>
@@ -9215,7 +9965,7 @@
                 </a:solidFill>
                 <a:latin typeface="맑은 고딕"/>
               </a:rPr>
-              <a:t>•  목적지가 실패 상태로 굳어 재시도를 하지 않기 때문</a:t>
+              <a:t>•  인스턴스가 자기 파일에서 자격 정보를 읽음</a:t>
             </a:r>
           </a:p>
           <a:p>
@@ -9231,23 +9981,7 @@
                 </a:solidFill>
                 <a:latin typeface="맑은 고딕"/>
               </a:rPr>
-              <a:t>•  해소 : LOG_ARCHIVE_DEST_STATE_2 = DEFER → ENABLE → 로그 스위치</a:t>
-            </a:r>
-          </a:p>
-          <a:p>
-            <a:pPr algn="l">
-              <a:spcAft>
-                <a:spcPts val="1000"/>
-              </a:spcAft>
-            </a:pPr>
-            <a:r>
-              <a:rPr sz="1700" b="0">
-                <a:solidFill>
-                  <a:srgbClr val="222222"/>
-                </a:solidFill>
-                <a:latin typeface="맑은 고딕"/>
-              </a:rPr>
-              <a:t>•  ★ 원인을 제거한 것과 상태가 회복되는 것은 다른 일이다</a:t>
+              <a:t>•  FAL, DMON, DUPLICATE도 같은 파일에 기댐</a:t>
             </a:r>
           </a:p>
         </p:txBody>
@@ -9279,7 +10013,7 @@
         <p:spPr>
           <a:xfrm>
             <a:off x="0" y="0"/>
-            <a:ext cx="12191695" cy="6858000"/>
+            <a:ext cx="12191695" cy="1005840"/>
           </a:xfrm>
           <a:prstGeom prst="rect">
             <a:avLst/>
@@ -9322,8 +10056,8 @@
         </p:nvSpPr>
         <p:spPr>
           <a:xfrm>
-            <a:off x="822960" y="2011680"/>
-            <a:ext cx="10515600" cy="1097280"/>
+            <a:off x="548640" y="91440"/>
+            <a:ext cx="10972800" cy="777240"/>
           </a:xfrm>
           <a:prstGeom prst="rect">
             <a:avLst/>
@@ -9342,13 +10076,13 @@
               </a:spcAft>
             </a:pPr>
             <a:r>
-              <a:rPr sz="4000" b="1">
+              <a:rPr sz="2600" b="1">
                 <a:solidFill>
                   <a:srgbClr val="FFFFFF"/>
                 </a:solidFill>
                 <a:latin typeface="맑은 고딕"/>
               </a:rPr>
-              <a:t>3.6</a:t>
+              <a:t>패스워드 파일 요건</a:t>
             </a:r>
           </a:p>
         </p:txBody>
@@ -9361,8 +10095,8 @@
         </p:nvSpPr>
         <p:spPr>
           <a:xfrm>
-            <a:off x="822960" y="3017520"/>
-            <a:ext cx="10515600" cy="914400"/>
+            <a:off x="640080" y="1078992"/>
+            <a:ext cx="10881360" cy="457200"/>
           </a:xfrm>
           <a:prstGeom prst="rect">
             <a:avLst/>
@@ -9381,71 +10115,27 @@
               </a:spcAft>
             </a:pPr>
             <a:r>
-              <a:rPr sz="2800" b="1">
-                <a:solidFill>
-                  <a:srgbClr val="FFFFFF"/>
-                </a:solidFill>
-                <a:latin typeface="맑은 고딕"/>
-              </a:rPr>
-              <a:t>네트워크 계층 점검</a:t>
-            </a:r>
-          </a:p>
-        </p:txBody>
-      </p:sp>
-      <p:sp>
-        <p:nvSpPr>
-          <p:cNvPr id="5" name="Rectangle 4"/>
-          <p:cNvSpPr/>
-          <p:nvPr/>
-        </p:nvSpPr>
-        <p:spPr>
-          <a:xfrm>
-            <a:off x="822960" y="4114800"/>
-            <a:ext cx="5486400" cy="54864"/>
-          </a:xfrm>
-          <a:prstGeom prst="rect">
-            <a:avLst/>
-          </a:prstGeom>
-          <a:solidFill>
-            <a:srgbClr val="FFFFFF"/>
-          </a:solidFill>
-          <a:ln>
-            <a:noFill/>
-          </a:ln>
-          <a:effectLst/>
-        </p:spPr>
-        <p:style>
-          <a:lnRef idx="1">
-            <a:schemeClr val="accent1"/>
-          </a:lnRef>
-          <a:fillRef idx="3">
-            <a:schemeClr val="accent1"/>
-          </a:fillRef>
-          <a:effectRef idx="2">
-            <a:schemeClr val="accent1"/>
-          </a:effectRef>
-          <a:fontRef idx="minor">
-            <a:schemeClr val="lt1"/>
-          </a:fontRef>
-        </p:style>
-        <p:txBody>
-          <a:bodyPr rtlCol="0" anchor="ctr"/>
-          <a:lstStyle/>
-          <a:p>
-            <a:pPr algn="ctr"/>
-          </a:p>
-        </p:txBody>
-      </p:sp>
-      <p:sp>
-        <p:nvSpPr>
-          <p:cNvPr id="6" name="TextBox 5"/>
+              <a:rPr sz="1500" b="0">
+                <a:solidFill>
+                  <a:srgbClr val="5A6672"/>
+                </a:solidFill>
+                <a:latin typeface="맑은 고딕"/>
+              </a:rPr>
+              <a:t>이름, 내용, 파라미터</a:t>
+            </a:r>
+          </a:p>
+        </p:txBody>
+      </p:sp>
+      <p:sp>
+        <p:nvSpPr>
+          <p:cNvPr id="5" name="TextBox 4"/>
           <p:cNvSpPr txBox="1"/>
           <p:nvPr/>
         </p:nvSpPr>
         <p:spPr>
           <a:xfrm>
-            <a:off x="822960" y="4297680"/>
-            <a:ext cx="10058400" cy="2011680"/>
+            <a:off x="640080" y="1737360"/>
+            <a:ext cx="10881360" cy="4754880"/>
           </a:xfrm>
           <a:prstGeom prst="rect">
             <a:avLst/>
@@ -9460,49 +10150,81 @@
           <a:p>
             <a:pPr algn="l">
               <a:spcAft>
-                <a:spcPts val="800"/>
-              </a:spcAft>
-            </a:pPr>
-            <a:r>
-              <a:rPr sz="1600" b="0">
-                <a:solidFill>
-                  <a:srgbClr val="FFFFFF"/>
-                </a:solidFill>
-                <a:latin typeface="맑은 고딕"/>
-              </a:rPr>
-              <a:t>•  포트 하나, 그러나 양방향</a:t>
-            </a:r>
-          </a:p>
-          <a:p>
-            <a:pPr algn="l">
-              <a:spcAft>
-                <a:spcPts val="800"/>
-              </a:spcAft>
-            </a:pPr>
-            <a:r>
-              <a:rPr sz="1600" b="0">
-                <a:solidFill>
-                  <a:srgbClr val="FFFFFF"/>
-                </a:solidFill>
-                <a:latin typeface="맑은 고딕"/>
-              </a:rPr>
-              <a:t>•  차단하면 오류가 달라진다</a:t>
-            </a:r>
-          </a:p>
-          <a:p>
-            <a:pPr algn="l">
-              <a:spcAft>
-                <a:spcPts val="800"/>
-              </a:spcAft>
-            </a:pPr>
-            <a:r>
-              <a:rPr sz="1600" b="0">
-                <a:solidFill>
-                  <a:srgbClr val="FFFFFF"/>
-                </a:solidFill>
-                <a:latin typeface="맑은 고딕"/>
-              </a:rPr>
-              <a:t>•  오류 번호로 계층을 가른다</a:t>
+                <a:spcPts val="1000"/>
+              </a:spcAft>
+            </a:pPr>
+            <a:r>
+              <a:rPr sz="1700" b="0">
+                <a:solidFill>
+                  <a:srgbClr val="222222"/>
+                </a:solidFill>
+                <a:latin typeface="맑은 고딕"/>
+              </a:rPr>
+              <a:t>•  REMOTE_LOGIN_PASSWORDFILE=EXCLUSIVE</a:t>
+            </a:r>
+          </a:p>
+          <a:p>
+            <a:pPr algn="l">
+              <a:spcAft>
+                <a:spcPts val="1000"/>
+              </a:spcAft>
+            </a:pPr>
+            <a:r>
+              <a:rPr sz="1700" b="0">
+                <a:solidFill>
+                  <a:srgbClr val="222222"/>
+                </a:solidFill>
+                <a:latin typeface="맑은 고딕"/>
+              </a:rPr>
+              <a:t>•  파일 이름은 orapw + 각 서버의 ORACLE_SID</a:t>
+            </a:r>
+          </a:p>
+          <a:p>
+            <a:pPr algn="l">
+              <a:spcAft>
+                <a:spcPts val="1000"/>
+              </a:spcAft>
+            </a:pPr>
+            <a:r>
+              <a:rPr sz="1700" b="0">
+                <a:solidFill>
+                  <a:srgbClr val="222222"/>
+                </a:solidFill>
+                <a:latin typeface="맑은 고딕"/>
+              </a:rPr>
+              <a:t>•  Primary 파일을 복사해 Standby 이름으로</a:t>
+            </a:r>
+          </a:p>
+          <a:p>
+            <a:pPr algn="l">
+              <a:spcAft>
+                <a:spcPts val="1000"/>
+              </a:spcAft>
+            </a:pPr>
+            <a:r>
+              <a:rPr sz="1700" b="0">
+                <a:solidFill>
+                  <a:srgbClr val="222222"/>
+                </a:solidFill>
+                <a:latin typeface="맑은 고딕"/>
+              </a:rPr>
+              <a:t>•  orapwd 재생성은 리두로 전달되지 않음</a:t>
+            </a:r>
+          </a:p>
+          <a:p>
+            <a:pPr algn="l">
+              <a:spcAft>
+                <a:spcPts val="1000"/>
+              </a:spcAft>
+            </a:pPr>
+            <a:r>
+              <a:rPr sz="1700" b="0">
+                <a:solidFill>
+                  <a:srgbClr val="222222"/>
+                </a:solidFill>
+                <a:latin typeface="맑은 고딕"/>
+              </a:rPr>
+              <a:t>•  로그온 버전 설정도 양쪽 sqlnet.ora에서 일치</a:t>
             </a:r>
           </a:p>
         </p:txBody>
@@ -9603,7 +10325,7 @@
                 </a:solidFill>
                 <a:latin typeface="맑은 고딕"/>
               </a:rPr>
-              <a:t>포트와 방화벽</a:t>
+              <a:t>REDO_TRANSPORT_USER</a:t>
             </a:r>
           </a:p>
         </p:txBody>
@@ -9642,7 +10364,7 @@
                 </a:solidFill>
                 <a:latin typeface="맑은 고딕"/>
               </a:rPr>
-              <a:t>양방향이어야 하는 이유</a:t>
+              <a:t>SYS 대신 전송 전용 사용자</a:t>
             </a:r>
           </a:p>
         </p:txBody>
@@ -9681,7 +10403,7 @@
                 </a:solidFill>
                 <a:latin typeface="맑은 고딕"/>
               </a:rPr>
-              <a:t>•  Data Guard는 리스너 포트 하나만 쓴다 (실습 환경 1521)</a:t>
+              <a:t>•  기본값은 SYS로 인증</a:t>
             </a:r>
           </a:p>
           <a:p>
@@ -9697,7 +10419,7 @@
                 </a:solidFill>
                 <a:latin typeface="맑은 고딕"/>
               </a:rPr>
-              <a:t>•  양방향으로 열려야 한다 — FAL 요청과 역할 전환 이후</a:t>
+              <a:t>•  지정한 사용자는 SYSOPER 권한 필요</a:t>
             </a:r>
           </a:p>
           <a:p>
@@ -9713,7 +10435,7 @@
                 </a:solidFill>
                 <a:latin typeface="맑은 고딕"/>
               </a:rPr>
-              <a:t>•  실습 환경 : firewalld 패키지는 설치, 서비스는 비활성(unknown)</a:t>
+              <a:t>•  모든 구성원에 같은 값과 같은 사용자</a:t>
             </a:r>
           </a:p>
           <a:p>
@@ -9729,23 +10451,7 @@
                 </a:solidFill>
                 <a:latin typeface="맑은 고딕"/>
               </a:rPr>
-              <a:t>•  설치 가이드 1장 Step 7의 "firewalld stop/disable"은 이 환경에서 무의미</a:t>
-            </a:r>
-          </a:p>
-          <a:p>
-            <a:pPr algn="l">
-              <a:spcAft>
-                <a:spcPts val="1000"/>
-              </a:spcAft>
-            </a:pPr>
-            <a:r>
-              <a:rPr sz="1700" b="0">
-                <a:solidFill>
-                  <a:srgbClr val="222222"/>
-                </a:solidFill>
-                <a:latin typeface="맑은 고딕"/>
-              </a:rPr>
-              <a:t>•  ss -lntp | grep 1521 → tnslsnr이 수신 중</a:t>
+              <a:t>•  패스워드 파일 일치 조건은 그대로</a:t>
             </a:r>
           </a:p>
         </p:txBody>
@@ -9846,7 +10552,7 @@
                 </a:solidFill>
                 <a:latin typeface="맑은 고딕"/>
               </a:rPr>
-              <a:t>1521을 DROP하면</a:t>
+              <a:t>인증 실패의 증상</a:t>
             </a:r>
           </a:p>
         </p:txBody>
@@ -9885,7 +10591,7 @@
                 </a:solidFill>
                 <a:latin typeface="맑은 고딕"/>
               </a:rPr>
-              <a:t>실측 TNS-12535</a:t>
+              <a:t>ORA-01017에서 ORA-16191로</a:t>
             </a:r>
           </a:p>
         </p:txBody>
@@ -9924,7 +10630,7 @@
                 </a:solidFill>
                 <a:latin typeface="맑은 고딕"/>
               </a:rPr>
-              <a:t>•  iptables -I INPUT -p tcp --dport 1521 -j DROP</a:t>
+              <a:t>•  원격 SYSDBA 접속: ORA-01017</a:t>
             </a:r>
           </a:p>
           <a:p>
@@ -9940,7 +10646,7 @@
                 </a:solidFill>
                 <a:latin typeface="맑은 고딕"/>
               </a:rPr>
-              <a:t>•  tnsping boston → TNS-12535: TNS:operation timed out</a:t>
+              <a:t>•  리두 전송 목적지: ORA-16191</a:t>
             </a:r>
           </a:p>
           <a:p>
@@ -9956,7 +10662,7 @@
                 </a:solidFill>
                 <a:latin typeface="맑은 고딕"/>
               </a:rPr>
-              <a:t>•  ★ 오류가 나기까지 시간이 걸렸다</a:t>
+              <a:t>•  ORA-16191은 로그온 실패라는 결과만 알려 줌</a:t>
             </a:r>
           </a:p>
           <a:p>
@@ -9972,7 +10678,7 @@
                 </a:solidFill>
                 <a:latin typeface="맑은 고딕"/>
               </a:rPr>
-              <a:t>•  DROP은 응답을 보내지 않으므로 타임아웃을 기다려야 한다</a:t>
+              <a:t>•  원인 제거 후에도 목적지는 실패 상태로 남음</a:t>
             </a:r>
           </a:p>
           <a:p>
@@ -9988,7 +10694,7 @@
                 </a:solidFill>
                 <a:latin typeface="맑은 고딕"/>
               </a:rPr>
-              <a:t>•  리스너 부재는 즉시 거부(ORA-12541) — 응답 속도가 진단 단서</a:t>
+              <a:t>•  DEFER 후 ENABLE로 즉시 재시도</a:t>
             </a:r>
           </a:p>
         </p:txBody>
@@ -10089,7 +10795,7 @@
                 </a:solidFill>
                 <a:latin typeface="맑은 고딕"/>
               </a:rPr>
-              <a:t>같은 ORA-16191, 다른 원인</a:t>
+              <a:t>실무 시나리오: 비밀번호 변경 다음 날</a:t>
             </a:r>
           </a:p>
         </p:txBody>
@@ -10128,7 +10834,7 @@
                 </a:solidFill>
                 <a:latin typeface="맑은 고딕"/>
               </a:rPr>
-              <a:t>가르는 법</a:t>
+              <a:t>transport lag가 계속 늘어난다</a:t>
             </a:r>
           </a:p>
         </p:txBody>
@@ -10167,7 +10873,7 @@
                 </a:solidFill>
                 <a:latin typeface="맑은 고딕"/>
               </a:rPr>
-              <a:t>•  실습 05 (패스워드 없음) → ORA-16191</a:t>
+              <a:t>•  Primary에서 orapwd로 SYS 비밀번호 변경</a:t>
             </a:r>
           </a:p>
           <a:p>
@@ -10183,7 +10889,7 @@
                 </a:solidFill>
                 <a:latin typeface="맑은 고딕"/>
               </a:rPr>
-              <a:t>•  실습 06 (방화벽 차단) → ORA-16191</a:t>
+              <a:t>•  업무 영향은 없고 다음 날 lag 증가 발견</a:t>
             </a:r>
           </a:p>
           <a:p>
@@ -10199,7 +10905,7 @@
                 </a:solidFill>
                 <a:latin typeface="맑은 고딕"/>
               </a:rPr>
-              <a:t>•  같은 번호인데 원인이 전혀 다르다</a:t>
+              <a:t>•  목적지 오류 ORA-16191, 원격 접속 ORA-01017</a:t>
             </a:r>
           </a:p>
           <a:p>
@@ -10215,23 +10921,7 @@
                 </a:solidFill>
                 <a:latin typeface="맑은 고딕"/>
               </a:rPr>
-              <a:t>•  가르는 법 : tnsping OK + ORA-16191 → 인증 / tnsping 실패 + ORA-16191 → 네트워크</a:t>
-            </a:r>
-          </a:p>
-          <a:p>
-            <a:pPr algn="l">
-              <a:spcAft>
-                <a:spcPts val="1000"/>
-              </a:spcAft>
-            </a:pPr>
-            <a:r>
-              <a:rPr sz="1700" b="0">
-                <a:solidFill>
-                  <a:srgbClr val="222222"/>
-                </a:solidFill>
-                <a:latin typeface="맑은 고딕"/>
-              </a:rPr>
-              <a:t>•  더 확실한 방법 : 수동 SYS 접속을 시도한다</a:t>
+              <a:t>•  파일 복사, DEFER·ENABLE로 전송 재개</a:t>
             </a:r>
           </a:p>
         </p:txBody>
@@ -10263,7 +10953,7 @@
         <p:spPr>
           <a:xfrm>
             <a:off x="0" y="0"/>
-            <a:ext cx="12191695" cy="1005840"/>
+            <a:ext cx="12191695" cy="6858000"/>
           </a:xfrm>
           <a:prstGeom prst="rect">
             <a:avLst/>
@@ -10306,8 +10996,8 @@
         </p:nvSpPr>
         <p:spPr>
           <a:xfrm>
-            <a:off x="548640" y="91440"/>
-            <a:ext cx="10972800" cy="777240"/>
+            <a:off x="822960" y="2011680"/>
+            <a:ext cx="10515600" cy="1097280"/>
           </a:xfrm>
           <a:prstGeom prst="rect">
             <a:avLst/>
@@ -10326,13 +11016,13 @@
               </a:spcAft>
             </a:pPr>
             <a:r>
-              <a:rPr sz="2600" b="1">
+              <a:rPr sz="4000" b="1">
                 <a:solidFill>
                   <a:srgbClr val="FFFFFF"/>
                 </a:solidFill>
                 <a:latin typeface="맑은 고딕"/>
               </a:rPr>
-              <a:t>오류 계층 지도</a:t>
+              <a:t>3.6</a:t>
             </a:r>
           </a:p>
         </p:txBody>
@@ -10345,8 +11035,8 @@
         </p:nvSpPr>
         <p:spPr>
           <a:xfrm>
-            <a:off x="640080" y="1078992"/>
-            <a:ext cx="10881360" cy="457200"/>
+            <a:off x="822960" y="3017520"/>
+            <a:ext cx="10515600" cy="914400"/>
           </a:xfrm>
           <a:prstGeom prst="rect">
             <a:avLst/>
@@ -10365,27 +11055,71 @@
               </a:spcAft>
             </a:pPr>
             <a:r>
-              <a:rPr sz="1500" b="0">
-                <a:solidFill>
-                  <a:srgbClr val="5A6672"/>
-                </a:solidFill>
-                <a:latin typeface="맑은 고딕"/>
-              </a:rPr>
-              <a:t>이 장에서 만난 것들</a:t>
-            </a:r>
-          </a:p>
-        </p:txBody>
-      </p:sp>
-      <p:sp>
-        <p:nvSpPr>
-          <p:cNvPr id="5" name="TextBox 4"/>
+              <a:rPr sz="2800" b="1">
+                <a:solidFill>
+                  <a:srgbClr val="FFFFFF"/>
+                </a:solidFill>
+                <a:latin typeface="맑은 고딕"/>
+              </a:rPr>
+              <a:t>LOG_ARCHIVE_CONFIG와 DG_CONFIG</a:t>
+            </a:r>
+          </a:p>
+        </p:txBody>
+      </p:sp>
+      <p:sp>
+        <p:nvSpPr>
+          <p:cNvPr id="5" name="Rectangle 4"/>
+          <p:cNvSpPr/>
+          <p:nvPr/>
+        </p:nvSpPr>
+        <p:spPr>
+          <a:xfrm>
+            <a:off x="822960" y="4114800"/>
+            <a:ext cx="5486400" cy="54864"/>
+          </a:xfrm>
+          <a:prstGeom prst="rect">
+            <a:avLst/>
+          </a:prstGeom>
+          <a:solidFill>
+            <a:srgbClr val="FFFFFF"/>
+          </a:solidFill>
+          <a:ln>
+            <a:noFill/>
+          </a:ln>
+          <a:effectLst/>
+        </p:spPr>
+        <p:style>
+          <a:lnRef idx="1">
+            <a:schemeClr val="accent1"/>
+          </a:lnRef>
+          <a:fillRef idx="3">
+            <a:schemeClr val="accent1"/>
+          </a:fillRef>
+          <a:effectRef idx="2">
+            <a:schemeClr val="accent1"/>
+          </a:effectRef>
+          <a:fontRef idx="minor">
+            <a:schemeClr val="lt1"/>
+          </a:fontRef>
+        </p:style>
+        <p:txBody>
+          <a:bodyPr rtlCol="0" anchor="ctr"/>
+          <a:lstStyle/>
+          <a:p>
+            <a:pPr algn="ctr"/>
+          </a:p>
+        </p:txBody>
+      </p:sp>
+      <p:sp>
+        <p:nvSpPr>
+          <p:cNvPr id="6" name="TextBox 5"/>
           <p:cNvSpPr txBox="1"/>
           <p:nvPr/>
         </p:nvSpPr>
         <p:spPr>
           <a:xfrm>
-            <a:off x="640080" y="1737360"/>
-            <a:ext cx="10881360" cy="4754880"/>
+            <a:off x="822960" y="4297680"/>
+            <a:ext cx="10058400" cy="2011680"/>
           </a:xfrm>
           <a:prstGeom prst="rect">
             <a:avLst/>
@@ -10400,97 +11134,49 @@
           <a:p>
             <a:pPr algn="l">
               <a:spcAft>
-                <a:spcPts val="1000"/>
-              </a:spcAft>
-            </a:pPr>
-            <a:r>
-              <a:rPr sz="1700" b="0">
-                <a:solidFill>
-                  <a:srgbClr val="222222"/>
-                </a:solidFill>
-                <a:latin typeface="맑은 고딕"/>
-              </a:rPr>
-              <a:t>•  이름 해석 : TNS-03505 (별칭 없음)</a:t>
-            </a:r>
-          </a:p>
-          <a:p>
-            <a:pPr algn="l">
-              <a:spcAft>
-                <a:spcPts val="1000"/>
-              </a:spcAft>
-            </a:pPr>
-            <a:r>
-              <a:rPr sz="1700" b="0">
-                <a:solidFill>
-                  <a:srgbClr val="222222"/>
-                </a:solidFill>
-                <a:latin typeface="맑은 고딕"/>
-              </a:rPr>
-              <a:t>•  네트워크 : TNS-12535 (타임아웃/DROP) · ORA-12541 (리스너 없음/즉시)</a:t>
-            </a:r>
-          </a:p>
-          <a:p>
-            <a:pPr algn="l">
-              <a:spcAft>
-                <a:spcPts val="1000"/>
-              </a:spcAft>
-            </a:pPr>
-            <a:r>
-              <a:rPr sz="1700" b="0">
-                <a:solidFill>
-                  <a:srgbClr val="222222"/>
-                </a:solidFill>
-                <a:latin typeface="맑은 고딕"/>
-              </a:rPr>
-              <a:t>•  리스너 : ORA-12514 (서비스 모름) · ORA-12528 (BLOCKED)</a:t>
-            </a:r>
-          </a:p>
-          <a:p>
-            <a:pPr algn="l">
-              <a:spcAft>
-                <a:spcPts val="1000"/>
-              </a:spcAft>
-            </a:pPr>
-            <a:r>
-              <a:rPr sz="1700" b="0">
-                <a:solidFill>
-                  <a:srgbClr val="222222"/>
-                </a:solidFill>
-                <a:latin typeface="맑은 고딕"/>
-              </a:rPr>
-              <a:t>•  인스턴스 : ORA-01034 (인스턴스 없음)</a:t>
-            </a:r>
-          </a:p>
-          <a:p>
-            <a:pPr algn="l">
-              <a:spcAft>
-                <a:spcPts val="1000"/>
-              </a:spcAft>
-            </a:pPr>
-            <a:r>
-              <a:rPr sz="1700" b="0">
-                <a:solidFill>
-                  <a:srgbClr val="222222"/>
-                </a:solidFill>
-                <a:latin typeface="맑은 고딕"/>
-              </a:rPr>
-              <a:t>•  인증 : ORA-01017 (패스워드) · ORA-16191 (전송 로그온 실패)</a:t>
-            </a:r>
-          </a:p>
-          <a:p>
-            <a:pPr algn="l">
-              <a:spcAft>
-                <a:spcPts val="1000"/>
-              </a:spcAft>
-            </a:pPr>
-            <a:r>
-              <a:rPr sz="1700" b="0">
-                <a:solidFill>
-                  <a:srgbClr val="222222"/>
-                </a:solidFill>
-                <a:latin typeface="맑은 고딕"/>
-              </a:rPr>
-              <a:t>•  구성 : ORA-16053 (DG_CONFIG에 이름 없음)</a:t>
+                <a:spcPts val="800"/>
+              </a:spcAft>
+            </a:pPr>
+            <a:r>
+              <a:rPr sz="1600" b="0">
+                <a:solidFill>
+                  <a:srgbClr val="FFFFFF"/>
+                </a:solidFill>
+                <a:latin typeface="맑은 고딕"/>
+              </a:rPr>
+              <a:t>•  구성원 목록의 역할</a:t>
+            </a:r>
+          </a:p>
+          <a:p>
+            <a:pPr algn="l">
+              <a:spcAft>
+                <a:spcPts val="800"/>
+              </a:spcAft>
+            </a:pPr>
+            <a:r>
+              <a:rPr sz="1600" b="0">
+                <a:solidFill>
+                  <a:srgbClr val="FFFFFF"/>
+                </a:solidFill>
+                <a:latin typeface="맑은 고딕"/>
+              </a:rPr>
+              <a:t>•  SEND, RECEIVE 옵션</a:t>
+            </a:r>
+          </a:p>
+          <a:p>
+            <a:pPr algn="l">
+              <a:spcAft>
+                <a:spcPts val="800"/>
+              </a:spcAft>
+            </a:pPr>
+            <a:r>
+              <a:rPr sz="1600" b="0">
+                <a:solidFill>
+                  <a:srgbClr val="FFFFFF"/>
+                </a:solidFill>
+                <a:latin typeface="맑은 고딕"/>
+              </a:rPr>
+              <a:t>•  FAL 파라미터와의 관계</a:t>
             </a:r>
           </a:p>
         </p:txBody>
@@ -10591,7 +11277,7 @@
                 </a:solidFill>
                 <a:latin typeface="맑은 고딕"/>
               </a:rPr>
-              <a:t>이 장의 구성 (Agenda)</a:t>
+              <a:t>Agenda</a:t>
             </a:r>
           </a:p>
         </p:txBody>
@@ -10630,7 +11316,7 @@
                 </a:solidFill>
                 <a:latin typeface="맑은 고딕"/>
               </a:rPr>
-              <a:t>•  3.2  Data Guard가 Oracle Net에 요구하는 것</a:t>
+              <a:t>•  3.2  Data Guard에서 Oracle Net이 쓰이는 곳</a:t>
             </a:r>
           </a:p>
           <a:p>
@@ -10646,7 +11332,7 @@
                 </a:solidFill>
                 <a:latin typeface="맑은 고딕"/>
               </a:rPr>
-              <a:t>•  3.3  정적 등록 — 이 장의 핵심</a:t>
+              <a:t>•  3.3  이름 해석과 tnsnames.ora</a:t>
             </a:r>
           </a:p>
           <a:p>
@@ -10662,7 +11348,7 @@
                 </a:solidFill>
                 <a:latin typeface="맑은 고딕"/>
               </a:rPr>
-              <a:t>•  3.4  LOG_ARCHIVE_CONFIG와 DG_CONFIG</a:t>
+              <a:t>•  3.4  리스너와 서비스 등록</a:t>
             </a:r>
           </a:p>
           <a:p>
@@ -10678,7 +11364,7 @@
                 </a:solidFill>
                 <a:latin typeface="맑은 고딕"/>
               </a:rPr>
-              <a:t>•  3.5  인증 — 패스워드 파일</a:t>
+              <a:t>•  3.5  리두 전송 인증  /  3.6  LOG_ARCHIVE_CONFIG와 DG_CONFIG</a:t>
             </a:r>
           </a:p>
           <a:p>
@@ -10694,7 +11380,7 @@
                 </a:solidFill>
                 <a:latin typeface="맑은 고딕"/>
               </a:rPr>
-              <a:t>•  3.6  네트워크 계층 점검</a:t>
+              <a:t>•  3.7  네트워크 성능 조정</a:t>
             </a:r>
           </a:p>
           <a:p>
@@ -10710,7 +11396,7 @@
                 </a:solidFill>
                 <a:latin typeface="맑은 고딕"/>
               </a:rPr>
-              <a:t>•  3.7  진단 순서 정리</a:t>
+              <a:t>•  3.8  연결 검증과 오류 진단  /  3.9  운영 시 주의점</a:t>
             </a:r>
           </a:p>
         </p:txBody>
@@ -10742,7 +11428,7 @@
         <p:spPr>
           <a:xfrm>
             <a:off x="0" y="0"/>
-            <a:ext cx="12191695" cy="6858000"/>
+            <a:ext cx="12191695" cy="1005840"/>
           </a:xfrm>
           <a:prstGeom prst="rect">
             <a:avLst/>
@@ -10785,8 +11471,8 @@
         </p:nvSpPr>
         <p:spPr>
           <a:xfrm>
-            <a:off x="822960" y="2011680"/>
-            <a:ext cx="10515600" cy="1097280"/>
+            <a:off x="548640" y="91440"/>
+            <a:ext cx="10972800" cy="777240"/>
           </a:xfrm>
           <a:prstGeom prst="rect">
             <a:avLst/>
@@ -10805,13 +11491,13 @@
               </a:spcAft>
             </a:pPr>
             <a:r>
-              <a:rPr sz="4000" b="1">
+              <a:rPr sz="2600" b="1">
                 <a:solidFill>
                   <a:srgbClr val="FFFFFF"/>
                 </a:solidFill>
                 <a:latin typeface="맑은 고딕"/>
               </a:rPr>
-              <a:t>3.7</a:t>
+              <a:t>DG_CONFIG 구성원 목록</a:t>
             </a:r>
           </a:p>
         </p:txBody>
@@ -10824,8 +11510,8 @@
         </p:nvSpPr>
         <p:spPr>
           <a:xfrm>
-            <a:off x="822960" y="3017520"/>
-            <a:ext cx="10515600" cy="914400"/>
+            <a:off x="640080" y="1078992"/>
+            <a:ext cx="10881360" cy="457200"/>
           </a:xfrm>
           <a:prstGeom prst="rect">
             <a:avLst/>
@@ -10844,71 +11530,27 @@
               </a:spcAft>
             </a:pPr>
             <a:r>
-              <a:rPr sz="2800" b="1">
-                <a:solidFill>
-                  <a:srgbClr val="FFFFFF"/>
-                </a:solidFill>
-                <a:latin typeface="맑은 고딕"/>
-              </a:rPr>
-              <a:t>진단 순서 정리</a:t>
-            </a:r>
-          </a:p>
-        </p:txBody>
-      </p:sp>
-      <p:sp>
-        <p:nvSpPr>
-          <p:cNvPr id="5" name="Rectangle 4"/>
-          <p:cNvSpPr/>
-          <p:nvPr/>
-        </p:nvSpPr>
-        <p:spPr>
-          <a:xfrm>
-            <a:off x="822960" y="4114800"/>
-            <a:ext cx="5486400" cy="54864"/>
-          </a:xfrm>
-          <a:prstGeom prst="rect">
-            <a:avLst/>
-          </a:prstGeom>
-          <a:solidFill>
-            <a:srgbClr val="FFFFFF"/>
-          </a:solidFill>
-          <a:ln>
-            <a:noFill/>
-          </a:ln>
-          <a:effectLst/>
-        </p:spPr>
-        <p:style>
-          <a:lnRef idx="1">
-            <a:schemeClr val="accent1"/>
-          </a:lnRef>
-          <a:fillRef idx="3">
-            <a:schemeClr val="accent1"/>
-          </a:fillRef>
-          <a:effectRef idx="2">
-            <a:schemeClr val="accent1"/>
-          </a:effectRef>
-          <a:fontRef idx="minor">
-            <a:schemeClr val="lt1"/>
-          </a:fontRef>
-        </p:style>
-        <p:txBody>
-          <a:bodyPr rtlCol="0" anchor="ctr"/>
-          <a:lstStyle/>
-          <a:p>
-            <a:pPr algn="ctr"/>
-          </a:p>
-        </p:txBody>
-      </p:sp>
-      <p:sp>
-        <p:nvSpPr>
-          <p:cNvPr id="6" name="TextBox 5"/>
+              <a:rPr sz="1500" b="0">
+                <a:solidFill>
+                  <a:srgbClr val="5A6672"/>
+                </a:solidFill>
+                <a:latin typeface="맑은 고딕"/>
+              </a:rPr>
+              <a:t>이 구성에 누가 속하는가</a:t>
+            </a:r>
+          </a:p>
+        </p:txBody>
+      </p:sp>
+      <p:sp>
+        <p:nvSpPr>
+          <p:cNvPr id="5" name="TextBox 4"/>
           <p:cNvSpPr txBox="1"/>
           <p:nvPr/>
         </p:nvSpPr>
         <p:spPr>
           <a:xfrm>
-            <a:off x="822960" y="4297680"/>
-            <a:ext cx="10058400" cy="2011680"/>
+            <a:off x="640080" y="1737360"/>
+            <a:ext cx="10881360" cy="4754880"/>
           </a:xfrm>
           <a:prstGeom prst="rect">
             <a:avLst/>
@@ -10923,49 +11565,65 @@
           <a:p>
             <a:pPr algn="l">
               <a:spcAft>
-                <a:spcPts val="800"/>
-              </a:spcAft>
-            </a:pPr>
-            <a:r>
-              <a:rPr sz="1600" b="0">
-                <a:solidFill>
-                  <a:srgbClr val="FFFFFF"/>
-                </a:solidFill>
-                <a:latin typeface="맑은 고딕"/>
-              </a:rPr>
-              <a:t>•  세 도구로 여섯 계층</a:t>
-            </a:r>
-          </a:p>
-          <a:p>
-            <a:pPr algn="l">
-              <a:spcAft>
-                <a:spcPts val="800"/>
-              </a:spcAft>
-            </a:pPr>
-            <a:r>
-              <a:rPr sz="1600" b="0">
-                <a:solidFill>
-                  <a:srgbClr val="FFFFFF"/>
-                </a:solidFill>
-                <a:latin typeface="맑은 고딕"/>
-              </a:rPr>
-              <a:t>•  고친 뒤에는 상태를 되살린다</a:t>
-            </a:r>
-          </a:p>
-          <a:p>
-            <a:pPr algn="l">
-              <a:spcAft>
-                <a:spcPts val="800"/>
-              </a:spcAft>
-            </a:pPr>
-            <a:r>
-              <a:rPr sz="1600" b="0">
-                <a:solidFill>
-                  <a:srgbClr val="FFFFFF"/>
-                </a:solidFill>
-                <a:latin typeface="맑은 고딕"/>
-              </a:rPr>
-              <a:t>•  실제 흐름까지 확인해야 끝이다</a:t>
+                <a:spcPts val="1000"/>
+              </a:spcAft>
+            </a:pPr>
+            <a:r>
+              <a:rPr sz="1700" b="0">
+                <a:solidFill>
+                  <a:srgbClr val="222222"/>
+                </a:solidFill>
+                <a:latin typeface="맑은 고딕"/>
+              </a:rPr>
+              <a:t>•  모든 구성원의 DB_UNIQUE_NAME을 나열</a:t>
+            </a:r>
+          </a:p>
+          <a:p>
+            <a:pPr algn="l">
+              <a:spcAft>
+                <a:spcPts val="1000"/>
+              </a:spcAft>
+            </a:pPr>
+            <a:r>
+              <a:rPr sz="1700" b="0">
+                <a:solidFill>
+                  <a:srgbClr val="222222"/>
+                </a:solidFill>
+                <a:latin typeface="맑은 고딕"/>
+              </a:rPr>
+              <a:t>•  목적지 DB_UNIQUE_NAME 검사, 없으면 ORA-16053</a:t>
+            </a:r>
+          </a:p>
+          <a:p>
+            <a:pPr algn="l">
+              <a:spcAft>
+                <a:spcPts val="1000"/>
+              </a:spcAft>
+            </a:pPr>
+            <a:r>
+              <a:rPr sz="1700" b="0">
+                <a:solidFill>
+                  <a:srgbClr val="222222"/>
+                </a:solidFill>
+                <a:latin typeface="맑은 고딕"/>
+              </a:rPr>
+              <a:t>•  목록 밖에서 온 리두는 수신 거부</a:t>
+            </a:r>
+          </a:p>
+          <a:p>
+            <a:pPr algn="l">
+              <a:spcAft>
+                <a:spcPts val="1000"/>
+              </a:spcAft>
+            </a:pPr>
+            <a:r>
+              <a:rPr sz="1700" b="0">
+                <a:solidFill>
+                  <a:srgbClr val="222222"/>
+                </a:solidFill>
+                <a:latin typeface="맑은 고딕"/>
+              </a:rPr>
+              <a:t>•  모든 구성원에 같은 목록</a:t>
             </a:r>
           </a:p>
         </p:txBody>
@@ -11066,7 +11724,7 @@
                 </a:solidFill>
                 <a:latin typeface="맑은 고딕"/>
               </a:rPr>
-              <a:t>표준 진단 절차</a:t>
+              <a:t>SEND, RECEIVE 옵션</a:t>
             </a:r>
           </a:p>
         </p:txBody>
@@ -11105,7 +11763,7 @@
                 </a:solidFill>
                 <a:latin typeface="맑은 고딕"/>
               </a:rPr>
-              <a:t>세 도구로 여섯 계층</a:t>
+              <a:t>기본값을 거의 바꾸지 않는다</a:t>
             </a:r>
           </a:p>
         </p:txBody>
@@ -11144,7 +11802,7 @@
                 </a:solidFill>
                 <a:latin typeface="맑은 고딕"/>
               </a:rPr>
-              <a:t>•  ① tnsping — 이름 해석 · 네트워크 · 리스너 생존</a:t>
+              <a:t>•  기본값은 SEND, RECEIVE</a:t>
             </a:r>
           </a:p>
           <a:p>
@@ -11160,7 +11818,7 @@
                 </a:solidFill>
                 <a:latin typeface="맑은 고딕"/>
               </a:rPr>
-              <a:t>•  ② lsnrctl status (상대 노드) — 서비스 등록 · 인스턴스 status</a:t>
+              <a:t>•  NOSEND: 리두를 보내지 않음</a:t>
             </a:r>
           </a:p>
           <a:p>
@@ -11176,7 +11834,7 @@
                 </a:solidFill>
                 <a:latin typeface="맑은 고딕"/>
               </a:rPr>
-              <a:t>•  ③ sqlplus "sys/oracle@별칭 as sysdba" — 인스턴스 · 인증</a:t>
+              <a:t>•  NORECEIVE: 리두를 받지 않음</a:t>
             </a:r>
           </a:p>
           <a:p>
@@ -11192,55 +11850,7 @@
                 </a:solidFill>
                 <a:latin typeface="맑은 고딕"/>
               </a:rPr>
-              <a:t>•  ④ LOG_ARCHIVE_CONFIG 확인 — 구성 선언</a:t>
-            </a:r>
-          </a:p>
-          <a:p>
-            <a:pPr algn="l">
-              <a:spcAft>
-                <a:spcPts val="1000"/>
-              </a:spcAft>
-            </a:pPr>
-            <a:r>
-              <a:rPr sz="1700" b="0">
-                <a:solidFill>
-                  <a:srgbClr val="222222"/>
-                </a:solidFill>
-                <a:latin typeface="맑은 고딕"/>
-              </a:rPr>
-              <a:t>•  ⑤ V$ARCHIVE_DEST / V$ARCHIVE_DEST_STATUS (2장)</a:t>
-            </a:r>
-          </a:p>
-          <a:p>
-            <a:pPr algn="l">
-              <a:spcAft>
-                <a:spcPts val="1000"/>
-              </a:spcAft>
-            </a:pPr>
-            <a:r>
-              <a:rPr sz="1700" b="0">
-                <a:solidFill>
-                  <a:srgbClr val="222222"/>
-                </a:solidFill>
-                <a:latin typeface="맑은 고딕"/>
-              </a:rPr>
-              <a:t>•  ⑥ 고쳤으면 DEFER → ENABLE → 로그 스위치</a:t>
-            </a:r>
-          </a:p>
-          <a:p>
-            <a:pPr algn="l">
-              <a:spcAft>
-                <a:spcPts val="1000"/>
-              </a:spcAft>
-            </a:pPr>
-            <a:r>
-              <a:rPr sz="1700" b="0">
-                <a:solidFill>
-                  <a:srgbClr val="222222"/>
-                </a:solidFill>
-                <a:latin typeface="맑은 고딕"/>
-              </a:rPr>
-              <a:t>•  ⑦ Standby 시퀀스 상승과 lag 0 확인 — 여기까지가 완료</a:t>
+              <a:t>•  잘못 남기면 역할 전환 뒤 전송이 시작되지 않음</a:t>
             </a:r>
           </a:p>
         </p:txBody>
@@ -11341,7 +11951,7 @@
                 </a:solidFill>
                 <a:latin typeface="맑은 고딕"/>
               </a:rPr>
-              <a:t>리스너 로그 활용</a:t>
+              <a:t>FAL_SERVER와 FAL_CLIENT</a:t>
             </a:r>
           </a:p>
         </p:txBody>
@@ -11380,7 +11990,7 @@
                 </a:solidFill>
                 <a:latin typeface="맑은 고딕"/>
               </a:rPr>
-              <a:t>클라이언트가 실제로 보낸 이름을 본다</a:t>
+              <a:t>갭 해소도 Oracle Net 접속이다</a:t>
             </a:r>
           </a:p>
         </p:txBody>
@@ -11419,7 +12029,7 @@
                 </a:solidFill>
                 <a:latin typeface="맑은 고딕"/>
               </a:rPr>
-              <a:t>•  위치 : $ORACLE_BASE/diag/tnslsnr/&lt;host&gt;/listener/alert/log.xml</a:t>
+              <a:t>•  FAL_SERVER: 빠진 로그를 요청할 대상 별칭</a:t>
             </a:r>
           </a:p>
           <a:p>
@@ -11435,7 +12045,7 @@
                 </a:solidFill>
                 <a:latin typeface="맑은 고딕"/>
               </a:rPr>
-              <a:t>•  평문 : 같은 계층의 trace 디렉터리에 있는 listener.log</a:t>
+              <a:t>•  Standby에는 Primary, Primary에는 Standby 별칭</a:t>
             </a:r>
           </a:p>
           <a:p>
@@ -11451,7 +12061,7 @@
                 </a:solidFill>
                 <a:latin typeface="맑은 고딕"/>
               </a:rPr>
-              <a:t>•  기록되는 것 : 접속 요청 시각 · 요청한 SERVICE_NAME · 클라이언트 주소 · 처리 결과</a:t>
+              <a:t>•  FAL_CLIENT는 11.2부터 필수 아님</a:t>
             </a:r>
           </a:p>
           <a:p>
@@ -11467,23 +12077,7 @@
                 </a:solidFill>
                 <a:latin typeface="맑은 고딕"/>
               </a:rPr>
-              <a:t>•  ORA-12514가 났을 때 오타인지 누락인지 구분하는 결정적 근거</a:t>
-            </a:r>
-          </a:p>
-          <a:p>
-            <a:pPr algn="l">
-              <a:spcAft>
-                <a:spcPts val="1000"/>
-              </a:spcAft>
-            </a:pPr>
-            <a:r>
-              <a:rPr sz="1700" b="0">
-                <a:solidFill>
-                  <a:srgbClr val="222222"/>
-                </a:solidFill>
-                <a:latin typeface="맑은 고딕"/>
-              </a:rPr>
-              <a:t>•  데이터베이스 알림 로그에는 NI connect error가 스택과 함께 남는다</a:t>
+              <a:t>•  Standby 쪽 tnsnames.ora와 Primary 리스너가 필요</a:t>
             </a:r>
           </a:p>
         </p:txBody>
@@ -11515,7 +12109,7 @@
         <p:spPr>
           <a:xfrm>
             <a:off x="0" y="0"/>
-            <a:ext cx="12191695" cy="1005840"/>
+            <a:ext cx="12191695" cy="6858000"/>
           </a:xfrm>
           <a:prstGeom prst="rect">
             <a:avLst/>
@@ -11558,8 +12152,8 @@
         </p:nvSpPr>
         <p:spPr>
           <a:xfrm>
-            <a:off x="548640" y="91440"/>
-            <a:ext cx="10972800" cy="777240"/>
+            <a:off x="822960" y="2011680"/>
+            <a:ext cx="10515600" cy="1097280"/>
           </a:xfrm>
           <a:prstGeom prst="rect">
             <a:avLst/>
@@ -11578,13 +12172,13 @@
               </a:spcAft>
             </a:pPr>
             <a:r>
-              <a:rPr sz="2600" b="1">
+              <a:rPr sz="4000" b="1">
                 <a:solidFill>
                   <a:srgbClr val="FFFFFF"/>
                 </a:solidFill>
                 <a:latin typeface="맑은 고딕"/>
               </a:rPr>
-              <a:t>구성 변경 후 반드시 할 것</a:t>
+              <a:t>3.7</a:t>
             </a:r>
           </a:p>
         </p:txBody>
@@ -11597,8 +12191,8 @@
         </p:nvSpPr>
         <p:spPr>
           <a:xfrm>
-            <a:off x="640080" y="1078992"/>
-            <a:ext cx="10881360" cy="457200"/>
+            <a:off x="822960" y="3017520"/>
+            <a:ext cx="10515600" cy="914400"/>
           </a:xfrm>
           <a:prstGeom prst="rect">
             <a:avLst/>
@@ -11617,27 +12211,71 @@
               </a:spcAft>
             </a:pPr>
             <a:r>
-              <a:rPr sz="1500" b="0">
-                <a:solidFill>
-                  <a:srgbClr val="5A6672"/>
-                </a:solidFill>
-                <a:latin typeface="맑은 고딕"/>
-              </a:rPr>
-              <a:t>다섯 단계</a:t>
-            </a:r>
-          </a:p>
-        </p:txBody>
-      </p:sp>
-      <p:sp>
-        <p:nvSpPr>
-          <p:cNvPr id="5" name="TextBox 4"/>
+              <a:rPr sz="2800" b="1">
+                <a:solidFill>
+                  <a:srgbClr val="FFFFFF"/>
+                </a:solidFill>
+                <a:latin typeface="맑은 고딕"/>
+              </a:rPr>
+              <a:t>네트워크 성능 조정</a:t>
+            </a:r>
+          </a:p>
+        </p:txBody>
+      </p:sp>
+      <p:sp>
+        <p:nvSpPr>
+          <p:cNvPr id="5" name="Rectangle 4"/>
+          <p:cNvSpPr/>
+          <p:nvPr/>
+        </p:nvSpPr>
+        <p:spPr>
+          <a:xfrm>
+            <a:off x="822960" y="4114800"/>
+            <a:ext cx="5486400" cy="54864"/>
+          </a:xfrm>
+          <a:prstGeom prst="rect">
+            <a:avLst/>
+          </a:prstGeom>
+          <a:solidFill>
+            <a:srgbClr val="FFFFFF"/>
+          </a:solidFill>
+          <a:ln>
+            <a:noFill/>
+          </a:ln>
+          <a:effectLst/>
+        </p:spPr>
+        <p:style>
+          <a:lnRef idx="1">
+            <a:schemeClr val="accent1"/>
+          </a:lnRef>
+          <a:fillRef idx="3">
+            <a:schemeClr val="accent1"/>
+          </a:fillRef>
+          <a:effectRef idx="2">
+            <a:schemeClr val="accent1"/>
+          </a:effectRef>
+          <a:fontRef idx="minor">
+            <a:schemeClr val="lt1"/>
+          </a:fontRef>
+        </p:style>
+        <p:txBody>
+          <a:bodyPr rtlCol="0" anchor="ctr"/>
+          <a:lstStyle/>
+          <a:p>
+            <a:pPr algn="ctr"/>
+          </a:p>
+        </p:txBody>
+      </p:sp>
+      <p:sp>
+        <p:nvSpPr>
+          <p:cNvPr id="6" name="TextBox 5"/>
           <p:cNvSpPr txBox="1"/>
           <p:nvPr/>
         </p:nvSpPr>
         <p:spPr>
           <a:xfrm>
-            <a:off x="640080" y="1737360"/>
-            <a:ext cx="10881360" cy="4754880"/>
+            <a:off x="822960" y="4297680"/>
+            <a:ext cx="10058400" cy="2011680"/>
           </a:xfrm>
           <a:prstGeom prst="rect">
             <a:avLst/>
@@ -11652,81 +12290,49 @@
           <a:p>
             <a:pPr algn="l">
               <a:spcAft>
-                <a:spcPts val="1000"/>
-              </a:spcAft>
-            </a:pPr>
-            <a:r>
-              <a:rPr sz="1700" b="0">
-                <a:solidFill>
-                  <a:srgbClr val="222222"/>
-                </a:solidFill>
-                <a:latin typeface="맑은 고딕"/>
-              </a:rPr>
-              <a:t>•  ① 양쪽 노드에서 확인한다 — 한쪽만 고치는 것이 가장 흔한 실수</a:t>
-            </a:r>
-          </a:p>
-          <a:p>
-            <a:pPr algn="l">
-              <a:spcAft>
-                <a:spcPts val="1000"/>
-              </a:spcAft>
-            </a:pPr>
-            <a:r>
-              <a:rPr sz="1700" b="0">
-                <a:solidFill>
-                  <a:srgbClr val="222222"/>
-                </a:solidFill>
-                <a:latin typeface="맑은 고딕"/>
-              </a:rPr>
-              <a:t>•  ② 양방향 tnsping — FAL과 역할 전환 대비</a:t>
-            </a:r>
-          </a:p>
-          <a:p>
-            <a:pPr algn="l">
-              <a:spcAft>
-                <a:spcPts val="1000"/>
-              </a:spcAft>
-            </a:pPr>
-            <a:r>
-              <a:rPr sz="1700" b="0">
-                <a:solidFill>
-                  <a:srgbClr val="222222"/>
-                </a:solidFill>
-                <a:latin typeface="맑은 고딕"/>
-              </a:rPr>
-              <a:t>•  ③ 실제 SYS 접속 — tnsping이 통과해도 접속은 실패할 수 있다</a:t>
-            </a:r>
-          </a:p>
-          <a:p>
-            <a:pPr algn="l">
-              <a:spcAft>
-                <a:spcPts val="1000"/>
-              </a:spcAft>
-            </a:pPr>
-            <a:r>
-              <a:rPr sz="1700" b="0">
-                <a:solidFill>
-                  <a:srgbClr val="222222"/>
-                </a:solidFill>
-                <a:latin typeface="맑은 고딕"/>
-              </a:rPr>
-              <a:t>•  ④ 목적지 상태 회복 — DEFER → ENABLE → 로그 스위치</a:t>
-            </a:r>
-          </a:p>
-          <a:p>
-            <a:pPr algn="l">
-              <a:spcAft>
-                <a:spcPts val="1000"/>
-              </a:spcAft>
-            </a:pPr>
-            <a:r>
-              <a:rPr sz="1700" b="0">
-                <a:solidFill>
-                  <a:srgbClr val="222222"/>
-                </a:solidFill>
-                <a:latin typeface="맑은 고딕"/>
-              </a:rPr>
-              <a:t>•  ⑤ 실제 리두 흐름 확인 — RFS 시퀀스 상승, 두 lag 0</a:t>
+                <a:spcPts val="800"/>
+              </a:spcAft>
+            </a:pPr>
+            <a:r>
+              <a:rPr sz="1600" b="0">
+                <a:solidFill>
+                  <a:srgbClr val="FFFFFF"/>
+                </a:solidFill>
+                <a:latin typeface="맑은 고딕"/>
+              </a:rPr>
+              <a:t>•  SDU</a:t>
+            </a:r>
+          </a:p>
+          <a:p>
+            <a:pPr algn="l">
+              <a:spcAft>
+                <a:spcPts val="800"/>
+              </a:spcAft>
+            </a:pPr>
+            <a:r>
+              <a:rPr sz="1600" b="0">
+                <a:solidFill>
+                  <a:srgbClr val="FFFFFF"/>
+                </a:solidFill>
+                <a:latin typeface="맑은 고딕"/>
+              </a:rPr>
+              <a:t>•  TCP 소켓 버퍼와 BDP</a:t>
+            </a:r>
+          </a:p>
+          <a:p>
+            <a:pPr algn="l">
+              <a:spcAft>
+                <a:spcPts val="800"/>
+              </a:spcAft>
+            </a:pPr>
+            <a:r>
+              <a:rPr sz="1600" b="0">
+                <a:solidFill>
+                  <a:srgbClr val="FFFFFF"/>
+                </a:solidFill>
+                <a:latin typeface="맑은 고딕"/>
+              </a:rPr>
+              <a:t>•  커널 한도와 TCP.NODELAY</a:t>
             </a:r>
           </a:p>
         </p:txBody>
@@ -11827,7 +12433,7 @@
                 </a:solidFill>
                 <a:latin typeface="맑은 고딕"/>
               </a:rPr>
-              <a:t>퀴즈 (Quiz)</a:t>
+              <a:t>SDU</a:t>
             </a:r>
           </a:p>
         </p:txBody>
@@ -11840,8 +12446,8 @@
         </p:nvSpPr>
         <p:spPr>
           <a:xfrm>
-            <a:off x="640080" y="1371600"/>
-            <a:ext cx="10881360" cy="5120640"/>
+            <a:off x="640080" y="1078992"/>
+            <a:ext cx="10881360" cy="457200"/>
           </a:xfrm>
           <a:prstGeom prst="rect">
             <a:avLst/>
@@ -11856,17 +12462,56 @@
           <a:p>
             <a:pPr algn="l">
               <a:spcAft>
+                <a:spcPts val="600"/>
+              </a:spcAft>
+            </a:pPr>
+            <a:r>
+              <a:rPr sz="1500" b="0">
+                <a:solidFill>
+                  <a:srgbClr val="5A6672"/>
+                </a:solidFill>
+                <a:latin typeface="맑은 고딕"/>
+              </a:rPr>
+              <a:t>리두를 몇 조각으로 나눠 보내는가</a:t>
+            </a:r>
+          </a:p>
+        </p:txBody>
+      </p:sp>
+      <p:sp>
+        <p:nvSpPr>
+          <p:cNvPr id="5" name="TextBox 4"/>
+          <p:cNvSpPr txBox="1"/>
+          <p:nvPr/>
+        </p:nvSpPr>
+        <p:spPr>
+          <a:xfrm>
+            <a:off x="640080" y="1737360"/>
+            <a:ext cx="10881360" cy="4754880"/>
+          </a:xfrm>
+          <a:prstGeom prst="rect">
+            <a:avLst/>
+          </a:prstGeom>
+          <a:noFill/>
+        </p:spPr>
+        <p:txBody>
+          <a:bodyPr wrap="square">
+            <a:spAutoFit/>
+          </a:bodyPr>
+          <a:lstStyle/>
+          <a:p>
+            <a:pPr algn="l">
+              <a:spcAft>
                 <a:spcPts val="1000"/>
               </a:spcAft>
             </a:pPr>
             <a:r>
-              <a:rPr sz="1600" b="0">
+              <a:rPr sz="1700" b="0">
                 <a:solidFill>
                   <a:srgbClr val="222222"/>
                 </a:solidFill>
                 <a:latin typeface="맑은 고딕"/>
               </a:rPr>
-              <a:t>•  Q1. Data Guard가 정적 등록을 요구하는 이유를 5장 RMAN DUPLICATE와 연결해 설명하라.</a:t>
+              <a:t>•  Oracle Net 버퍼 단위, 기본 8192바이트</a:t>
             </a:r>
           </a:p>
           <a:p>
@@ -11876,13 +12521,13 @@
               </a:spcAft>
             </a:pPr>
             <a:r>
-              <a:rPr sz="1600" b="0">
+              <a:rPr sz="1700" b="0">
                 <a:solidFill>
                   <a:srgbClr val="222222"/>
                 </a:solidFill>
                 <a:latin typeface="맑은 고딕"/>
               </a:rPr>
-              <a:t>•  Q2. lsnrctl status의 BLOCKED와 UNKNOWN은 각각 무엇을 뜻하며 접속 가능 여부는?</a:t>
+              <a:t>•  리두는 훨씬 큰 단위로 흐름</a:t>
             </a:r>
           </a:p>
           <a:p>
@@ -11892,13 +12537,13 @@
               </a:spcAft>
             </a:pPr>
             <a:r>
-              <a:rPr sz="1600" b="0">
+              <a:rPr sz="1700" b="0">
                 <a:solidFill>
                   <a:srgbClr val="222222"/>
                 </a:solidFill>
                 <a:latin typeface="맑은 고딕"/>
               </a:rPr>
-              <a:t>•  Q3. ORA-12514와 ORA-12528의 차이는 무엇이며 각각의 조치는?</a:t>
+              <a:t>•  권고값 64KB(65535), 12.1부터 상한 2MB</a:t>
             </a:r>
           </a:p>
           <a:p>
@@ -11908,45 +12553,13 @@
               </a:spcAft>
             </a:pPr>
             <a:r>
-              <a:rPr sz="1600" b="0">
+              <a:rPr sz="1700" b="0">
                 <a:solidFill>
                   <a:srgbClr val="222222"/>
                 </a:solidFill>
                 <a:latin typeface="맑은 고딕"/>
               </a:rPr>
-              <a:t>•  Q4. tnsping이 OK인데 접속이 실패한다. 무엇을 의심해야 하는가? 세 가지를 들라.</a:t>
-            </a:r>
-          </a:p>
-          <a:p>
-            <a:pPr algn="l">
-              <a:spcAft>
-                <a:spcPts val="1000"/>
-              </a:spcAft>
-            </a:pPr>
-            <a:r>
-              <a:rPr sz="1600" b="0">
-                <a:solidFill>
-                  <a:srgbClr val="222222"/>
-                </a:solidFill>
-                <a:latin typeface="맑은 고딕"/>
-              </a:rPr>
-              <a:t>•  Q5. ORA-16191이 나타났다. 어느 계층이며, 원인을 고친 뒤에도 회복되지 않으면 무엇을 해야 하는가?</a:t>
-            </a:r>
-          </a:p>
-          <a:p>
-            <a:pPr algn="l">
-              <a:spcAft>
-                <a:spcPts val="1000"/>
-              </a:spcAft>
-            </a:pPr>
-            <a:r>
-              <a:rPr sz="1600" b="0">
-                <a:solidFill>
-                  <a:srgbClr val="222222"/>
-                </a:solidFill>
-                <a:latin typeface="맑은 고딕"/>
-              </a:rPr>
-              <a:t>•  Q6. 방화벽 DROP과 리스너 부재를 오류 번호와 응답 속도로 구분하는 방법은?</a:t>
+              <a:t>•  양쪽 협상값 중 작은 값이 적용됨</a:t>
             </a:r>
           </a:p>
         </p:txBody>
@@ -12047,7 +12660,7 @@
                 </a:solidFill>
                 <a:latin typeface="맑은 고딕"/>
               </a:rPr>
-              <a:t>요약 (Summary)</a:t>
+              <a:t>TCP 소켓 버퍼와 BDP</a:t>
             </a:r>
           </a:p>
         </p:txBody>
@@ -12060,8 +12673,8 @@
         </p:nvSpPr>
         <p:spPr>
           <a:xfrm>
-            <a:off x="640080" y="1371600"/>
-            <a:ext cx="10881360" cy="5120640"/>
+            <a:off x="640080" y="1078992"/>
+            <a:ext cx="10881360" cy="457200"/>
           </a:xfrm>
           <a:prstGeom prst="rect">
             <a:avLst/>
@@ -12076,17 +12689,56 @@
           <a:p>
             <a:pPr algn="l">
               <a:spcAft>
+                <a:spcPts val="600"/>
+              </a:spcAft>
+            </a:pPr>
+            <a:r>
+              <a:rPr sz="1500" b="0">
+                <a:solidFill>
+                  <a:srgbClr val="5A6672"/>
+                </a:solidFill>
+                <a:latin typeface="맑은 고딕"/>
+              </a:rPr>
+              <a:t>선로를 채울 만큼의 버퍼</a:t>
+            </a:r>
+          </a:p>
+        </p:txBody>
+      </p:sp>
+      <p:sp>
+        <p:nvSpPr>
+          <p:cNvPr id="5" name="TextBox 4"/>
+          <p:cNvSpPr txBox="1"/>
+          <p:nvPr/>
+        </p:nvSpPr>
+        <p:spPr>
+          <a:xfrm>
+            <a:off x="640080" y="1737360"/>
+            <a:ext cx="10881360" cy="4754880"/>
+          </a:xfrm>
+          <a:prstGeom prst="rect">
+            <a:avLst/>
+          </a:prstGeom>
+          <a:noFill/>
+        </p:spPr>
+        <p:txBody>
+          <a:bodyPr wrap="square">
+            <a:spAutoFit/>
+          </a:bodyPr>
+          <a:lstStyle/>
+          <a:p>
+            <a:pPr algn="l">
+              <a:spcAft>
                 <a:spcPts val="1000"/>
               </a:spcAft>
             </a:pPr>
             <a:r>
-              <a:rPr sz="1600" b="0">
+              <a:rPr sz="1700" b="0">
                 <a:solidFill>
                   <a:srgbClr val="222222"/>
                 </a:solidFill>
                 <a:latin typeface="맑은 고딕"/>
               </a:rPr>
-              <a:t>•  Data Guard는 NOMOUNT 원격 접속 · SYS 인증 · 구성원 선언 세 가지를 추가로 요구한다.</a:t>
+              <a:t>•  BDP = 대역폭(바이트/초) × 왕복 지연(초)</a:t>
             </a:r>
           </a:p>
           <a:p>
@@ -12096,13 +12748,13 @@
               </a:spcAft>
             </a:pPr>
             <a:r>
-              <a:rPr sz="1600" b="0">
+              <a:rPr sz="1700" b="0">
                 <a:solidFill>
                   <a:srgbClr val="222222"/>
                 </a:solidFill>
                 <a:latin typeface="맑은 고딕"/>
               </a:rPr>
-              <a:t>•  tnsnames.ora는 양쪽에 같은 내용을 둔다. 역할 전환 이후 반대 방향 전송에 필요하다.</a:t>
+              <a:t>•  권고값: BDP×3과 10MB 중 큰 값</a:t>
             </a:r>
           </a:p>
           <a:p>
@@ -12112,13 +12764,13 @@
               </a:spcAft>
             </a:pPr>
             <a:r>
-              <a:rPr sz="1600" b="0">
+              <a:rPr sz="1700" b="0">
                 <a:solidFill>
                   <a:srgbClr val="222222"/>
                 </a:solidFill>
                 <a:latin typeface="맑은 고딕"/>
               </a:rPr>
-              <a:t>•  tnsping은 이름 해석·네트워크·리스너 생존까지만 확인한다. 나머지는 실제 접속으로 본다.</a:t>
+              <a:t>•  SEND_BUF_SIZE, RECV_BUF_SIZE</a:t>
             </a:r>
           </a:p>
           <a:p>
@@ -12128,109 +12780,13 @@
               </a:spcAft>
             </a:pPr>
             <a:r>
-              <a:rPr sz="1600" b="0">
+              <a:rPr sz="1700" b="0">
                 <a:solidFill>
                   <a:srgbClr val="222222"/>
                 </a:solidFill>
                 <a:latin typeface="맑은 고딕"/>
               </a:rPr>
-              <a:t>•  정적 등록이 필요한 이유는 NOMOUNT 인스턴스 접속이다. 실측: 제거 → ORA-12514, NOMOUNT → ORA-12528(BLOCKED), 복원 → UNKNOWN으로 접속 성공(STATUS=STARTED).</a:t>
-            </a:r>
-          </a:p>
-          <a:p>
-            <a:pPr algn="l">
-              <a:spcAft>
-                <a:spcPts val="1000"/>
-              </a:spcAft>
-            </a:pPr>
-            <a:r>
-              <a:rPr sz="1600" b="0">
-                <a:solidFill>
-                  <a:srgbClr val="222222"/>
-                </a:solidFill>
-                <a:latin typeface="맑은 고딕"/>
-              </a:rPr>
-              <a:t>•  READY(동적·OPEN) / BLOCKED(동적·NOMOUNT) / UNKNOWN(정적·상태 모름)을 구분한다.</a:t>
-            </a:r>
-          </a:p>
-          <a:p>
-            <a:pPr algn="l">
-              <a:spcAft>
-                <a:spcPts val="1000"/>
-              </a:spcAft>
-            </a:pPr>
-            <a:r>
-              <a:rPr sz="1600" b="0">
-                <a:solidFill>
-                  <a:srgbClr val="222222"/>
-                </a:solidFill>
-                <a:latin typeface="맑은 고딕"/>
-              </a:rPr>
-              <a:t>•  DG_CONFIG는 즉시 막는 스위치가 아니라 안전망이다. 비워도 당장은 돌아가지만 오배송을 막지 못한다.</a:t>
-            </a:r>
-          </a:p>
-          <a:p>
-            <a:pPr algn="l">
-              <a:spcAft>
-                <a:spcPts val="1000"/>
-              </a:spcAft>
-            </a:pPr>
-            <a:r>
-              <a:rPr sz="1600" b="0">
-                <a:solidFill>
-                  <a:srgbClr val="222222"/>
-                </a:solidFill>
-                <a:latin typeface="맑은 고딕"/>
-              </a:rPr>
-              <a:t>•  패스워드 파일은 이름은 달라도 내용이 같아야 한다. 불일치 시 ORA-01017 → ORA-16191.</a:t>
-            </a:r>
-          </a:p>
-          <a:p>
-            <a:pPr algn="l">
-              <a:spcAft>
-                <a:spcPts val="1000"/>
-              </a:spcAft>
-            </a:pPr>
-            <a:r>
-              <a:rPr sz="1600" b="0">
-                <a:solidFill>
-                  <a:srgbClr val="222222"/>
-                </a:solidFill>
-                <a:latin typeface="맑은 고딕"/>
-              </a:rPr>
-              <a:t>•  orapwd 재생성은 OPW-00029에 걸릴 수 있고, 그때 rm은 이미 성공한 뒤다. 백업이 필수다.</a:t>
-            </a:r>
-          </a:p>
-          <a:p>
-            <a:pPr algn="l">
-              <a:spcAft>
-                <a:spcPts val="1000"/>
-              </a:spcAft>
-            </a:pPr>
-            <a:r>
-              <a:rPr sz="1600" b="0">
-                <a:solidFill>
-                  <a:srgbClr val="222222"/>
-                </a:solidFill>
-                <a:latin typeface="맑은 고딕"/>
-              </a:rPr>
-              <a:t>•  원인을 제거해도 목적지가 ERROR로 굳어 있다. DEFER → ENABLE 해야 회복된다.</a:t>
-            </a:r>
-          </a:p>
-          <a:p>
-            <a:pPr algn="l">
-              <a:spcAft>
-                <a:spcPts val="1000"/>
-              </a:spcAft>
-            </a:pPr>
-            <a:r>
-              <a:rPr sz="1600" b="0">
-                <a:solidFill>
-                  <a:srgbClr val="222222"/>
-                </a:solidFill>
-                <a:latin typeface="맑은 고딕"/>
-              </a:rPr>
-              <a:t>•  오류 번호를 계층 지도로 정리하면 진단 순서가 저절로 정해진다.</a:t>
+              <a:t>•  양쪽 tnsnames.ora와 listener.ora에 함께</a:t>
             </a:r>
           </a:p>
         </p:txBody>
@@ -12331,7 +12887,7 @@
                 </a:solidFill>
                 <a:latin typeface="맑은 고딕"/>
               </a:rPr>
-              <a:t>실습 개요 (Practice Overview)</a:t>
+              <a:t>운영체제 커널 한도</a:t>
             </a:r>
           </a:p>
         </p:txBody>
@@ -12344,8 +12900,8 @@
         </p:nvSpPr>
         <p:spPr>
           <a:xfrm>
-            <a:off x="640080" y="1371600"/>
-            <a:ext cx="10881360" cy="5120640"/>
+            <a:off x="640080" y="1078992"/>
+            <a:ext cx="10881360" cy="457200"/>
           </a:xfrm>
           <a:prstGeom prst="rect">
             <a:avLst/>
@@ -12360,113 +12916,813 @@
           <a:p>
             <a:pPr algn="l">
               <a:spcAft>
+                <a:spcPts val="600"/>
+              </a:spcAft>
+            </a:pPr>
+            <a:r>
+              <a:rPr sz="1500" b="0">
+                <a:solidFill>
+                  <a:srgbClr val="5A6672"/>
+                </a:solidFill>
+                <a:latin typeface="맑은 고딕"/>
+              </a:rPr>
+              <a:t>OS가 허용하지 않으면 조용히 줄어든다</a:t>
+            </a:r>
+          </a:p>
+        </p:txBody>
+      </p:sp>
+      <p:sp>
+        <p:nvSpPr>
+          <p:cNvPr id="5" name="TextBox 4"/>
+          <p:cNvSpPr txBox="1"/>
+          <p:nvPr/>
+        </p:nvSpPr>
+        <p:spPr>
+          <a:xfrm>
+            <a:off x="640080" y="1737360"/>
+            <a:ext cx="10881360" cy="4754880"/>
+          </a:xfrm>
+          <a:prstGeom prst="rect">
+            <a:avLst/>
+          </a:prstGeom>
+          <a:noFill/>
+        </p:spPr>
+        <p:txBody>
+          <a:bodyPr wrap="square">
+            <a:spAutoFit/>
+          </a:bodyPr>
+          <a:lstStyle/>
+          <a:p>
+            <a:pPr algn="l">
+              <a:spcAft>
                 <a:spcPts val="1000"/>
               </a:spcAft>
             </a:pPr>
             <a:r>
+              <a:rPr sz="1700" b="0">
+                <a:solidFill>
+                  <a:srgbClr val="222222"/>
+                </a:solidFill>
+                <a:latin typeface="맑은 고딕"/>
+              </a:rPr>
+              <a:t>•  Oracle Net 지정값은 OS 최대값을 넘지 못함</a:t>
+            </a:r>
+          </a:p>
+          <a:p>
+            <a:pPr algn="l">
+              <a:spcAft>
+                <a:spcPts val="1000"/>
+              </a:spcAft>
+            </a:pPr>
+            <a:r>
+              <a:rPr sz="1700" b="0">
+                <a:solidFill>
+                  <a:srgbClr val="222222"/>
+                </a:solidFill>
+                <a:latin typeface="맑은 고딕"/>
+              </a:rPr>
+              <a:t>•  줄어들어도 오류는 나지 않음</a:t>
+            </a:r>
+          </a:p>
+          <a:p>
+            <a:pPr algn="l">
+              <a:spcAft>
+                <a:spcPts val="1000"/>
+              </a:spcAft>
+            </a:pPr>
+            <a:r>
+              <a:rPr sz="1700" b="0">
+                <a:solidFill>
+                  <a:srgbClr val="222222"/>
+                </a:solidFill>
+                <a:latin typeface="맑은 고딕"/>
+              </a:rPr>
+              <a:t>•  rmem_max, wmem_max, tcp_rmem, tcp_wmem</a:t>
+            </a:r>
+          </a:p>
+          <a:p>
+            <a:pPr algn="l">
+              <a:spcAft>
+                <a:spcPts val="1000"/>
+              </a:spcAft>
+            </a:pPr>
+            <a:r>
+              <a:rPr sz="1700" b="0">
+                <a:solidFill>
+                  <a:srgbClr val="222222"/>
+                </a:solidFill>
+                <a:latin typeface="맑은 고딕"/>
+              </a:rPr>
+              <a:t>•  preinstall 패키지 값도 권고보다 작음</a:t>
+            </a:r>
+          </a:p>
+        </p:txBody>
+      </p:sp>
+    </p:spTree>
+  </p:cSld>
+  <p:clrMapOvr>
+    <a:masterClrMapping/>
+  </p:clrMapOvr>
+</p:sld>
+</file>
+
+<file path=ppt/slides/slide37.xml><?xml version="1.0" encoding="utf-8"?>
+<p:sld xmlns:a="http://schemas.openxmlformats.org/drawingml/2006/main" xmlns:p="http://schemas.openxmlformats.org/presentationml/2006/main" xmlns:r="http://schemas.openxmlformats.org/officeDocument/2006/relationships">
+  <p:cSld>
+    <p:spTree>
+      <p:nvGrpSpPr>
+        <p:cNvPr id="1" name=""/>
+        <p:cNvGrpSpPr/>
+        <p:nvPr/>
+      </p:nvGrpSpPr>
+      <p:grpSpPr/>
+      <p:sp>
+        <p:nvSpPr>
+          <p:cNvPr id="2" name="Rectangle 1"/>
+          <p:cNvSpPr/>
+          <p:nvPr/>
+        </p:nvSpPr>
+        <p:spPr>
+          <a:xfrm>
+            <a:off x="0" y="0"/>
+            <a:ext cx="12191695" cy="1005840"/>
+          </a:xfrm>
+          <a:prstGeom prst="rect">
+            <a:avLst/>
+          </a:prstGeom>
+          <a:solidFill>
+            <a:srgbClr val="C0392B"/>
+          </a:solidFill>
+          <a:ln>
+            <a:noFill/>
+          </a:ln>
+          <a:effectLst/>
+        </p:spPr>
+        <p:style>
+          <a:lnRef idx="1">
+            <a:schemeClr val="accent1"/>
+          </a:lnRef>
+          <a:fillRef idx="3">
+            <a:schemeClr val="accent1"/>
+          </a:fillRef>
+          <a:effectRef idx="2">
+            <a:schemeClr val="accent1"/>
+          </a:effectRef>
+          <a:fontRef idx="minor">
+            <a:schemeClr val="lt1"/>
+          </a:fontRef>
+        </p:style>
+        <p:txBody>
+          <a:bodyPr rtlCol="0" anchor="ctr"/>
+          <a:lstStyle/>
+          <a:p>
+            <a:pPr algn="ctr"/>
+          </a:p>
+        </p:txBody>
+      </p:sp>
+      <p:sp>
+        <p:nvSpPr>
+          <p:cNvPr id="3" name="TextBox 2"/>
+          <p:cNvSpPr txBox="1"/>
+          <p:nvPr/>
+        </p:nvSpPr>
+        <p:spPr>
+          <a:xfrm>
+            <a:off x="548640" y="91440"/>
+            <a:ext cx="10972800" cy="777240"/>
+          </a:xfrm>
+          <a:prstGeom prst="rect">
+            <a:avLst/>
+          </a:prstGeom>
+          <a:noFill/>
+        </p:spPr>
+        <p:txBody>
+          <a:bodyPr wrap="square">
+            <a:spAutoFit/>
+          </a:bodyPr>
+          <a:lstStyle/>
+          <a:p>
+            <a:pPr algn="l">
+              <a:spcAft>
+                <a:spcPts val="600"/>
+              </a:spcAft>
+            </a:pPr>
+            <a:r>
+              <a:rPr sz="2600" b="1">
+                <a:solidFill>
+                  <a:srgbClr val="FFFFFF"/>
+                </a:solidFill>
+                <a:latin typeface="맑은 고딕"/>
+              </a:rPr>
+              <a:t>TCP.NODELAY</a:t>
+            </a:r>
+          </a:p>
+        </p:txBody>
+      </p:sp>
+      <p:sp>
+        <p:nvSpPr>
+          <p:cNvPr id="4" name="TextBox 3"/>
+          <p:cNvSpPr txBox="1"/>
+          <p:nvPr/>
+        </p:nvSpPr>
+        <p:spPr>
+          <a:xfrm>
+            <a:off x="640080" y="1078992"/>
+            <a:ext cx="10881360" cy="457200"/>
+          </a:xfrm>
+          <a:prstGeom prst="rect">
+            <a:avLst/>
+          </a:prstGeom>
+          <a:noFill/>
+        </p:spPr>
+        <p:txBody>
+          <a:bodyPr wrap="square">
+            <a:spAutoFit/>
+          </a:bodyPr>
+          <a:lstStyle/>
+          <a:p>
+            <a:pPr algn="l">
+              <a:spcAft>
+                <a:spcPts val="600"/>
+              </a:spcAft>
+            </a:pPr>
+            <a:r>
+              <a:rPr sz="1500" b="0">
+                <a:solidFill>
+                  <a:srgbClr val="5A6672"/>
+                </a:solidFill>
+                <a:latin typeface="맑은 고딕"/>
+              </a:rPr>
+              <a:t>작은 패킷을 기다리지 않고 보낸다</a:t>
+            </a:r>
+          </a:p>
+        </p:txBody>
+      </p:sp>
+      <p:sp>
+        <p:nvSpPr>
+          <p:cNvPr id="5" name="TextBox 4"/>
+          <p:cNvSpPr txBox="1"/>
+          <p:nvPr/>
+        </p:nvSpPr>
+        <p:spPr>
+          <a:xfrm>
+            <a:off x="640080" y="1737360"/>
+            <a:ext cx="10881360" cy="4754880"/>
+          </a:xfrm>
+          <a:prstGeom prst="rect">
+            <a:avLst/>
+          </a:prstGeom>
+          <a:noFill/>
+        </p:spPr>
+        <p:txBody>
+          <a:bodyPr wrap="square">
+            <a:spAutoFit/>
+          </a:bodyPr>
+          <a:lstStyle/>
+          <a:p>
+            <a:pPr algn="l">
+              <a:spcAft>
+                <a:spcPts val="1000"/>
+              </a:spcAft>
+            </a:pPr>
+            <a:r>
+              <a:rPr sz="1700" b="0">
+                <a:solidFill>
+                  <a:srgbClr val="222222"/>
+                </a:solidFill>
+                <a:latin typeface="맑은 고딕"/>
+              </a:rPr>
+              <a:t>•  Nagle 알고리즘은 작은 패킷을 모아서 송신</a:t>
+            </a:r>
+          </a:p>
+          <a:p>
+            <a:pPr algn="l">
+              <a:spcAft>
+                <a:spcPts val="1000"/>
+              </a:spcAft>
+            </a:pPr>
+            <a:r>
+              <a:rPr sz="1700" b="0">
+                <a:solidFill>
+                  <a:srgbClr val="222222"/>
+                </a:solidFill>
+                <a:latin typeface="맑은 고딕"/>
+              </a:rPr>
+              <a:t>•  sqlnet.ora에 TCP.NODELAY=YES</a:t>
+            </a:r>
+          </a:p>
+          <a:p>
+            <a:pPr algn="l">
+              <a:spcAft>
+                <a:spcPts val="1000"/>
+              </a:spcAft>
+            </a:pPr>
+            <a:r>
+              <a:rPr sz="1700" b="0">
+                <a:solidFill>
+                  <a:srgbClr val="222222"/>
+                </a:solidFill>
+                <a:latin typeface="맑은 고딕"/>
+              </a:rPr>
+              <a:t>•  Primary와 Standby 양쪽에 설정</a:t>
+            </a:r>
+          </a:p>
+          <a:p>
+            <a:pPr algn="l">
+              <a:spcAft>
+                <a:spcPts val="1000"/>
+              </a:spcAft>
+            </a:pPr>
+            <a:r>
+              <a:rPr sz="1700" b="0">
+                <a:solidFill>
+                  <a:srgbClr val="222222"/>
+                </a:solidFill>
+                <a:latin typeface="맑은 고딕"/>
+              </a:rPr>
+              <a:t>•  SYNC 전송에서는 커밋 시간에 직접 영향</a:t>
+            </a:r>
+          </a:p>
+        </p:txBody>
+      </p:sp>
+    </p:spTree>
+  </p:cSld>
+  <p:clrMapOvr>
+    <a:masterClrMapping/>
+  </p:clrMapOvr>
+</p:sld>
+</file>
+
+<file path=ppt/slides/slide38.xml><?xml version="1.0" encoding="utf-8"?>
+<p:sld xmlns:a="http://schemas.openxmlformats.org/drawingml/2006/main" xmlns:p="http://schemas.openxmlformats.org/presentationml/2006/main" xmlns:r="http://schemas.openxmlformats.org/officeDocument/2006/relationships">
+  <p:cSld>
+    <p:spTree>
+      <p:nvGrpSpPr>
+        <p:cNvPr id="1" name=""/>
+        <p:cNvGrpSpPr/>
+        <p:nvPr/>
+      </p:nvGrpSpPr>
+      <p:grpSpPr/>
+      <p:sp>
+        <p:nvSpPr>
+          <p:cNvPr id="2" name="Rectangle 1"/>
+          <p:cNvSpPr/>
+          <p:nvPr/>
+        </p:nvSpPr>
+        <p:spPr>
+          <a:xfrm>
+            <a:off x="0" y="0"/>
+            <a:ext cx="12191695" cy="1005840"/>
+          </a:xfrm>
+          <a:prstGeom prst="rect">
+            <a:avLst/>
+          </a:prstGeom>
+          <a:solidFill>
+            <a:srgbClr val="C0392B"/>
+          </a:solidFill>
+          <a:ln>
+            <a:noFill/>
+          </a:ln>
+          <a:effectLst/>
+        </p:spPr>
+        <p:style>
+          <a:lnRef idx="1">
+            <a:schemeClr val="accent1"/>
+          </a:lnRef>
+          <a:fillRef idx="3">
+            <a:schemeClr val="accent1"/>
+          </a:fillRef>
+          <a:effectRef idx="2">
+            <a:schemeClr val="accent1"/>
+          </a:effectRef>
+          <a:fontRef idx="minor">
+            <a:schemeClr val="lt1"/>
+          </a:fontRef>
+        </p:style>
+        <p:txBody>
+          <a:bodyPr rtlCol="0" anchor="ctr"/>
+          <a:lstStyle/>
+          <a:p>
+            <a:pPr algn="ctr"/>
+          </a:p>
+        </p:txBody>
+      </p:sp>
+      <p:sp>
+        <p:nvSpPr>
+          <p:cNvPr id="3" name="TextBox 2"/>
+          <p:cNvSpPr txBox="1"/>
+          <p:nvPr/>
+        </p:nvSpPr>
+        <p:spPr>
+          <a:xfrm>
+            <a:off x="548640" y="91440"/>
+            <a:ext cx="10972800" cy="777240"/>
+          </a:xfrm>
+          <a:prstGeom prst="rect">
+            <a:avLst/>
+          </a:prstGeom>
+          <a:noFill/>
+        </p:spPr>
+        <p:txBody>
+          <a:bodyPr wrap="square">
+            <a:spAutoFit/>
+          </a:bodyPr>
+          <a:lstStyle/>
+          <a:p>
+            <a:pPr algn="l">
+              <a:spcAft>
+                <a:spcPts val="600"/>
+              </a:spcAft>
+            </a:pPr>
+            <a:r>
+              <a:rPr sz="2600" b="1">
+                <a:solidFill>
+                  <a:srgbClr val="FFFFFF"/>
+                </a:solidFill>
+                <a:latin typeface="맑은 고딕"/>
+              </a:rPr>
+              <a:t>조정 전후를 같은 조건에서</a:t>
+            </a:r>
+          </a:p>
+        </p:txBody>
+      </p:sp>
+      <p:sp>
+        <p:nvSpPr>
+          <p:cNvPr id="4" name="TextBox 3"/>
+          <p:cNvSpPr txBox="1"/>
+          <p:nvPr/>
+        </p:nvSpPr>
+        <p:spPr>
+          <a:xfrm>
+            <a:off x="640080" y="1078992"/>
+            <a:ext cx="10881360" cy="457200"/>
+          </a:xfrm>
+          <a:prstGeom prst="rect">
+            <a:avLst/>
+          </a:prstGeom>
+          <a:noFill/>
+        </p:spPr>
+        <p:txBody>
+          <a:bodyPr wrap="square">
+            <a:spAutoFit/>
+          </a:bodyPr>
+          <a:lstStyle/>
+          <a:p>
+            <a:pPr algn="l">
+              <a:spcAft>
+                <a:spcPts val="600"/>
+              </a:spcAft>
+            </a:pPr>
+            <a:r>
+              <a:rPr sz="1500" b="0">
+                <a:solidFill>
+                  <a:srgbClr val="5A6672"/>
+                </a:solidFill>
+                <a:latin typeface="맑은 고딕"/>
+              </a:rPr>
+              <a:t>숫자로 효과를 확인한다</a:t>
+            </a:r>
+          </a:p>
+        </p:txBody>
+      </p:sp>
+      <p:sp>
+        <p:nvSpPr>
+          <p:cNvPr id="5" name="TextBox 4"/>
+          <p:cNvSpPr txBox="1"/>
+          <p:nvPr/>
+        </p:nvSpPr>
+        <p:spPr>
+          <a:xfrm>
+            <a:off x="640080" y="1737360"/>
+            <a:ext cx="10881360" cy="4754880"/>
+          </a:xfrm>
+          <a:prstGeom prst="rect">
+            <a:avLst/>
+          </a:prstGeom>
+          <a:noFill/>
+        </p:spPr>
+        <p:txBody>
+          <a:bodyPr wrap="square">
+            <a:spAutoFit/>
+          </a:bodyPr>
+          <a:lstStyle/>
+          <a:p>
+            <a:pPr algn="l">
+              <a:spcAft>
+                <a:spcPts val="1000"/>
+              </a:spcAft>
+            </a:pPr>
+            <a:r>
+              <a:rPr sz="1700" b="0">
+                <a:solidFill>
+                  <a:srgbClr val="222222"/>
+                </a:solidFill>
+                <a:latin typeface="맑은 고딕"/>
+              </a:rPr>
+              <a:t>•  대역폭과 왕복 지연을 먼저 측정해 BDP 계산</a:t>
+            </a:r>
+          </a:p>
+          <a:p>
+            <a:pPr algn="l">
+              <a:spcAft>
+                <a:spcPts val="1000"/>
+              </a:spcAft>
+            </a:pPr>
+            <a:r>
+              <a:rPr sz="1700" b="0">
+                <a:solidFill>
+                  <a:srgbClr val="222222"/>
+                </a:solidFill>
+                <a:latin typeface="맑은 고딕"/>
+              </a:rPr>
+              <a:t>•  같은 부하에서 transport lag와 전송 속도 기록</a:t>
+            </a:r>
+          </a:p>
+          <a:p>
+            <a:pPr algn="l">
+              <a:spcAft>
+                <a:spcPts val="1000"/>
+              </a:spcAft>
+            </a:pPr>
+            <a:r>
+              <a:rPr sz="1700" b="0">
+                <a:solidFill>
+                  <a:srgbClr val="222222"/>
+                </a:solidFill>
+                <a:latin typeface="맑은 고딕"/>
+              </a:rPr>
+              <a:t>•  SDU, 버퍼, 커널, NODELAY를 양쪽에 한 번에</a:t>
+            </a:r>
+          </a:p>
+          <a:p>
+            <a:pPr algn="l">
+              <a:spcAft>
+                <a:spcPts val="1000"/>
+              </a:spcAft>
+            </a:pPr>
+            <a:r>
+              <a:rPr sz="1700" b="0">
+                <a:solidFill>
+                  <a:srgbClr val="222222"/>
+                </a:solidFill>
+                <a:latin typeface="맑은 고딕"/>
+              </a:rPr>
+              <a:t>•  교재 listener.ora 예의 SEND_SDU는 SEND_BUF_SIZE로 읽음</a:t>
+            </a:r>
+          </a:p>
+        </p:txBody>
+      </p:sp>
+    </p:spTree>
+  </p:cSld>
+  <p:clrMapOvr>
+    <a:masterClrMapping/>
+  </p:clrMapOvr>
+</p:sld>
+</file>
+
+<file path=ppt/slides/slide39.xml><?xml version="1.0" encoding="utf-8"?>
+<p:sld xmlns:a="http://schemas.openxmlformats.org/drawingml/2006/main" xmlns:p="http://schemas.openxmlformats.org/presentationml/2006/main" xmlns:r="http://schemas.openxmlformats.org/officeDocument/2006/relationships">
+  <p:cSld>
+    <p:spTree>
+      <p:nvGrpSpPr>
+        <p:cNvPr id="1" name=""/>
+        <p:cNvGrpSpPr/>
+        <p:nvPr/>
+      </p:nvGrpSpPr>
+      <p:grpSpPr/>
+      <p:sp>
+        <p:nvSpPr>
+          <p:cNvPr id="2" name="Rectangle 1"/>
+          <p:cNvSpPr/>
+          <p:nvPr/>
+        </p:nvSpPr>
+        <p:spPr>
+          <a:xfrm>
+            <a:off x="0" y="0"/>
+            <a:ext cx="12191695" cy="6858000"/>
+          </a:xfrm>
+          <a:prstGeom prst="rect">
+            <a:avLst/>
+          </a:prstGeom>
+          <a:solidFill>
+            <a:srgbClr val="C0392B"/>
+          </a:solidFill>
+          <a:ln>
+            <a:noFill/>
+          </a:ln>
+          <a:effectLst/>
+        </p:spPr>
+        <p:style>
+          <a:lnRef idx="1">
+            <a:schemeClr val="accent1"/>
+          </a:lnRef>
+          <a:fillRef idx="3">
+            <a:schemeClr val="accent1"/>
+          </a:fillRef>
+          <a:effectRef idx="2">
+            <a:schemeClr val="accent1"/>
+          </a:effectRef>
+          <a:fontRef idx="minor">
+            <a:schemeClr val="lt1"/>
+          </a:fontRef>
+        </p:style>
+        <p:txBody>
+          <a:bodyPr rtlCol="0" anchor="ctr"/>
+          <a:lstStyle/>
+          <a:p>
+            <a:pPr algn="ctr"/>
+          </a:p>
+        </p:txBody>
+      </p:sp>
+      <p:sp>
+        <p:nvSpPr>
+          <p:cNvPr id="3" name="TextBox 2"/>
+          <p:cNvSpPr txBox="1"/>
+          <p:nvPr/>
+        </p:nvSpPr>
+        <p:spPr>
+          <a:xfrm>
+            <a:off x="822960" y="2011680"/>
+            <a:ext cx="10515600" cy="1097280"/>
+          </a:xfrm>
+          <a:prstGeom prst="rect">
+            <a:avLst/>
+          </a:prstGeom>
+          <a:noFill/>
+        </p:spPr>
+        <p:txBody>
+          <a:bodyPr wrap="square">
+            <a:spAutoFit/>
+          </a:bodyPr>
+          <a:lstStyle/>
+          <a:p>
+            <a:pPr algn="l">
+              <a:spcAft>
+                <a:spcPts val="600"/>
+              </a:spcAft>
+            </a:pPr>
+            <a:r>
+              <a:rPr sz="4000" b="1">
+                <a:solidFill>
+                  <a:srgbClr val="FFFFFF"/>
+                </a:solidFill>
+                <a:latin typeface="맑은 고딕"/>
+              </a:rPr>
+              <a:t>3.8</a:t>
+            </a:r>
+          </a:p>
+        </p:txBody>
+      </p:sp>
+      <p:sp>
+        <p:nvSpPr>
+          <p:cNvPr id="4" name="TextBox 3"/>
+          <p:cNvSpPr txBox="1"/>
+          <p:nvPr/>
+        </p:nvSpPr>
+        <p:spPr>
+          <a:xfrm>
+            <a:off x="822960" y="3017520"/>
+            <a:ext cx="10515600" cy="914400"/>
+          </a:xfrm>
+          <a:prstGeom prst="rect">
+            <a:avLst/>
+          </a:prstGeom>
+          <a:noFill/>
+        </p:spPr>
+        <p:txBody>
+          <a:bodyPr wrap="square">
+            <a:spAutoFit/>
+          </a:bodyPr>
+          <a:lstStyle/>
+          <a:p>
+            <a:pPr algn="l">
+              <a:spcAft>
+                <a:spcPts val="600"/>
+              </a:spcAft>
+            </a:pPr>
+            <a:r>
+              <a:rPr sz="2800" b="1">
+                <a:solidFill>
+                  <a:srgbClr val="FFFFFF"/>
+                </a:solidFill>
+                <a:latin typeface="맑은 고딕"/>
+              </a:rPr>
+              <a:t>연결 검증과 오류 진단</a:t>
+            </a:r>
+          </a:p>
+        </p:txBody>
+      </p:sp>
+      <p:sp>
+        <p:nvSpPr>
+          <p:cNvPr id="5" name="Rectangle 4"/>
+          <p:cNvSpPr/>
+          <p:nvPr/>
+        </p:nvSpPr>
+        <p:spPr>
+          <a:xfrm>
+            <a:off x="822960" y="4114800"/>
+            <a:ext cx="5486400" cy="54864"/>
+          </a:xfrm>
+          <a:prstGeom prst="rect">
+            <a:avLst/>
+          </a:prstGeom>
+          <a:solidFill>
+            <a:srgbClr val="FFFFFF"/>
+          </a:solidFill>
+          <a:ln>
+            <a:noFill/>
+          </a:ln>
+          <a:effectLst/>
+        </p:spPr>
+        <p:style>
+          <a:lnRef idx="1">
+            <a:schemeClr val="accent1"/>
+          </a:lnRef>
+          <a:fillRef idx="3">
+            <a:schemeClr val="accent1"/>
+          </a:fillRef>
+          <a:effectRef idx="2">
+            <a:schemeClr val="accent1"/>
+          </a:effectRef>
+          <a:fontRef idx="minor">
+            <a:schemeClr val="lt1"/>
+          </a:fontRef>
+        </p:style>
+        <p:txBody>
+          <a:bodyPr rtlCol="0" anchor="ctr"/>
+          <a:lstStyle/>
+          <a:p>
+            <a:pPr algn="ctr"/>
+          </a:p>
+        </p:txBody>
+      </p:sp>
+      <p:sp>
+        <p:nvSpPr>
+          <p:cNvPr id="6" name="TextBox 5"/>
+          <p:cNvSpPr txBox="1"/>
+          <p:nvPr/>
+        </p:nvSpPr>
+        <p:spPr>
+          <a:xfrm>
+            <a:off x="822960" y="4297680"/>
+            <a:ext cx="10058400" cy="2011680"/>
+          </a:xfrm>
+          <a:prstGeom prst="rect">
+            <a:avLst/>
+          </a:prstGeom>
+          <a:noFill/>
+        </p:spPr>
+        <p:txBody>
+          <a:bodyPr wrap="square">
+            <a:spAutoFit/>
+          </a:bodyPr>
+          <a:lstStyle/>
+          <a:p>
+            <a:pPr algn="l">
+              <a:spcAft>
+                <a:spcPts val="800"/>
+              </a:spcAft>
+            </a:pPr>
+            <a:r>
               <a:rPr sz="1600" b="0">
                 <a:solidFill>
-                  <a:srgbClr val="222222"/>
-                </a:solidFill>
-                <a:latin typeface="맑은 고딕"/>
-              </a:rPr>
-              <a:t>•  실습 01 — tnsnames 구성과 검증: 네 별칭을 양방향으로 tnsping. 없는 별칭으로 TNS-03505 재현.</a:t>
-            </a:r>
-          </a:p>
-          <a:p>
-            <a:pPr algn="l">
-              <a:spcAft>
-                <a:spcPts val="1000"/>
+                  <a:srgbClr val="FFFFFF"/>
+                </a:solidFill>
+                <a:latin typeface="맑은 고딕"/>
+              </a:rPr>
+              <a:t>•  계층별 검증 순서</a:t>
+            </a:r>
+          </a:p>
+          <a:p>
+            <a:pPr algn="l">
+              <a:spcAft>
+                <a:spcPts val="800"/>
               </a:spcAft>
             </a:pPr>
             <a:r>
               <a:rPr sz="1600" b="0">
                 <a:solidFill>
-                  <a:srgbClr val="222222"/>
-                </a:solidFill>
-                <a:latin typeface="맑은 고딕"/>
-              </a:rPr>
-              <a:t>•  실습 02 — listener.ora 정적 등록: SID_DESC 세 요소 확인, Services Summary와 status 읽기. ORA-01034 재현.</a:t>
-            </a:r>
-          </a:p>
-          <a:p>
-            <a:pPr algn="l">
-              <a:spcAft>
-                <a:spcPts val="1000"/>
+                  <a:srgbClr val="FFFFFF"/>
+                </a:solidFill>
+                <a:latin typeface="맑은 고딕"/>
+              </a:rPr>
+              <a:t>•  오류 코드 지도</a:t>
+            </a:r>
+          </a:p>
+          <a:p>
+            <a:pPr algn="l">
+              <a:spcAft>
+                <a:spcPts val="800"/>
               </a:spcAft>
             </a:pPr>
             <a:r>
               <a:rPr sz="1600" b="0">
                 <a:solidFill>
-                  <a:srgbClr val="222222"/>
-                </a:solidFill>
-                <a:latin typeface="맑은 고딕"/>
-              </a:rPr>
-              <a:t>•  실습 03 — 정적 등록 제거와 복원: ORA-12514 → ORA-12528(BLOCKED) → 복원 후 NOMOUNT 접속 성공.</a:t>
-            </a:r>
-          </a:p>
-          <a:p>
-            <a:pPr algn="l">
-              <a:spcAft>
-                <a:spcPts val="1000"/>
-              </a:spcAft>
-            </a:pPr>
-            <a:r>
-              <a:rPr sz="1600" b="0">
-                <a:solidFill>
-                  <a:srgbClr val="222222"/>
-                </a:solidFill>
-                <a:latin typeface="맑은 고딕"/>
-              </a:rPr>
-              <a:t>•  실습 04 — DG_CONFIG 설정과 누락: 비워도 전송이 계속되는 것을 확인하고, 그럼에도 비우면 안 되는 이유를 정리.</a:t>
-            </a:r>
-          </a:p>
-          <a:p>
-            <a:pPr algn="l">
-              <a:spcAft>
-                <a:spcPts val="1000"/>
-              </a:spcAft>
-            </a:pPr>
-            <a:r>
-              <a:rPr sz="1600" b="0">
-                <a:solidFill>
-                  <a:srgbClr val="222222"/>
-                </a:solidFill>
-                <a:latin typeface="맑은 고딕"/>
-              </a:rPr>
-              <a:t>•  실습 05 — 패스워드 파일 불일치: OPW-00029 → ORA-01017 → ORA-16191 → 복원 → DEFER/ENABLE.</a:t>
-            </a:r>
-          </a:p>
-          <a:p>
-            <a:pPr algn="l">
-              <a:spcAft>
-                <a:spcPts val="1000"/>
-              </a:spcAft>
-            </a:pPr>
-            <a:r>
-              <a:rPr sz="1600" b="0">
-                <a:solidFill>
-                  <a:srgbClr val="222222"/>
-                </a:solidFill>
-                <a:latin typeface="맑은 고딕"/>
-              </a:rPr>
-              <a:t>•  실습 06 — 포트 차단과 해소: iptables로 TNS-12535 재현, 규칙 제거 후 상태 회복. 계층 지도 완성.</a:t>
-            </a:r>
-          </a:p>
-          <a:p>
-            <a:pPr algn="l">
-              <a:spcAft>
-                <a:spcPts val="1000"/>
-              </a:spcAft>
-            </a:pPr>
-            <a:r>
-              <a:rPr sz="1600" b="0">
-                <a:solidFill>
-                  <a:srgbClr val="222222"/>
-                </a:solidFill>
-                <a:latin typeface="맑은 고딕"/>
-              </a:rPr>
-              <a:t>•  실습 03·05·06은 설정 파일과 방화벽을 실제로 건드린다. 각 실습 끝에서 반드시 원복한다.</a:t>
+                  <a:srgbClr val="FFFFFF"/>
+                </a:solidFill>
+                <a:latin typeface="맑은 고딕"/>
+              </a:rPr>
+              <a:t>•  Data Guard 쪽 확인</a:t>
             </a:r>
           </a:p>
         </p:txBody>
@@ -12606,7 +13862,7 @@
                 </a:solidFill>
                 <a:latin typeface="맑은 고딕"/>
               </a:rPr>
-              <a:t>Data Guard가 Oracle Net에 요구하는 것</a:t>
+              <a:t>Data Guard에서 Oracle Net이 쓰이는 곳</a:t>
             </a:r>
           </a:p>
         </p:txBody>
@@ -12689,7 +13945,7 @@
                 </a:solidFill>
                 <a:latin typeface="맑은 고딕"/>
               </a:rPr>
-              <a:t>•  NOMOUNT 상태 원격 접속</a:t>
+              <a:t>•  데이터베이스가 클라이언트가 되는 구조</a:t>
             </a:r>
           </a:p>
           <a:p>
@@ -12705,7 +13961,7 @@
                 </a:solidFill>
                 <a:latin typeface="맑은 고딕"/>
               </a:rPr>
-              <a:t>•  양쪽의 SYS 인증</a:t>
+              <a:t>•  Oracle Net을 쓰는 여섯 경로</a:t>
             </a:r>
           </a:p>
           <a:p>
@@ -12721,7 +13977,2236 @@
                 </a:solidFill>
                 <a:latin typeface="맑은 고딕"/>
               </a:rPr>
-              <a:t>•  구성원의 파라미터 선언</a:t>
+              <a:t>•  양방향 대칭 구성</a:t>
+            </a:r>
+          </a:p>
+        </p:txBody>
+      </p:sp>
+    </p:spTree>
+  </p:cSld>
+  <p:clrMapOvr>
+    <a:masterClrMapping/>
+  </p:clrMapOvr>
+</p:sld>
+</file>
+
+<file path=ppt/slides/slide40.xml><?xml version="1.0" encoding="utf-8"?>
+<p:sld xmlns:a="http://schemas.openxmlformats.org/drawingml/2006/main" xmlns:p="http://schemas.openxmlformats.org/presentationml/2006/main" xmlns:r="http://schemas.openxmlformats.org/officeDocument/2006/relationships">
+  <p:cSld>
+    <p:spTree>
+      <p:nvGrpSpPr>
+        <p:cNvPr id="1" name=""/>
+        <p:cNvGrpSpPr/>
+        <p:nvPr/>
+      </p:nvGrpSpPr>
+      <p:grpSpPr/>
+      <p:sp>
+        <p:nvSpPr>
+          <p:cNvPr id="2" name="Rectangle 1"/>
+          <p:cNvSpPr/>
+          <p:nvPr/>
+        </p:nvSpPr>
+        <p:spPr>
+          <a:xfrm>
+            <a:off x="0" y="0"/>
+            <a:ext cx="12191695" cy="1005840"/>
+          </a:xfrm>
+          <a:prstGeom prst="rect">
+            <a:avLst/>
+          </a:prstGeom>
+          <a:solidFill>
+            <a:srgbClr val="C0392B"/>
+          </a:solidFill>
+          <a:ln>
+            <a:noFill/>
+          </a:ln>
+          <a:effectLst/>
+        </p:spPr>
+        <p:style>
+          <a:lnRef idx="1">
+            <a:schemeClr val="accent1"/>
+          </a:lnRef>
+          <a:fillRef idx="3">
+            <a:schemeClr val="accent1"/>
+          </a:fillRef>
+          <a:effectRef idx="2">
+            <a:schemeClr val="accent1"/>
+          </a:effectRef>
+          <a:fontRef idx="minor">
+            <a:schemeClr val="lt1"/>
+          </a:fontRef>
+        </p:style>
+        <p:txBody>
+          <a:bodyPr rtlCol="0" anchor="ctr"/>
+          <a:lstStyle/>
+          <a:p>
+            <a:pPr algn="ctr"/>
+          </a:p>
+        </p:txBody>
+      </p:sp>
+      <p:sp>
+        <p:nvSpPr>
+          <p:cNvPr id="3" name="TextBox 2"/>
+          <p:cNvSpPr txBox="1"/>
+          <p:nvPr/>
+        </p:nvSpPr>
+        <p:spPr>
+          <a:xfrm>
+            <a:off x="548640" y="91440"/>
+            <a:ext cx="10972800" cy="777240"/>
+          </a:xfrm>
+          <a:prstGeom prst="rect">
+            <a:avLst/>
+          </a:prstGeom>
+          <a:noFill/>
+        </p:spPr>
+        <p:txBody>
+          <a:bodyPr wrap="square">
+            <a:spAutoFit/>
+          </a:bodyPr>
+          <a:lstStyle/>
+          <a:p>
+            <a:pPr algn="l">
+              <a:spcAft>
+                <a:spcPts val="600"/>
+              </a:spcAft>
+            </a:pPr>
+            <a:r>
+              <a:rPr sz="2600" b="1">
+                <a:solidFill>
+                  <a:srgbClr val="FFFFFF"/>
+                </a:solidFill>
+                <a:latin typeface="맑은 고딕"/>
+              </a:rPr>
+              <a:t>계층별 검증 순서</a:t>
+            </a:r>
+          </a:p>
+        </p:txBody>
+      </p:sp>
+      <p:sp>
+        <p:nvSpPr>
+          <p:cNvPr id="4" name="TextBox 3"/>
+          <p:cNvSpPr txBox="1"/>
+          <p:nvPr/>
+        </p:nvSpPr>
+        <p:spPr>
+          <a:xfrm>
+            <a:off x="640080" y="1078992"/>
+            <a:ext cx="10881360" cy="457200"/>
+          </a:xfrm>
+          <a:prstGeom prst="rect">
+            <a:avLst/>
+          </a:prstGeom>
+          <a:noFill/>
+        </p:spPr>
+        <p:txBody>
+          <a:bodyPr wrap="square">
+            <a:spAutoFit/>
+          </a:bodyPr>
+          <a:lstStyle/>
+          <a:p>
+            <a:pPr algn="l">
+              <a:spcAft>
+                <a:spcPts val="600"/>
+              </a:spcAft>
+            </a:pPr>
+            <a:r>
+              <a:rPr sz="1500" b="0">
+                <a:solidFill>
+                  <a:srgbClr val="5A6672"/>
+                </a:solidFill>
+                <a:latin typeface="맑은 고딕"/>
+              </a:rPr>
+              <a:t>아래층부터 올라간다</a:t>
+            </a:r>
+          </a:p>
+        </p:txBody>
+      </p:sp>
+      <p:sp>
+        <p:nvSpPr>
+          <p:cNvPr id="5" name="TextBox 4"/>
+          <p:cNvSpPr txBox="1"/>
+          <p:nvPr/>
+        </p:nvSpPr>
+        <p:spPr>
+          <a:xfrm>
+            <a:off x="640080" y="1737360"/>
+            <a:ext cx="10881360" cy="4754880"/>
+          </a:xfrm>
+          <a:prstGeom prst="rect">
+            <a:avLst/>
+          </a:prstGeom>
+          <a:noFill/>
+        </p:spPr>
+        <p:txBody>
+          <a:bodyPr wrap="square">
+            <a:spAutoFit/>
+          </a:bodyPr>
+          <a:lstStyle/>
+          <a:p>
+            <a:pPr algn="l">
+              <a:spcAft>
+                <a:spcPts val="1000"/>
+              </a:spcAft>
+            </a:pPr>
+            <a:r>
+              <a:rPr sz="1700" b="0">
+                <a:solidFill>
+                  <a:srgbClr val="222222"/>
+                </a:solidFill>
+                <a:latin typeface="맑은 고딕"/>
+              </a:rPr>
+              <a:t>•  1 tnsping: 이름 해석과 리스너 응답</a:t>
+            </a:r>
+          </a:p>
+          <a:p>
+            <a:pPr algn="l">
+              <a:spcAft>
+                <a:spcPts val="1000"/>
+              </a:spcAft>
+            </a:pPr>
+            <a:r>
+              <a:rPr sz="1700" b="0">
+                <a:solidFill>
+                  <a:srgbClr val="222222"/>
+                </a:solidFill>
+                <a:latin typeface="맑은 고딕"/>
+              </a:rPr>
+              <a:t>•  2 lsnrctl status: 서비스 이름과 상태</a:t>
+            </a:r>
+          </a:p>
+          <a:p>
+            <a:pPr algn="l">
+              <a:spcAft>
+                <a:spcPts val="1000"/>
+              </a:spcAft>
+            </a:pPr>
+            <a:r>
+              <a:rPr sz="1700" b="0">
+                <a:solidFill>
+                  <a:srgbClr val="222222"/>
+                </a:solidFill>
+                <a:latin typeface="맑은 고딕"/>
+              </a:rPr>
+              <a:t>•  3 sqlplus sys@별칭 as sysdba: 인스턴스와 인증</a:t>
+            </a:r>
+          </a:p>
+          <a:p>
+            <a:pPr algn="l">
+              <a:spcAft>
+                <a:spcPts val="1000"/>
+              </a:spcAft>
+            </a:pPr>
+            <a:r>
+              <a:rPr sz="1700" b="0">
+                <a:solidFill>
+                  <a:srgbClr val="222222"/>
+                </a:solidFill>
+                <a:latin typeface="맑은 고딕"/>
+              </a:rPr>
+              <a:t>•  4 DG_CONFIG, 5 V$ARCHIVE_DEST_STATUS</a:t>
+            </a:r>
+          </a:p>
+          <a:p>
+            <a:pPr algn="l">
+              <a:spcAft>
+                <a:spcPts val="1000"/>
+              </a:spcAft>
+            </a:pPr>
+            <a:r>
+              <a:rPr sz="1700" b="0">
+                <a:solidFill>
+                  <a:srgbClr val="222222"/>
+                </a:solidFill>
+                <a:latin typeface="맑은 고딕"/>
+              </a:rPr>
+              <a:t>•  모든 단계를 양방향으로</a:t>
+            </a:r>
+          </a:p>
+        </p:txBody>
+      </p:sp>
+    </p:spTree>
+  </p:cSld>
+  <p:clrMapOvr>
+    <a:masterClrMapping/>
+  </p:clrMapOvr>
+</p:sld>
+</file>
+
+<file path=ppt/slides/slide41.xml><?xml version="1.0" encoding="utf-8"?>
+<p:sld xmlns:a="http://schemas.openxmlformats.org/drawingml/2006/main" xmlns:p="http://schemas.openxmlformats.org/presentationml/2006/main" xmlns:r="http://schemas.openxmlformats.org/officeDocument/2006/relationships">
+  <p:cSld>
+    <p:spTree>
+      <p:nvGrpSpPr>
+        <p:cNvPr id="1" name=""/>
+        <p:cNvGrpSpPr/>
+        <p:nvPr/>
+      </p:nvGrpSpPr>
+      <p:grpSpPr/>
+      <p:sp>
+        <p:nvSpPr>
+          <p:cNvPr id="2" name="Rectangle 1"/>
+          <p:cNvSpPr/>
+          <p:nvPr/>
+        </p:nvSpPr>
+        <p:spPr>
+          <a:xfrm>
+            <a:off x="0" y="0"/>
+            <a:ext cx="12191695" cy="1005840"/>
+          </a:xfrm>
+          <a:prstGeom prst="rect">
+            <a:avLst/>
+          </a:prstGeom>
+          <a:solidFill>
+            <a:srgbClr val="C0392B"/>
+          </a:solidFill>
+          <a:ln>
+            <a:noFill/>
+          </a:ln>
+          <a:effectLst/>
+        </p:spPr>
+        <p:style>
+          <a:lnRef idx="1">
+            <a:schemeClr val="accent1"/>
+          </a:lnRef>
+          <a:fillRef idx="3">
+            <a:schemeClr val="accent1"/>
+          </a:fillRef>
+          <a:effectRef idx="2">
+            <a:schemeClr val="accent1"/>
+          </a:effectRef>
+          <a:fontRef idx="minor">
+            <a:schemeClr val="lt1"/>
+          </a:fontRef>
+        </p:style>
+        <p:txBody>
+          <a:bodyPr rtlCol="0" anchor="ctr"/>
+          <a:lstStyle/>
+          <a:p>
+            <a:pPr algn="ctr"/>
+          </a:p>
+        </p:txBody>
+      </p:sp>
+      <p:sp>
+        <p:nvSpPr>
+          <p:cNvPr id="3" name="TextBox 2"/>
+          <p:cNvSpPr txBox="1"/>
+          <p:nvPr/>
+        </p:nvSpPr>
+        <p:spPr>
+          <a:xfrm>
+            <a:off x="548640" y="91440"/>
+            <a:ext cx="10972800" cy="777240"/>
+          </a:xfrm>
+          <a:prstGeom prst="rect">
+            <a:avLst/>
+          </a:prstGeom>
+          <a:noFill/>
+        </p:spPr>
+        <p:txBody>
+          <a:bodyPr wrap="square">
+            <a:spAutoFit/>
+          </a:bodyPr>
+          <a:lstStyle/>
+          <a:p>
+            <a:pPr algn="l">
+              <a:spcAft>
+                <a:spcPts val="600"/>
+              </a:spcAft>
+            </a:pPr>
+            <a:r>
+              <a:rPr sz="2600" b="1">
+                <a:solidFill>
+                  <a:srgbClr val="FFFFFF"/>
+                </a:solidFill>
+                <a:latin typeface="맑은 고딕"/>
+              </a:rPr>
+              <a:t>오류 코드 지도 (1)</a:t>
+            </a:r>
+          </a:p>
+        </p:txBody>
+      </p:sp>
+      <p:sp>
+        <p:nvSpPr>
+          <p:cNvPr id="4" name="TextBox 3"/>
+          <p:cNvSpPr txBox="1"/>
+          <p:nvPr/>
+        </p:nvSpPr>
+        <p:spPr>
+          <a:xfrm>
+            <a:off x="640080" y="1078992"/>
+            <a:ext cx="10881360" cy="457200"/>
+          </a:xfrm>
+          <a:prstGeom prst="rect">
+            <a:avLst/>
+          </a:prstGeom>
+          <a:noFill/>
+        </p:spPr>
+        <p:txBody>
+          <a:bodyPr wrap="square">
+            <a:spAutoFit/>
+          </a:bodyPr>
+          <a:lstStyle/>
+          <a:p>
+            <a:pPr algn="l">
+              <a:spcAft>
+                <a:spcPts val="600"/>
+              </a:spcAft>
+            </a:pPr>
+            <a:r>
+              <a:rPr sz="1500" b="0">
+                <a:solidFill>
+                  <a:srgbClr val="5A6672"/>
+                </a:solidFill>
+                <a:latin typeface="맑은 고딕"/>
+              </a:rPr>
+              <a:t>이름, 네트워크, 리스너</a:t>
+            </a:r>
+          </a:p>
+        </p:txBody>
+      </p:sp>
+      <p:sp>
+        <p:nvSpPr>
+          <p:cNvPr id="5" name="TextBox 4"/>
+          <p:cNvSpPr txBox="1"/>
+          <p:nvPr/>
+        </p:nvSpPr>
+        <p:spPr>
+          <a:xfrm>
+            <a:off x="640080" y="1737360"/>
+            <a:ext cx="10881360" cy="4754880"/>
+          </a:xfrm>
+          <a:prstGeom prst="rect">
+            <a:avLst/>
+          </a:prstGeom>
+          <a:noFill/>
+        </p:spPr>
+        <p:txBody>
+          <a:bodyPr wrap="square">
+            <a:spAutoFit/>
+          </a:bodyPr>
+          <a:lstStyle/>
+          <a:p>
+            <a:pPr algn="l">
+              <a:spcAft>
+                <a:spcPts val="1000"/>
+              </a:spcAft>
+            </a:pPr>
+            <a:r>
+              <a:rPr sz="1700" b="0">
+                <a:solidFill>
+                  <a:srgbClr val="222222"/>
+                </a:solidFill>
+                <a:latin typeface="맑은 고딕"/>
+              </a:rPr>
+              <a:t>•  ORA-12154, TNS-03505: 별칭을 풀지 못함</a:t>
+            </a:r>
+          </a:p>
+          <a:p>
+            <a:pPr algn="l">
+              <a:spcAft>
+                <a:spcPts val="1000"/>
+              </a:spcAft>
+            </a:pPr>
+            <a:r>
+              <a:rPr sz="1700" b="0">
+                <a:solidFill>
+                  <a:srgbClr val="222222"/>
+                </a:solidFill>
+                <a:latin typeface="맑은 고딕"/>
+              </a:rPr>
+              <a:t>•  ORA-12170, TNS-12535: 응답 없이 시간 초과</a:t>
+            </a:r>
+          </a:p>
+          <a:p>
+            <a:pPr algn="l">
+              <a:spcAft>
+                <a:spcPts val="1000"/>
+              </a:spcAft>
+            </a:pPr>
+            <a:r>
+              <a:rPr sz="1700" b="0">
+                <a:solidFill>
+                  <a:srgbClr val="222222"/>
+                </a:solidFill>
+                <a:latin typeface="맑은 고딕"/>
+              </a:rPr>
+              <a:t>•  ORA-12541: 리스너 없음, 즉시 거부</a:t>
+            </a:r>
+          </a:p>
+          <a:p>
+            <a:pPr algn="l">
+              <a:spcAft>
+                <a:spcPts val="1000"/>
+              </a:spcAft>
+            </a:pPr>
+            <a:r>
+              <a:rPr sz="1700" b="0">
+                <a:solidFill>
+                  <a:srgbClr val="222222"/>
+                </a:solidFill>
+                <a:latin typeface="맑은 고딕"/>
+              </a:rPr>
+              <a:t>•  ORA-12514: 서비스를 모름</a:t>
+            </a:r>
+          </a:p>
+          <a:p>
+            <a:pPr algn="l">
+              <a:spcAft>
+                <a:spcPts val="1000"/>
+              </a:spcAft>
+            </a:pPr>
+            <a:r>
+              <a:rPr sz="1700" b="0">
+                <a:solidFill>
+                  <a:srgbClr val="222222"/>
+                </a:solidFill>
+                <a:latin typeface="맑은 고딕"/>
+              </a:rPr>
+              <a:t>•  ORA-12528: 인스턴스가 막음(BLOCKED)</a:t>
+            </a:r>
+          </a:p>
+        </p:txBody>
+      </p:sp>
+    </p:spTree>
+  </p:cSld>
+  <p:clrMapOvr>
+    <a:masterClrMapping/>
+  </p:clrMapOvr>
+</p:sld>
+</file>
+
+<file path=ppt/slides/slide42.xml><?xml version="1.0" encoding="utf-8"?>
+<p:sld xmlns:a="http://schemas.openxmlformats.org/drawingml/2006/main" xmlns:p="http://schemas.openxmlformats.org/presentationml/2006/main" xmlns:r="http://schemas.openxmlformats.org/officeDocument/2006/relationships">
+  <p:cSld>
+    <p:spTree>
+      <p:nvGrpSpPr>
+        <p:cNvPr id="1" name=""/>
+        <p:cNvGrpSpPr/>
+        <p:nvPr/>
+      </p:nvGrpSpPr>
+      <p:grpSpPr/>
+      <p:sp>
+        <p:nvSpPr>
+          <p:cNvPr id="2" name="Rectangle 1"/>
+          <p:cNvSpPr/>
+          <p:nvPr/>
+        </p:nvSpPr>
+        <p:spPr>
+          <a:xfrm>
+            <a:off x="0" y="0"/>
+            <a:ext cx="12191695" cy="1005840"/>
+          </a:xfrm>
+          <a:prstGeom prst="rect">
+            <a:avLst/>
+          </a:prstGeom>
+          <a:solidFill>
+            <a:srgbClr val="C0392B"/>
+          </a:solidFill>
+          <a:ln>
+            <a:noFill/>
+          </a:ln>
+          <a:effectLst/>
+        </p:spPr>
+        <p:style>
+          <a:lnRef idx="1">
+            <a:schemeClr val="accent1"/>
+          </a:lnRef>
+          <a:fillRef idx="3">
+            <a:schemeClr val="accent1"/>
+          </a:fillRef>
+          <a:effectRef idx="2">
+            <a:schemeClr val="accent1"/>
+          </a:effectRef>
+          <a:fontRef idx="minor">
+            <a:schemeClr val="lt1"/>
+          </a:fontRef>
+        </p:style>
+        <p:txBody>
+          <a:bodyPr rtlCol="0" anchor="ctr"/>
+          <a:lstStyle/>
+          <a:p>
+            <a:pPr algn="ctr"/>
+          </a:p>
+        </p:txBody>
+      </p:sp>
+      <p:sp>
+        <p:nvSpPr>
+          <p:cNvPr id="3" name="TextBox 2"/>
+          <p:cNvSpPr txBox="1"/>
+          <p:nvPr/>
+        </p:nvSpPr>
+        <p:spPr>
+          <a:xfrm>
+            <a:off x="548640" y="91440"/>
+            <a:ext cx="10972800" cy="777240"/>
+          </a:xfrm>
+          <a:prstGeom prst="rect">
+            <a:avLst/>
+          </a:prstGeom>
+          <a:noFill/>
+        </p:spPr>
+        <p:txBody>
+          <a:bodyPr wrap="square">
+            <a:spAutoFit/>
+          </a:bodyPr>
+          <a:lstStyle/>
+          <a:p>
+            <a:pPr algn="l">
+              <a:spcAft>
+                <a:spcPts val="600"/>
+              </a:spcAft>
+            </a:pPr>
+            <a:r>
+              <a:rPr sz="2600" b="1">
+                <a:solidFill>
+                  <a:srgbClr val="FFFFFF"/>
+                </a:solidFill>
+                <a:latin typeface="맑은 고딕"/>
+              </a:rPr>
+              <a:t>오류 코드 지도 (2)</a:t>
+            </a:r>
+          </a:p>
+        </p:txBody>
+      </p:sp>
+      <p:sp>
+        <p:nvSpPr>
+          <p:cNvPr id="4" name="TextBox 3"/>
+          <p:cNvSpPr txBox="1"/>
+          <p:nvPr/>
+        </p:nvSpPr>
+        <p:spPr>
+          <a:xfrm>
+            <a:off x="640080" y="1078992"/>
+            <a:ext cx="10881360" cy="457200"/>
+          </a:xfrm>
+          <a:prstGeom prst="rect">
+            <a:avLst/>
+          </a:prstGeom>
+          <a:noFill/>
+        </p:spPr>
+        <p:txBody>
+          <a:bodyPr wrap="square">
+            <a:spAutoFit/>
+          </a:bodyPr>
+          <a:lstStyle/>
+          <a:p>
+            <a:pPr algn="l">
+              <a:spcAft>
+                <a:spcPts val="600"/>
+              </a:spcAft>
+            </a:pPr>
+            <a:r>
+              <a:rPr sz="1500" b="0">
+                <a:solidFill>
+                  <a:srgbClr val="5A6672"/>
+                </a:solidFill>
+                <a:latin typeface="맑은 고딕"/>
+              </a:rPr>
+              <a:t>인스턴스, 인증, Data Guard</a:t>
+            </a:r>
+          </a:p>
+        </p:txBody>
+      </p:sp>
+      <p:sp>
+        <p:nvSpPr>
+          <p:cNvPr id="5" name="TextBox 4"/>
+          <p:cNvSpPr txBox="1"/>
+          <p:nvPr/>
+        </p:nvSpPr>
+        <p:spPr>
+          <a:xfrm>
+            <a:off x="640080" y="1737360"/>
+            <a:ext cx="10881360" cy="4754880"/>
+          </a:xfrm>
+          <a:prstGeom prst="rect">
+            <a:avLst/>
+          </a:prstGeom>
+          <a:noFill/>
+        </p:spPr>
+        <p:txBody>
+          <a:bodyPr wrap="square">
+            <a:spAutoFit/>
+          </a:bodyPr>
+          <a:lstStyle/>
+          <a:p>
+            <a:pPr algn="l">
+              <a:spcAft>
+                <a:spcPts val="1000"/>
+              </a:spcAft>
+            </a:pPr>
+            <a:r>
+              <a:rPr sz="1700" b="0">
+                <a:solidFill>
+                  <a:srgbClr val="222222"/>
+                </a:solidFill>
+                <a:latin typeface="맑은 고딕"/>
+              </a:rPr>
+              <a:t>•  ORA-01034: 인스턴스가 떠 있지 않음</a:t>
+            </a:r>
+          </a:p>
+          <a:p>
+            <a:pPr algn="l">
+              <a:spcAft>
+                <a:spcPts val="1000"/>
+              </a:spcAft>
+            </a:pPr>
+            <a:r>
+              <a:rPr sz="1700" b="0">
+                <a:solidFill>
+                  <a:srgbClr val="222222"/>
+                </a:solidFill>
+                <a:latin typeface="맑은 고딕"/>
+              </a:rPr>
+              <a:t>•  ORA-01017: 인증 실패, 패스워드 파일 확인</a:t>
+            </a:r>
+          </a:p>
+          <a:p>
+            <a:pPr algn="l">
+              <a:spcAft>
+                <a:spcPts val="1000"/>
+              </a:spcAft>
+            </a:pPr>
+            <a:r>
+              <a:rPr sz="1700" b="0">
+                <a:solidFill>
+                  <a:srgbClr val="222222"/>
+                </a:solidFill>
+                <a:latin typeface="맑은 고딕"/>
+              </a:rPr>
+              <a:t>•  ORA-16191: 전송 클라이언트 로그온 실패</a:t>
+            </a:r>
+          </a:p>
+          <a:p>
+            <a:pPr algn="l">
+              <a:spcAft>
+                <a:spcPts val="1000"/>
+              </a:spcAft>
+            </a:pPr>
+            <a:r>
+              <a:rPr sz="1700" b="0">
+                <a:solidFill>
+                  <a:srgbClr val="222222"/>
+                </a:solidFill>
+                <a:latin typeface="맑은 고딕"/>
+              </a:rPr>
+              <a:t>•  ORA-16053: DB_UNIQUE_NAME이 DG_CONFIG에 없음</a:t>
+            </a:r>
+          </a:p>
+        </p:txBody>
+      </p:sp>
+    </p:spTree>
+  </p:cSld>
+  <p:clrMapOvr>
+    <a:masterClrMapping/>
+  </p:clrMapOvr>
+</p:sld>
+</file>
+
+<file path=ppt/slides/slide43.xml><?xml version="1.0" encoding="utf-8"?>
+<p:sld xmlns:a="http://schemas.openxmlformats.org/drawingml/2006/main" xmlns:p="http://schemas.openxmlformats.org/presentationml/2006/main" xmlns:r="http://schemas.openxmlformats.org/officeDocument/2006/relationships">
+  <p:cSld>
+    <p:spTree>
+      <p:nvGrpSpPr>
+        <p:cNvPr id="1" name=""/>
+        <p:cNvGrpSpPr/>
+        <p:nvPr/>
+      </p:nvGrpSpPr>
+      <p:grpSpPr/>
+      <p:sp>
+        <p:nvSpPr>
+          <p:cNvPr id="2" name="Rectangle 1"/>
+          <p:cNvSpPr/>
+          <p:nvPr/>
+        </p:nvSpPr>
+        <p:spPr>
+          <a:xfrm>
+            <a:off x="0" y="0"/>
+            <a:ext cx="12191695" cy="1005840"/>
+          </a:xfrm>
+          <a:prstGeom prst="rect">
+            <a:avLst/>
+          </a:prstGeom>
+          <a:solidFill>
+            <a:srgbClr val="C0392B"/>
+          </a:solidFill>
+          <a:ln>
+            <a:noFill/>
+          </a:ln>
+          <a:effectLst/>
+        </p:spPr>
+        <p:style>
+          <a:lnRef idx="1">
+            <a:schemeClr val="accent1"/>
+          </a:lnRef>
+          <a:fillRef idx="3">
+            <a:schemeClr val="accent1"/>
+          </a:fillRef>
+          <a:effectRef idx="2">
+            <a:schemeClr val="accent1"/>
+          </a:effectRef>
+          <a:fontRef idx="minor">
+            <a:schemeClr val="lt1"/>
+          </a:fontRef>
+        </p:style>
+        <p:txBody>
+          <a:bodyPr rtlCol="0" anchor="ctr"/>
+          <a:lstStyle/>
+          <a:p>
+            <a:pPr algn="ctr"/>
+          </a:p>
+        </p:txBody>
+      </p:sp>
+      <p:sp>
+        <p:nvSpPr>
+          <p:cNvPr id="3" name="TextBox 2"/>
+          <p:cNvSpPr txBox="1"/>
+          <p:nvPr/>
+        </p:nvSpPr>
+        <p:spPr>
+          <a:xfrm>
+            <a:off x="548640" y="91440"/>
+            <a:ext cx="10972800" cy="777240"/>
+          </a:xfrm>
+          <a:prstGeom prst="rect">
+            <a:avLst/>
+          </a:prstGeom>
+          <a:noFill/>
+        </p:spPr>
+        <p:txBody>
+          <a:bodyPr wrap="square">
+            <a:spAutoFit/>
+          </a:bodyPr>
+          <a:lstStyle/>
+          <a:p>
+            <a:pPr algn="l">
+              <a:spcAft>
+                <a:spcPts val="600"/>
+              </a:spcAft>
+            </a:pPr>
+            <a:r>
+              <a:rPr sz="2600" b="1">
+                <a:solidFill>
+                  <a:srgbClr val="FFFFFF"/>
+                </a:solidFill>
+                <a:latin typeface="맑은 고딕"/>
+              </a:rPr>
+              <a:t>Data Guard 쪽에서 하는 확인</a:t>
+            </a:r>
+          </a:p>
+        </p:txBody>
+      </p:sp>
+      <p:sp>
+        <p:nvSpPr>
+          <p:cNvPr id="4" name="TextBox 3"/>
+          <p:cNvSpPr txBox="1"/>
+          <p:nvPr/>
+        </p:nvSpPr>
+        <p:spPr>
+          <a:xfrm>
+            <a:off x="640080" y="1078992"/>
+            <a:ext cx="10881360" cy="457200"/>
+          </a:xfrm>
+          <a:prstGeom prst="rect">
+            <a:avLst/>
+          </a:prstGeom>
+          <a:noFill/>
+        </p:spPr>
+        <p:txBody>
+          <a:bodyPr wrap="square">
+            <a:spAutoFit/>
+          </a:bodyPr>
+          <a:lstStyle/>
+          <a:p>
+            <a:pPr algn="l">
+              <a:spcAft>
+                <a:spcPts val="600"/>
+              </a:spcAft>
+            </a:pPr>
+            <a:r>
+              <a:rPr sz="1500" b="0">
+                <a:solidFill>
+                  <a:srgbClr val="5A6672"/>
+                </a:solidFill>
+                <a:latin typeface="맑은 고딕"/>
+              </a:rPr>
+              <a:t>목적지 상태와 Broker 검증 명령</a:t>
+            </a:r>
+          </a:p>
+        </p:txBody>
+      </p:sp>
+      <p:sp>
+        <p:nvSpPr>
+          <p:cNvPr id="5" name="TextBox 4"/>
+          <p:cNvSpPr txBox="1"/>
+          <p:nvPr/>
+        </p:nvSpPr>
+        <p:spPr>
+          <a:xfrm>
+            <a:off x="640080" y="1737360"/>
+            <a:ext cx="10881360" cy="4754880"/>
+          </a:xfrm>
+          <a:prstGeom prst="rect">
+            <a:avLst/>
+          </a:prstGeom>
+          <a:noFill/>
+        </p:spPr>
+        <p:txBody>
+          <a:bodyPr wrap="square">
+            <a:spAutoFit/>
+          </a:bodyPr>
+          <a:lstStyle/>
+          <a:p>
+            <a:pPr algn="l">
+              <a:spcAft>
+                <a:spcPts val="1000"/>
+              </a:spcAft>
+            </a:pPr>
+            <a:r>
+              <a:rPr sz="1700" b="0">
+                <a:solidFill>
+                  <a:srgbClr val="222222"/>
+                </a:solidFill>
+                <a:latin typeface="맑은 고딕"/>
+              </a:rPr>
+              <a:t>•  V$ARCHIVE_DEST_STATUS: STATUS, ERROR</a:t>
+            </a:r>
+          </a:p>
+          <a:p>
+            <a:pPr algn="l">
+              <a:spcAft>
+                <a:spcPts val="1000"/>
+              </a:spcAft>
+            </a:pPr>
+            <a:r>
+              <a:rPr sz="1700" b="0">
+                <a:solidFill>
+                  <a:srgbClr val="222222"/>
+                </a:solidFill>
+                <a:latin typeface="맑은 고딕"/>
+              </a:rPr>
+              <a:t>•  ERROR는 마지막 실패 기록, 고친 뒤 재조회</a:t>
+            </a:r>
+          </a:p>
+          <a:p>
+            <a:pPr algn="l">
+              <a:spcAft>
+                <a:spcPts val="1000"/>
+              </a:spcAft>
+            </a:pPr>
+            <a:r>
+              <a:rPr sz="1700" b="0">
+                <a:solidFill>
+                  <a:srgbClr val="222222"/>
+                </a:solidFill>
+                <a:latin typeface="맑은 고딕"/>
+              </a:rPr>
+              <a:t>•  VALIDATE NETWORK CONFIGURATION FOR ALL</a:t>
+            </a:r>
+          </a:p>
+          <a:p>
+            <a:pPr algn="l">
+              <a:spcAft>
+                <a:spcPts val="1000"/>
+              </a:spcAft>
+            </a:pPr>
+            <a:r>
+              <a:rPr sz="1700" b="0">
+                <a:solidFill>
+                  <a:srgbClr val="222222"/>
+                </a:solidFill>
+                <a:latin typeface="맑은 고딕"/>
+              </a:rPr>
+              <a:t>•  VALIDATE STATIC CONNECT IDENTIFIER FOR ALL</a:t>
+            </a:r>
+          </a:p>
+        </p:txBody>
+      </p:sp>
+    </p:spTree>
+  </p:cSld>
+  <p:clrMapOvr>
+    <a:masterClrMapping/>
+  </p:clrMapOvr>
+</p:sld>
+</file>
+
+<file path=ppt/slides/slide44.xml><?xml version="1.0" encoding="utf-8"?>
+<p:sld xmlns:a="http://schemas.openxmlformats.org/drawingml/2006/main" xmlns:p="http://schemas.openxmlformats.org/presentationml/2006/main" xmlns:r="http://schemas.openxmlformats.org/officeDocument/2006/relationships">
+  <p:cSld>
+    <p:spTree>
+      <p:nvGrpSpPr>
+        <p:cNvPr id="1" name=""/>
+        <p:cNvGrpSpPr/>
+        <p:nvPr/>
+      </p:nvGrpSpPr>
+      <p:grpSpPr/>
+      <p:sp>
+        <p:nvSpPr>
+          <p:cNvPr id="2" name="Rectangle 1"/>
+          <p:cNvSpPr/>
+          <p:nvPr/>
+        </p:nvSpPr>
+        <p:spPr>
+          <a:xfrm>
+            <a:off x="0" y="0"/>
+            <a:ext cx="12191695" cy="1005840"/>
+          </a:xfrm>
+          <a:prstGeom prst="rect">
+            <a:avLst/>
+          </a:prstGeom>
+          <a:solidFill>
+            <a:srgbClr val="C0392B"/>
+          </a:solidFill>
+          <a:ln>
+            <a:noFill/>
+          </a:ln>
+          <a:effectLst/>
+        </p:spPr>
+        <p:style>
+          <a:lnRef idx="1">
+            <a:schemeClr val="accent1"/>
+          </a:lnRef>
+          <a:fillRef idx="3">
+            <a:schemeClr val="accent1"/>
+          </a:fillRef>
+          <a:effectRef idx="2">
+            <a:schemeClr val="accent1"/>
+          </a:effectRef>
+          <a:fontRef idx="minor">
+            <a:schemeClr val="lt1"/>
+          </a:fontRef>
+        </p:style>
+        <p:txBody>
+          <a:bodyPr rtlCol="0" anchor="ctr"/>
+          <a:lstStyle/>
+          <a:p>
+            <a:pPr algn="ctr"/>
+          </a:p>
+        </p:txBody>
+      </p:sp>
+      <p:sp>
+        <p:nvSpPr>
+          <p:cNvPr id="3" name="TextBox 2"/>
+          <p:cNvSpPr txBox="1"/>
+          <p:nvPr/>
+        </p:nvSpPr>
+        <p:spPr>
+          <a:xfrm>
+            <a:off x="548640" y="91440"/>
+            <a:ext cx="10972800" cy="777240"/>
+          </a:xfrm>
+          <a:prstGeom prst="rect">
+            <a:avLst/>
+          </a:prstGeom>
+          <a:noFill/>
+        </p:spPr>
+        <p:txBody>
+          <a:bodyPr wrap="square">
+            <a:spAutoFit/>
+          </a:bodyPr>
+          <a:lstStyle/>
+          <a:p>
+            <a:pPr algn="l">
+              <a:spcAft>
+                <a:spcPts val="600"/>
+              </a:spcAft>
+            </a:pPr>
+            <a:r>
+              <a:rPr sz="2600" b="1">
+                <a:solidFill>
+                  <a:srgbClr val="FFFFFF"/>
+                </a:solidFill>
+                <a:latin typeface="맑은 고딕"/>
+              </a:rPr>
+              <a:t>구축 전 네트워크 점검표</a:t>
+            </a:r>
+          </a:p>
+        </p:txBody>
+      </p:sp>
+      <p:sp>
+        <p:nvSpPr>
+          <p:cNvPr id="4" name="TextBox 3"/>
+          <p:cNvSpPr txBox="1"/>
+          <p:nvPr/>
+        </p:nvSpPr>
+        <p:spPr>
+          <a:xfrm>
+            <a:off x="640080" y="1078992"/>
+            <a:ext cx="10881360" cy="457200"/>
+          </a:xfrm>
+          <a:prstGeom prst="rect">
+            <a:avLst/>
+          </a:prstGeom>
+          <a:noFill/>
+        </p:spPr>
+        <p:txBody>
+          <a:bodyPr wrap="square">
+            <a:spAutoFit/>
+          </a:bodyPr>
+          <a:lstStyle/>
+          <a:p>
+            <a:pPr algn="l">
+              <a:spcAft>
+                <a:spcPts val="600"/>
+              </a:spcAft>
+            </a:pPr>
+            <a:r>
+              <a:rPr sz="1500" b="0">
+                <a:solidFill>
+                  <a:srgbClr val="5A6672"/>
+                </a:solidFill>
+                <a:latin typeface="맑은 고딕"/>
+              </a:rPr>
+              <a:t>DUPLICATE 전에 모두 통과</a:t>
+            </a:r>
+          </a:p>
+        </p:txBody>
+      </p:sp>
+      <p:sp>
+        <p:nvSpPr>
+          <p:cNvPr id="5" name="TextBox 4"/>
+          <p:cNvSpPr txBox="1"/>
+          <p:nvPr/>
+        </p:nvSpPr>
+        <p:spPr>
+          <a:xfrm>
+            <a:off x="640080" y="1737360"/>
+            <a:ext cx="10881360" cy="4754880"/>
+          </a:xfrm>
+          <a:prstGeom prst="rect">
+            <a:avLst/>
+          </a:prstGeom>
+          <a:noFill/>
+        </p:spPr>
+        <p:txBody>
+          <a:bodyPr wrap="square">
+            <a:spAutoFit/>
+          </a:bodyPr>
+          <a:lstStyle/>
+          <a:p>
+            <a:pPr algn="l">
+              <a:spcAft>
+                <a:spcPts val="1000"/>
+              </a:spcAft>
+            </a:pPr>
+            <a:r>
+              <a:rPr sz="1700" b="0">
+                <a:solidFill>
+                  <a:srgbClr val="222222"/>
+                </a:solidFill>
+                <a:latin typeface="맑은 고딕"/>
+              </a:rPr>
+              <a:t>•  양쪽 tnsnames.ora, 모든 별칭 tnsping 성공</a:t>
+            </a:r>
+          </a:p>
+          <a:p>
+            <a:pPr algn="l">
+              <a:spcAft>
+                <a:spcPts val="1000"/>
+              </a:spcAft>
+            </a:pPr>
+            <a:r>
+              <a:rPr sz="1700" b="0">
+                <a:solidFill>
+                  <a:srgbClr val="222222"/>
+                </a:solidFill>
+                <a:latin typeface="맑은 고딕"/>
+              </a:rPr>
+              <a:t>•  양쪽 정적 서비스 2개, UNKNOWN 표시</a:t>
+            </a:r>
+          </a:p>
+          <a:p>
+            <a:pPr algn="l">
+              <a:spcAft>
+                <a:spcPts val="1000"/>
+              </a:spcAft>
+            </a:pPr>
+            <a:r>
+              <a:rPr sz="1700" b="0">
+                <a:solidFill>
+                  <a:srgbClr val="222222"/>
+                </a:solidFill>
+                <a:latin typeface="맑은 고딕"/>
+              </a:rPr>
+              <a:t>•  양방향 원격 SYSDBA 접속, NOMOUNT에서도</a:t>
+            </a:r>
+          </a:p>
+          <a:p>
+            <a:pPr algn="l">
+              <a:spcAft>
+                <a:spcPts val="1000"/>
+              </a:spcAft>
+            </a:pPr>
+            <a:r>
+              <a:rPr sz="1700" b="0">
+                <a:solidFill>
+                  <a:srgbClr val="222222"/>
+                </a:solidFill>
+                <a:latin typeface="맑은 고딕"/>
+              </a:rPr>
+              <a:t>•  리스너 포트 양방향 허용</a:t>
+            </a:r>
+          </a:p>
+        </p:txBody>
+      </p:sp>
+    </p:spTree>
+  </p:cSld>
+  <p:clrMapOvr>
+    <a:masterClrMapping/>
+  </p:clrMapOvr>
+</p:sld>
+</file>
+
+<file path=ppt/slides/slide45.xml><?xml version="1.0" encoding="utf-8"?>
+<p:sld xmlns:a="http://schemas.openxmlformats.org/drawingml/2006/main" xmlns:p="http://schemas.openxmlformats.org/presentationml/2006/main" xmlns:r="http://schemas.openxmlformats.org/officeDocument/2006/relationships">
+  <p:cSld>
+    <p:spTree>
+      <p:nvGrpSpPr>
+        <p:cNvPr id="1" name=""/>
+        <p:cNvGrpSpPr/>
+        <p:nvPr/>
+      </p:nvGrpSpPr>
+      <p:grpSpPr/>
+      <p:sp>
+        <p:nvSpPr>
+          <p:cNvPr id="2" name="Rectangle 1"/>
+          <p:cNvSpPr/>
+          <p:nvPr/>
+        </p:nvSpPr>
+        <p:spPr>
+          <a:xfrm>
+            <a:off x="0" y="0"/>
+            <a:ext cx="12191695" cy="6858000"/>
+          </a:xfrm>
+          <a:prstGeom prst="rect">
+            <a:avLst/>
+          </a:prstGeom>
+          <a:solidFill>
+            <a:srgbClr val="C0392B"/>
+          </a:solidFill>
+          <a:ln>
+            <a:noFill/>
+          </a:ln>
+          <a:effectLst/>
+        </p:spPr>
+        <p:style>
+          <a:lnRef idx="1">
+            <a:schemeClr val="accent1"/>
+          </a:lnRef>
+          <a:fillRef idx="3">
+            <a:schemeClr val="accent1"/>
+          </a:fillRef>
+          <a:effectRef idx="2">
+            <a:schemeClr val="accent1"/>
+          </a:effectRef>
+          <a:fontRef idx="minor">
+            <a:schemeClr val="lt1"/>
+          </a:fontRef>
+        </p:style>
+        <p:txBody>
+          <a:bodyPr rtlCol="0" anchor="ctr"/>
+          <a:lstStyle/>
+          <a:p>
+            <a:pPr algn="ctr"/>
+          </a:p>
+        </p:txBody>
+      </p:sp>
+      <p:sp>
+        <p:nvSpPr>
+          <p:cNvPr id="3" name="TextBox 2"/>
+          <p:cNvSpPr txBox="1"/>
+          <p:nvPr/>
+        </p:nvSpPr>
+        <p:spPr>
+          <a:xfrm>
+            <a:off x="822960" y="2011680"/>
+            <a:ext cx="10515600" cy="1097280"/>
+          </a:xfrm>
+          <a:prstGeom prst="rect">
+            <a:avLst/>
+          </a:prstGeom>
+          <a:noFill/>
+        </p:spPr>
+        <p:txBody>
+          <a:bodyPr wrap="square">
+            <a:spAutoFit/>
+          </a:bodyPr>
+          <a:lstStyle/>
+          <a:p>
+            <a:pPr algn="l">
+              <a:spcAft>
+                <a:spcPts val="600"/>
+              </a:spcAft>
+            </a:pPr>
+            <a:r>
+              <a:rPr sz="4000" b="1">
+                <a:solidFill>
+                  <a:srgbClr val="FFFFFF"/>
+                </a:solidFill>
+                <a:latin typeface="맑은 고딕"/>
+              </a:rPr>
+              <a:t>3.9</a:t>
+            </a:r>
+          </a:p>
+        </p:txBody>
+      </p:sp>
+      <p:sp>
+        <p:nvSpPr>
+          <p:cNvPr id="4" name="TextBox 3"/>
+          <p:cNvSpPr txBox="1"/>
+          <p:nvPr/>
+        </p:nvSpPr>
+        <p:spPr>
+          <a:xfrm>
+            <a:off x="822960" y="3017520"/>
+            <a:ext cx="10515600" cy="914400"/>
+          </a:xfrm>
+          <a:prstGeom prst="rect">
+            <a:avLst/>
+          </a:prstGeom>
+          <a:noFill/>
+        </p:spPr>
+        <p:txBody>
+          <a:bodyPr wrap="square">
+            <a:spAutoFit/>
+          </a:bodyPr>
+          <a:lstStyle/>
+          <a:p>
+            <a:pPr algn="l">
+              <a:spcAft>
+                <a:spcPts val="600"/>
+              </a:spcAft>
+            </a:pPr>
+            <a:r>
+              <a:rPr sz="2800" b="1">
+                <a:solidFill>
+                  <a:srgbClr val="FFFFFF"/>
+                </a:solidFill>
+                <a:latin typeface="맑은 고딕"/>
+              </a:rPr>
+              <a:t>운영 시 주의점</a:t>
+            </a:r>
+          </a:p>
+        </p:txBody>
+      </p:sp>
+      <p:sp>
+        <p:nvSpPr>
+          <p:cNvPr id="5" name="Rectangle 4"/>
+          <p:cNvSpPr/>
+          <p:nvPr/>
+        </p:nvSpPr>
+        <p:spPr>
+          <a:xfrm>
+            <a:off x="822960" y="4114800"/>
+            <a:ext cx="5486400" cy="54864"/>
+          </a:xfrm>
+          <a:prstGeom prst="rect">
+            <a:avLst/>
+          </a:prstGeom>
+          <a:solidFill>
+            <a:srgbClr val="FFFFFF"/>
+          </a:solidFill>
+          <a:ln>
+            <a:noFill/>
+          </a:ln>
+          <a:effectLst/>
+        </p:spPr>
+        <p:style>
+          <a:lnRef idx="1">
+            <a:schemeClr val="accent1"/>
+          </a:lnRef>
+          <a:fillRef idx="3">
+            <a:schemeClr val="accent1"/>
+          </a:fillRef>
+          <a:effectRef idx="2">
+            <a:schemeClr val="accent1"/>
+          </a:effectRef>
+          <a:fontRef idx="minor">
+            <a:schemeClr val="lt1"/>
+          </a:fontRef>
+        </p:style>
+        <p:txBody>
+          <a:bodyPr rtlCol="0" anchor="ctr"/>
+          <a:lstStyle/>
+          <a:p>
+            <a:pPr algn="ctr"/>
+          </a:p>
+        </p:txBody>
+      </p:sp>
+      <p:sp>
+        <p:nvSpPr>
+          <p:cNvPr id="6" name="TextBox 5"/>
+          <p:cNvSpPr txBox="1"/>
+          <p:nvPr/>
+        </p:nvSpPr>
+        <p:spPr>
+          <a:xfrm>
+            <a:off x="822960" y="4297680"/>
+            <a:ext cx="10058400" cy="2011680"/>
+          </a:xfrm>
+          <a:prstGeom prst="rect">
+            <a:avLst/>
+          </a:prstGeom>
+          <a:noFill/>
+        </p:spPr>
+        <p:txBody>
+          <a:bodyPr wrap="square">
+            <a:spAutoFit/>
+          </a:bodyPr>
+          <a:lstStyle/>
+          <a:p>
+            <a:pPr algn="l">
+              <a:spcAft>
+                <a:spcPts val="800"/>
+              </a:spcAft>
+            </a:pPr>
+            <a:r>
+              <a:rPr sz="1600" b="0">
+                <a:solidFill>
+                  <a:srgbClr val="FFFFFF"/>
+                </a:solidFill>
+                <a:latin typeface="맑은 고딕"/>
+              </a:rPr>
+              <a:t>•  양쪽을 함께 바꾼다</a:t>
+            </a:r>
+          </a:p>
+          <a:p>
+            <a:pPr algn="l">
+              <a:spcAft>
+                <a:spcPts val="800"/>
+              </a:spcAft>
+            </a:pPr>
+            <a:r>
+              <a:rPr sz="1600" b="0">
+                <a:solidFill>
+                  <a:srgbClr val="FFFFFF"/>
+                </a:solidFill>
+                <a:latin typeface="맑은 고딕"/>
+              </a:rPr>
+              <a:t>•  비밀번호와 IP 변경은 Data Guard 변경</a:t>
+            </a:r>
+          </a:p>
+          <a:p>
+            <a:pPr algn="l">
+              <a:spcAft>
+                <a:spcPts val="800"/>
+              </a:spcAft>
+            </a:pPr>
+            <a:r>
+              <a:rPr sz="1600" b="0">
+                <a:solidFill>
+                  <a:srgbClr val="FFFFFF"/>
+                </a:solidFill>
+                <a:latin typeface="맑은 고딕"/>
+              </a:rPr>
+              <a:t>•  원인 제거 뒤 상태 회복까지 확인</a:t>
+            </a:r>
+          </a:p>
+        </p:txBody>
+      </p:sp>
+    </p:spTree>
+  </p:cSld>
+  <p:clrMapOvr>
+    <a:masterClrMapping/>
+  </p:clrMapOvr>
+</p:sld>
+</file>
+
+<file path=ppt/slides/slide46.xml><?xml version="1.0" encoding="utf-8"?>
+<p:sld xmlns:a="http://schemas.openxmlformats.org/drawingml/2006/main" xmlns:p="http://schemas.openxmlformats.org/presentationml/2006/main" xmlns:r="http://schemas.openxmlformats.org/officeDocument/2006/relationships">
+  <p:cSld>
+    <p:spTree>
+      <p:nvGrpSpPr>
+        <p:cNvPr id="1" name=""/>
+        <p:cNvGrpSpPr/>
+        <p:nvPr/>
+      </p:nvGrpSpPr>
+      <p:grpSpPr/>
+      <p:sp>
+        <p:nvSpPr>
+          <p:cNvPr id="2" name="Rectangle 1"/>
+          <p:cNvSpPr/>
+          <p:nvPr/>
+        </p:nvSpPr>
+        <p:spPr>
+          <a:xfrm>
+            <a:off x="0" y="0"/>
+            <a:ext cx="12191695" cy="1005840"/>
+          </a:xfrm>
+          <a:prstGeom prst="rect">
+            <a:avLst/>
+          </a:prstGeom>
+          <a:solidFill>
+            <a:srgbClr val="C0392B"/>
+          </a:solidFill>
+          <a:ln>
+            <a:noFill/>
+          </a:ln>
+          <a:effectLst/>
+        </p:spPr>
+        <p:style>
+          <a:lnRef idx="1">
+            <a:schemeClr val="accent1"/>
+          </a:lnRef>
+          <a:fillRef idx="3">
+            <a:schemeClr val="accent1"/>
+          </a:fillRef>
+          <a:effectRef idx="2">
+            <a:schemeClr val="accent1"/>
+          </a:effectRef>
+          <a:fontRef idx="minor">
+            <a:schemeClr val="lt1"/>
+          </a:fontRef>
+        </p:style>
+        <p:txBody>
+          <a:bodyPr rtlCol="0" anchor="ctr"/>
+          <a:lstStyle/>
+          <a:p>
+            <a:pPr algn="ctr"/>
+          </a:p>
+        </p:txBody>
+      </p:sp>
+      <p:sp>
+        <p:nvSpPr>
+          <p:cNvPr id="3" name="TextBox 2"/>
+          <p:cNvSpPr txBox="1"/>
+          <p:nvPr/>
+        </p:nvSpPr>
+        <p:spPr>
+          <a:xfrm>
+            <a:off x="548640" y="91440"/>
+            <a:ext cx="10972800" cy="777240"/>
+          </a:xfrm>
+          <a:prstGeom prst="rect">
+            <a:avLst/>
+          </a:prstGeom>
+          <a:noFill/>
+        </p:spPr>
+        <p:txBody>
+          <a:bodyPr wrap="square">
+            <a:spAutoFit/>
+          </a:bodyPr>
+          <a:lstStyle/>
+          <a:p>
+            <a:pPr algn="l">
+              <a:spcAft>
+                <a:spcPts val="600"/>
+              </a:spcAft>
+            </a:pPr>
+            <a:r>
+              <a:rPr sz="2600" b="1">
+                <a:solidFill>
+                  <a:srgbClr val="FFFFFF"/>
+                </a:solidFill>
+                <a:latin typeface="맑은 고딕"/>
+              </a:rPr>
+              <a:t>운영 시 주의점</a:t>
+            </a:r>
+          </a:p>
+        </p:txBody>
+      </p:sp>
+      <p:sp>
+        <p:nvSpPr>
+          <p:cNvPr id="4" name="TextBox 3"/>
+          <p:cNvSpPr txBox="1"/>
+          <p:nvPr/>
+        </p:nvSpPr>
+        <p:spPr>
+          <a:xfrm>
+            <a:off x="640080" y="1078992"/>
+            <a:ext cx="10881360" cy="457200"/>
+          </a:xfrm>
+          <a:prstGeom prst="rect">
+            <a:avLst/>
+          </a:prstGeom>
+          <a:noFill/>
+        </p:spPr>
+        <p:txBody>
+          <a:bodyPr wrap="square">
+            <a:spAutoFit/>
+          </a:bodyPr>
+          <a:lstStyle/>
+          <a:p>
+            <a:pPr algn="l">
+              <a:spcAft>
+                <a:spcPts val="600"/>
+              </a:spcAft>
+            </a:pPr>
+            <a:r>
+              <a:rPr sz="1500" b="0">
+                <a:solidFill>
+                  <a:srgbClr val="5A6672"/>
+                </a:solidFill>
+                <a:latin typeface="맑은 고딕"/>
+              </a:rPr>
+              <a:t>평소에는 드러나지 않는 설정들</a:t>
+            </a:r>
+          </a:p>
+        </p:txBody>
+      </p:sp>
+      <p:sp>
+        <p:nvSpPr>
+          <p:cNvPr id="5" name="TextBox 4"/>
+          <p:cNvSpPr txBox="1"/>
+          <p:nvPr/>
+        </p:nvSpPr>
+        <p:spPr>
+          <a:xfrm>
+            <a:off x="640080" y="1737360"/>
+            <a:ext cx="10881360" cy="4754880"/>
+          </a:xfrm>
+          <a:prstGeom prst="rect">
+            <a:avLst/>
+          </a:prstGeom>
+          <a:noFill/>
+        </p:spPr>
+        <p:txBody>
+          <a:bodyPr wrap="square">
+            <a:spAutoFit/>
+          </a:bodyPr>
+          <a:lstStyle/>
+          <a:p>
+            <a:pPr algn="l">
+              <a:spcAft>
+                <a:spcPts val="1000"/>
+              </a:spcAft>
+            </a:pPr>
+            <a:r>
+              <a:rPr sz="1700" b="0">
+                <a:solidFill>
+                  <a:srgbClr val="222222"/>
+                </a:solidFill>
+                <a:latin typeface="맑은 고딕"/>
+              </a:rPr>
+              <a:t>•  네트워크 설정은 양쪽을 함께 수정</a:t>
+            </a:r>
+          </a:p>
+          <a:p>
+            <a:pPr algn="l">
+              <a:spcAft>
+                <a:spcPts val="1000"/>
+              </a:spcAft>
+            </a:pPr>
+            <a:r>
+              <a:rPr sz="1700" b="0">
+                <a:solidFill>
+                  <a:srgbClr val="222222"/>
+                </a:solidFill>
+                <a:latin typeface="맑은 고딕"/>
+              </a:rPr>
+              <a:t>•  IP, 호스트 이름, DNS 변경은 DG 변경으로 취급</a:t>
+            </a:r>
+          </a:p>
+          <a:p>
+            <a:pPr algn="l">
+              <a:spcAft>
+                <a:spcPts val="1000"/>
+              </a:spcAft>
+            </a:pPr>
+            <a:r>
+              <a:rPr sz="1700" b="0">
+                <a:solidFill>
+                  <a:srgbClr val="222222"/>
+                </a:solidFill>
+                <a:latin typeface="맑은 고딕"/>
+              </a:rPr>
+              <a:t>•  비밀번호 변경 절차에 파일 동기화 포함</a:t>
+            </a:r>
+          </a:p>
+          <a:p>
+            <a:pPr algn="l">
+              <a:spcAft>
+                <a:spcPts val="1000"/>
+              </a:spcAft>
+            </a:pPr>
+            <a:r>
+              <a:rPr sz="1700" b="0">
+                <a:solidFill>
+                  <a:srgbClr val="222222"/>
+                </a:solidFill>
+                <a:latin typeface="맑은 고딕"/>
+              </a:rPr>
+              <a:t>•  방화벽은 끄지 말고 포트를 양방향 허용</a:t>
+            </a:r>
+          </a:p>
+          <a:p>
+            <a:pPr algn="l">
+              <a:spcAft>
+                <a:spcPts val="1000"/>
+              </a:spcAft>
+            </a:pPr>
+            <a:r>
+              <a:rPr sz="1700" b="0">
+                <a:solidFill>
+                  <a:srgbClr val="222222"/>
+                </a:solidFill>
+                <a:latin typeface="맑은 고딕"/>
+              </a:rPr>
+              <a:t>•  조정값과 BDP 근거를 구축 문서에</a:t>
+            </a:r>
+          </a:p>
+        </p:txBody>
+      </p:sp>
+    </p:spTree>
+  </p:cSld>
+  <p:clrMapOvr>
+    <a:masterClrMapping/>
+  </p:clrMapOvr>
+</p:sld>
+</file>
+
+<file path=ppt/slides/slide47.xml><?xml version="1.0" encoding="utf-8"?>
+<p:sld xmlns:a="http://schemas.openxmlformats.org/drawingml/2006/main" xmlns:p="http://schemas.openxmlformats.org/presentationml/2006/main" xmlns:r="http://schemas.openxmlformats.org/officeDocument/2006/relationships">
+  <p:cSld>
+    <p:spTree>
+      <p:nvGrpSpPr>
+        <p:cNvPr id="1" name=""/>
+        <p:cNvGrpSpPr/>
+        <p:nvPr/>
+      </p:nvGrpSpPr>
+      <p:grpSpPr/>
+      <p:sp>
+        <p:nvSpPr>
+          <p:cNvPr id="2" name="Rectangle 1"/>
+          <p:cNvSpPr/>
+          <p:nvPr/>
+        </p:nvSpPr>
+        <p:spPr>
+          <a:xfrm>
+            <a:off x="0" y="0"/>
+            <a:ext cx="12191695" cy="1005840"/>
+          </a:xfrm>
+          <a:prstGeom prst="rect">
+            <a:avLst/>
+          </a:prstGeom>
+          <a:solidFill>
+            <a:srgbClr val="C0392B"/>
+          </a:solidFill>
+          <a:ln>
+            <a:noFill/>
+          </a:ln>
+          <a:effectLst/>
+        </p:spPr>
+        <p:style>
+          <a:lnRef idx="1">
+            <a:schemeClr val="accent1"/>
+          </a:lnRef>
+          <a:fillRef idx="3">
+            <a:schemeClr val="accent1"/>
+          </a:fillRef>
+          <a:effectRef idx="2">
+            <a:schemeClr val="accent1"/>
+          </a:effectRef>
+          <a:fontRef idx="minor">
+            <a:schemeClr val="lt1"/>
+          </a:fontRef>
+        </p:style>
+        <p:txBody>
+          <a:bodyPr rtlCol="0" anchor="ctr"/>
+          <a:lstStyle/>
+          <a:p>
+            <a:pPr algn="ctr"/>
+          </a:p>
+        </p:txBody>
+      </p:sp>
+      <p:sp>
+        <p:nvSpPr>
+          <p:cNvPr id="3" name="TextBox 2"/>
+          <p:cNvSpPr txBox="1"/>
+          <p:nvPr/>
+        </p:nvSpPr>
+        <p:spPr>
+          <a:xfrm>
+            <a:off x="548640" y="91440"/>
+            <a:ext cx="10972800" cy="777240"/>
+          </a:xfrm>
+          <a:prstGeom prst="rect">
+            <a:avLst/>
+          </a:prstGeom>
+          <a:noFill/>
+        </p:spPr>
+        <p:txBody>
+          <a:bodyPr wrap="square">
+            <a:spAutoFit/>
+          </a:bodyPr>
+          <a:lstStyle/>
+          <a:p>
+            <a:pPr algn="l">
+              <a:spcAft>
+                <a:spcPts val="600"/>
+              </a:spcAft>
+            </a:pPr>
+            <a:r>
+              <a:rPr sz="2600" b="1">
+                <a:solidFill>
+                  <a:srgbClr val="FFFFFF"/>
+                </a:solidFill>
+                <a:latin typeface="맑은 고딕"/>
+              </a:rPr>
+              <a:t>요약</a:t>
+            </a:r>
+          </a:p>
+        </p:txBody>
+      </p:sp>
+      <p:sp>
+        <p:nvSpPr>
+          <p:cNvPr id="4" name="TextBox 3"/>
+          <p:cNvSpPr txBox="1"/>
+          <p:nvPr/>
+        </p:nvSpPr>
+        <p:spPr>
+          <a:xfrm>
+            <a:off x="640080" y="1371600"/>
+            <a:ext cx="10881360" cy="5120640"/>
+          </a:xfrm>
+          <a:prstGeom prst="rect">
+            <a:avLst/>
+          </a:prstGeom>
+          <a:noFill/>
+        </p:spPr>
+        <p:txBody>
+          <a:bodyPr wrap="square">
+            <a:spAutoFit/>
+          </a:bodyPr>
+          <a:lstStyle/>
+          <a:p>
+            <a:pPr algn="l">
+              <a:spcAft>
+                <a:spcPts val="1000"/>
+              </a:spcAft>
+            </a:pPr>
+            <a:r>
+              <a:rPr sz="1600" b="0">
+                <a:solidFill>
+                  <a:srgbClr val="222222"/>
+                </a:solidFill>
+                <a:latin typeface="맑은 고딕"/>
+              </a:rPr>
+              <a:t>•  전송 프로세스는 Standby 리스너의 클라이언트, 받는 쪽은 RFS</a:t>
+            </a:r>
+          </a:p>
+          <a:p>
+            <a:pPr algn="l">
+              <a:spcAft>
+                <a:spcPts val="1000"/>
+              </a:spcAft>
+            </a:pPr>
+            <a:r>
+              <a:rPr sz="1600" b="0">
+                <a:solidFill>
+                  <a:srgbClr val="222222"/>
+                </a:solidFill>
+                <a:latin typeface="맑은 고딕"/>
+              </a:rPr>
+              <a:t>•  별칭, 서비스 이름, DB_UNIQUE_NAME은 서로 다른 층</a:t>
+            </a:r>
+          </a:p>
+          <a:p>
+            <a:pPr algn="l">
+              <a:spcAft>
+                <a:spcPts val="1000"/>
+              </a:spcAft>
+            </a:pPr>
+            <a:r>
+              <a:rPr sz="1600" b="0">
+                <a:solidFill>
+                  <a:srgbClr val="222222"/>
+                </a:solidFill>
+                <a:latin typeface="맑은 고딕"/>
+              </a:rPr>
+              <a:t>•  NOMOUNT 접속과 Broker 재기동에는 정적 등록과 _DGMGRL</a:t>
+            </a:r>
+          </a:p>
+          <a:p>
+            <a:pPr algn="l">
+              <a:spcAft>
+                <a:spcPts val="1000"/>
+              </a:spcAft>
+            </a:pPr>
+            <a:r>
+              <a:rPr sz="1600" b="0">
+                <a:solidFill>
+                  <a:srgbClr val="222222"/>
+                </a:solidFill>
+                <a:latin typeface="맑은 고딕"/>
+              </a:rPr>
+              <a:t>•  패스워드 파일 일치, REDO_TRANSPORT_USER는 SYSOPER</a:t>
+            </a:r>
+          </a:p>
+          <a:p>
+            <a:pPr algn="l">
+              <a:spcAft>
+                <a:spcPts val="1000"/>
+              </a:spcAft>
+            </a:pPr>
+            <a:r>
+              <a:rPr sz="1600" b="0">
+                <a:solidFill>
+                  <a:srgbClr val="222222"/>
+                </a:solidFill>
+                <a:latin typeface="맑은 고딕"/>
+              </a:rPr>
+              <a:t>•  DG_CONFIG는 구성원 목록, 오기는 ORA-16053</a:t>
+            </a:r>
+          </a:p>
+          <a:p>
+            <a:pPr algn="l">
+              <a:spcAft>
+                <a:spcPts val="1000"/>
+              </a:spcAft>
+            </a:pPr>
+            <a:r>
+              <a:rPr sz="1600" b="0">
+                <a:solidFill>
+                  <a:srgbClr val="222222"/>
+                </a:solidFill>
+                <a:latin typeface="맑은 고딕"/>
+              </a:rPr>
+              <a:t>•  SDU 64KB, 버퍼 max(BDP×3, 10MB), NODELAY, 양방향 검증</a:t>
+            </a:r>
+          </a:p>
+        </p:txBody>
+      </p:sp>
+    </p:spTree>
+  </p:cSld>
+  <p:clrMapOvr>
+    <a:masterClrMapping/>
+  </p:clrMapOvr>
+</p:sld>
+</file>
+
+<file path=ppt/slides/slide48.xml><?xml version="1.0" encoding="utf-8"?>
+<p:sld xmlns:a="http://schemas.openxmlformats.org/drawingml/2006/main" xmlns:p="http://schemas.openxmlformats.org/presentationml/2006/main" xmlns:r="http://schemas.openxmlformats.org/officeDocument/2006/relationships">
+  <p:cSld>
+    <p:spTree>
+      <p:nvGrpSpPr>
+        <p:cNvPr id="1" name=""/>
+        <p:cNvGrpSpPr/>
+        <p:nvPr/>
+      </p:nvGrpSpPr>
+      <p:grpSpPr/>
+      <p:sp>
+        <p:nvSpPr>
+          <p:cNvPr id="2" name="Rectangle 1"/>
+          <p:cNvSpPr/>
+          <p:nvPr/>
+        </p:nvSpPr>
+        <p:spPr>
+          <a:xfrm>
+            <a:off x="0" y="0"/>
+            <a:ext cx="12191695" cy="1005840"/>
+          </a:xfrm>
+          <a:prstGeom prst="rect">
+            <a:avLst/>
+          </a:prstGeom>
+          <a:solidFill>
+            <a:srgbClr val="C0392B"/>
+          </a:solidFill>
+          <a:ln>
+            <a:noFill/>
+          </a:ln>
+          <a:effectLst/>
+        </p:spPr>
+        <p:style>
+          <a:lnRef idx="1">
+            <a:schemeClr val="accent1"/>
+          </a:lnRef>
+          <a:fillRef idx="3">
+            <a:schemeClr val="accent1"/>
+          </a:fillRef>
+          <a:effectRef idx="2">
+            <a:schemeClr val="accent1"/>
+          </a:effectRef>
+          <a:fontRef idx="minor">
+            <a:schemeClr val="lt1"/>
+          </a:fontRef>
+        </p:style>
+        <p:txBody>
+          <a:bodyPr rtlCol="0" anchor="ctr"/>
+          <a:lstStyle/>
+          <a:p>
+            <a:pPr algn="ctr"/>
+          </a:p>
+        </p:txBody>
+      </p:sp>
+      <p:sp>
+        <p:nvSpPr>
+          <p:cNvPr id="3" name="TextBox 2"/>
+          <p:cNvSpPr txBox="1"/>
+          <p:nvPr/>
+        </p:nvSpPr>
+        <p:spPr>
+          <a:xfrm>
+            <a:off x="548640" y="91440"/>
+            <a:ext cx="10972800" cy="777240"/>
+          </a:xfrm>
+          <a:prstGeom prst="rect">
+            <a:avLst/>
+          </a:prstGeom>
+          <a:noFill/>
+        </p:spPr>
+        <p:txBody>
+          <a:bodyPr wrap="square">
+            <a:spAutoFit/>
+          </a:bodyPr>
+          <a:lstStyle/>
+          <a:p>
+            <a:pPr algn="l">
+              <a:spcAft>
+                <a:spcPts val="600"/>
+              </a:spcAft>
+            </a:pPr>
+            <a:r>
+              <a:rPr sz="2600" b="1">
+                <a:solidFill>
+                  <a:srgbClr val="FFFFFF"/>
+                </a:solidFill>
+                <a:latin typeface="맑은 고딕"/>
+              </a:rPr>
+              <a:t>퀴즈 (1/2)</a:t>
+            </a:r>
+          </a:p>
+        </p:txBody>
+      </p:sp>
+      <p:sp>
+        <p:nvSpPr>
+          <p:cNvPr id="4" name="TextBox 3"/>
+          <p:cNvSpPr txBox="1"/>
+          <p:nvPr/>
+        </p:nvSpPr>
+        <p:spPr>
+          <a:xfrm>
+            <a:off x="640080" y="1371600"/>
+            <a:ext cx="10881360" cy="5120640"/>
+          </a:xfrm>
+          <a:prstGeom prst="rect">
+            <a:avLst/>
+          </a:prstGeom>
+          <a:noFill/>
+        </p:spPr>
+        <p:txBody>
+          <a:bodyPr wrap="square">
+            <a:spAutoFit/>
+          </a:bodyPr>
+          <a:lstStyle/>
+          <a:p>
+            <a:pPr algn="l">
+              <a:spcAft>
+                <a:spcPts val="1000"/>
+              </a:spcAft>
+            </a:pPr>
+            <a:r>
+              <a:rPr sz="1600" b="0">
+                <a:solidFill>
+                  <a:srgbClr val="222222"/>
+                </a:solidFill>
+                <a:latin typeface="맑은 고딕"/>
+              </a:rPr>
+              <a:t>•  Q1. ADDRESS_LIST의 접속 시 페일오버는? → 기본으로 켜짐</a:t>
+            </a:r>
+          </a:p>
+          <a:p>
+            <a:pPr algn="l">
+              <a:spcAft>
+                <a:spcPts val="1000"/>
+              </a:spcAft>
+            </a:pPr>
+            <a:r>
+              <a:rPr sz="1600" b="0">
+                <a:solidFill>
+                  <a:srgbClr val="222222"/>
+                </a:solidFill>
+                <a:latin typeface="맑은 고딕"/>
+              </a:rPr>
+              <a:t>•  Q2. NOMOUNT auxiliary 접속에서 ORA-12528이면? → 정적 등록 추가</a:t>
+            </a:r>
+          </a:p>
+          <a:p>
+            <a:pPr algn="l">
+              <a:spcAft>
+                <a:spcPts val="1000"/>
+              </a:spcAft>
+            </a:pPr>
+            <a:r>
+              <a:rPr sz="1600" b="0">
+                <a:solidFill>
+                  <a:srgbClr val="222222"/>
+                </a:solidFill>
+                <a:latin typeface="맑은 고딕"/>
+              </a:rPr>
+              <a:t>•  Q3. Broker 재기동용 정적 서비스 이름은? → db_unique_name_DGMGRL</a:t>
+            </a:r>
+          </a:p>
+        </p:txBody>
+      </p:sp>
+    </p:spTree>
+  </p:cSld>
+  <p:clrMapOvr>
+    <a:masterClrMapping/>
+  </p:clrMapOvr>
+</p:sld>
+</file>
+
+<file path=ppt/slides/slide49.xml><?xml version="1.0" encoding="utf-8"?>
+<p:sld xmlns:a="http://schemas.openxmlformats.org/drawingml/2006/main" xmlns:p="http://schemas.openxmlformats.org/presentationml/2006/main" xmlns:r="http://schemas.openxmlformats.org/officeDocument/2006/relationships">
+  <p:cSld>
+    <p:spTree>
+      <p:nvGrpSpPr>
+        <p:cNvPr id="1" name=""/>
+        <p:cNvGrpSpPr/>
+        <p:nvPr/>
+      </p:nvGrpSpPr>
+      <p:grpSpPr/>
+      <p:sp>
+        <p:nvSpPr>
+          <p:cNvPr id="2" name="Rectangle 1"/>
+          <p:cNvSpPr/>
+          <p:nvPr/>
+        </p:nvSpPr>
+        <p:spPr>
+          <a:xfrm>
+            <a:off x="0" y="0"/>
+            <a:ext cx="12191695" cy="1005840"/>
+          </a:xfrm>
+          <a:prstGeom prst="rect">
+            <a:avLst/>
+          </a:prstGeom>
+          <a:solidFill>
+            <a:srgbClr val="C0392B"/>
+          </a:solidFill>
+          <a:ln>
+            <a:noFill/>
+          </a:ln>
+          <a:effectLst/>
+        </p:spPr>
+        <p:style>
+          <a:lnRef idx="1">
+            <a:schemeClr val="accent1"/>
+          </a:lnRef>
+          <a:fillRef idx="3">
+            <a:schemeClr val="accent1"/>
+          </a:fillRef>
+          <a:effectRef idx="2">
+            <a:schemeClr val="accent1"/>
+          </a:effectRef>
+          <a:fontRef idx="minor">
+            <a:schemeClr val="lt1"/>
+          </a:fontRef>
+        </p:style>
+        <p:txBody>
+          <a:bodyPr rtlCol="0" anchor="ctr"/>
+          <a:lstStyle/>
+          <a:p>
+            <a:pPr algn="ctr"/>
+          </a:p>
+        </p:txBody>
+      </p:sp>
+      <p:sp>
+        <p:nvSpPr>
+          <p:cNvPr id="3" name="TextBox 2"/>
+          <p:cNvSpPr txBox="1"/>
+          <p:nvPr/>
+        </p:nvSpPr>
+        <p:spPr>
+          <a:xfrm>
+            <a:off x="548640" y="91440"/>
+            <a:ext cx="10972800" cy="777240"/>
+          </a:xfrm>
+          <a:prstGeom prst="rect">
+            <a:avLst/>
+          </a:prstGeom>
+          <a:noFill/>
+        </p:spPr>
+        <p:txBody>
+          <a:bodyPr wrap="square">
+            <a:spAutoFit/>
+          </a:bodyPr>
+          <a:lstStyle/>
+          <a:p>
+            <a:pPr algn="l">
+              <a:spcAft>
+                <a:spcPts val="600"/>
+              </a:spcAft>
+            </a:pPr>
+            <a:r>
+              <a:rPr sz="2600" b="1">
+                <a:solidFill>
+                  <a:srgbClr val="FFFFFF"/>
+                </a:solidFill>
+                <a:latin typeface="맑은 고딕"/>
+              </a:rPr>
+              <a:t>퀴즈 (2/2)</a:t>
+            </a:r>
+          </a:p>
+        </p:txBody>
+      </p:sp>
+      <p:sp>
+        <p:nvSpPr>
+          <p:cNvPr id="4" name="TextBox 3"/>
+          <p:cNvSpPr txBox="1"/>
+          <p:nvPr/>
+        </p:nvSpPr>
+        <p:spPr>
+          <a:xfrm>
+            <a:off x="640080" y="1371600"/>
+            <a:ext cx="10881360" cy="5120640"/>
+          </a:xfrm>
+          <a:prstGeom prst="rect">
+            <a:avLst/>
+          </a:prstGeom>
+          <a:noFill/>
+        </p:spPr>
+        <p:txBody>
+          <a:bodyPr wrap="square">
+            <a:spAutoFit/>
+          </a:bodyPr>
+          <a:lstStyle/>
+          <a:p>
+            <a:pPr algn="l">
+              <a:spcAft>
+                <a:spcPts val="1000"/>
+              </a:spcAft>
+            </a:pPr>
+            <a:r>
+              <a:rPr sz="1600" b="0">
+                <a:solidFill>
+                  <a:srgbClr val="222222"/>
+                </a:solidFill>
+                <a:latin typeface="맑은 고딕"/>
+              </a:rPr>
+              <a:t>•  Q4. REDO_TRANSPORT_USER는 Primary에만? → 아니다, 모든 구성원</a:t>
+            </a:r>
+          </a:p>
+          <a:p>
+            <a:pPr algn="l">
+              <a:spcAft>
+                <a:spcPts val="1000"/>
+              </a:spcAft>
+            </a:pPr>
+            <a:r>
+              <a:rPr sz="1600" b="0">
+                <a:solidFill>
+                  <a:srgbClr val="222222"/>
+                </a:solidFill>
+                <a:latin typeface="맑은 고딕"/>
+              </a:rPr>
+              <a:t>•  Q5. 목적지 DB_UNIQUE_NAME 오기를 막는 설정은? → DG_CONFIG</a:t>
+            </a:r>
+          </a:p>
+          <a:p>
+            <a:pPr algn="l">
+              <a:spcAft>
+                <a:spcPts val="1000"/>
+              </a:spcAft>
+            </a:pPr>
+            <a:r>
+              <a:rPr sz="1600" b="0">
+                <a:solidFill>
+                  <a:srgbClr val="222222"/>
+                </a:solidFill>
+                <a:latin typeface="맑은 고딕"/>
+              </a:rPr>
+              <a:t>•  Q6. 1Gbit/s, 30ms 구간 소켓 버퍼는? → 약 11.25MB(BDP×3)</a:t>
             </a:r>
           </a:p>
         </p:txBody>
@@ -12822,7 +16307,7 @@
                 </a:solidFill>
                 <a:latin typeface="맑은 고딕"/>
               </a:rPr>
-              <a:t>일반 접속과 무엇이 다른가</a:t>
+              <a:t>데이터베이스가 클라이언트가 된다</a:t>
             </a:r>
           </a:p>
         </p:txBody>
@@ -12861,7 +16346,7 @@
                 </a:solidFill>
                 <a:latin typeface="맑은 고딕"/>
               </a:rPr>
-              <a:t>세 가지 추가 조건</a:t>
+              <a:t>전송 프로세스는 Standby 리스너의 손님</a:t>
             </a:r>
           </a:p>
         </p:txBody>
@@ -12900,7 +16385,7 @@
                 </a:solidFill>
                 <a:latin typeface="맑은 고딕"/>
               </a:rPr>
-              <a:t>•  ① NOMOUNT 상태의 인스턴스에 접속해야 한다 → 정적 등록</a:t>
+              <a:t>•  리스너가 요청을 받아 전용 서버 프로세스 생성</a:t>
             </a:r>
           </a:p>
           <a:p>
@@ -12916,7 +16401,7 @@
                 </a:solidFill>
                 <a:latin typeface="맑은 고딕"/>
               </a:rPr>
-              <a:t>•  ② 양쪽이 서로를 SYS로 인증해야 한다 → 패스워드 파일</a:t>
+              <a:t>•  로컬 sqlplus / as sysdba는 리스너를 거치지 않음</a:t>
             </a:r>
           </a:p>
           <a:p>
@@ -12932,7 +16417,7 @@
                 </a:solidFill>
                 <a:latin typeface="맑은 고딕"/>
               </a:rPr>
-              <a:t>•  ③ 구성 구성원을 파라미터로 선언해야 한다 → DG_CONFIG</a:t>
+              <a:t>•  Primary의 NSS, TT, ARCn이 클라이언트 역할</a:t>
             </a:r>
           </a:p>
           <a:p>
@@ -12948,7 +16433,227 @@
                 </a:solidFill>
                 <a:latin typeface="맑은 고딕"/>
               </a:rPr>
-              <a:t>•  일반 애플리케이션 접속은 셋 중 어느 것도 필요하지 않다</a:t>
+              <a:t>•  Standby에서는 그 접속을 RFS가 받는다</a:t>
+            </a:r>
+          </a:p>
+        </p:txBody>
+      </p:sp>
+    </p:spTree>
+  </p:cSld>
+  <p:clrMapOvr>
+    <a:masterClrMapping/>
+  </p:clrMapOvr>
+</p:sld>
+</file>
+
+<file path=ppt/slides/slide50.xml><?xml version="1.0" encoding="utf-8"?>
+<p:sld xmlns:a="http://schemas.openxmlformats.org/drawingml/2006/main" xmlns:p="http://schemas.openxmlformats.org/presentationml/2006/main" xmlns:r="http://schemas.openxmlformats.org/officeDocument/2006/relationships">
+  <p:cSld>
+    <p:spTree>
+      <p:nvGrpSpPr>
+        <p:cNvPr id="1" name=""/>
+        <p:cNvGrpSpPr/>
+        <p:nvPr/>
+      </p:nvGrpSpPr>
+      <p:grpSpPr/>
+      <p:sp>
+        <p:nvSpPr>
+          <p:cNvPr id="2" name="Rectangle 1"/>
+          <p:cNvSpPr/>
+          <p:nvPr/>
+        </p:nvSpPr>
+        <p:spPr>
+          <a:xfrm>
+            <a:off x="0" y="0"/>
+            <a:ext cx="12191695" cy="1005840"/>
+          </a:xfrm>
+          <a:prstGeom prst="rect">
+            <a:avLst/>
+          </a:prstGeom>
+          <a:solidFill>
+            <a:srgbClr val="C0392B"/>
+          </a:solidFill>
+          <a:ln>
+            <a:noFill/>
+          </a:ln>
+          <a:effectLst/>
+        </p:spPr>
+        <p:style>
+          <a:lnRef idx="1">
+            <a:schemeClr val="accent1"/>
+          </a:lnRef>
+          <a:fillRef idx="3">
+            <a:schemeClr val="accent1"/>
+          </a:fillRef>
+          <a:effectRef idx="2">
+            <a:schemeClr val="accent1"/>
+          </a:effectRef>
+          <a:fontRef idx="minor">
+            <a:schemeClr val="lt1"/>
+          </a:fontRef>
+        </p:style>
+        <p:txBody>
+          <a:bodyPr rtlCol="0" anchor="ctr"/>
+          <a:lstStyle/>
+          <a:p>
+            <a:pPr algn="ctr"/>
+          </a:p>
+        </p:txBody>
+      </p:sp>
+      <p:sp>
+        <p:nvSpPr>
+          <p:cNvPr id="3" name="TextBox 2"/>
+          <p:cNvSpPr txBox="1"/>
+          <p:nvPr/>
+        </p:nvSpPr>
+        <p:spPr>
+          <a:xfrm>
+            <a:off x="548640" y="91440"/>
+            <a:ext cx="10972800" cy="777240"/>
+          </a:xfrm>
+          <a:prstGeom prst="rect">
+            <a:avLst/>
+          </a:prstGeom>
+          <a:noFill/>
+        </p:spPr>
+        <p:txBody>
+          <a:bodyPr wrap="square">
+            <a:spAutoFit/>
+          </a:bodyPr>
+          <a:lstStyle/>
+          <a:p>
+            <a:pPr algn="l">
+              <a:spcAft>
+                <a:spcPts val="600"/>
+              </a:spcAft>
+            </a:pPr>
+            <a:r>
+              <a:rPr sz="2600" b="1">
+                <a:solidFill>
+                  <a:srgbClr val="FFFFFF"/>
+                </a:solidFill>
+                <a:latin typeface="맑은 고딕"/>
+              </a:rPr>
+              <a:t>실습 개요</a:t>
+            </a:r>
+          </a:p>
+        </p:txBody>
+      </p:sp>
+      <p:sp>
+        <p:nvSpPr>
+          <p:cNvPr id="4" name="TextBox 3"/>
+          <p:cNvSpPr txBox="1"/>
+          <p:nvPr/>
+        </p:nvSpPr>
+        <p:spPr>
+          <a:xfrm>
+            <a:off x="640080" y="1371600"/>
+            <a:ext cx="10881360" cy="5120640"/>
+          </a:xfrm>
+          <a:prstGeom prst="rect">
+            <a:avLst/>
+          </a:prstGeom>
+          <a:noFill/>
+        </p:spPr>
+        <p:txBody>
+          <a:bodyPr wrap="square">
+            <a:spAutoFit/>
+          </a:bodyPr>
+          <a:lstStyle/>
+          <a:p>
+            <a:pPr algn="l">
+              <a:spcAft>
+                <a:spcPts val="1000"/>
+              </a:spcAft>
+            </a:pPr>
+            <a:r>
+              <a:rPr sz="1600" b="0">
+                <a:solidFill>
+                  <a:srgbClr val="222222"/>
+                </a:solidFill>
+                <a:latin typeface="맑은 고딕"/>
+              </a:rPr>
+              <a:t>•  01 tnsnames 구성과 검증: tnsping의 범위 (3.3, 3.8)</a:t>
+            </a:r>
+          </a:p>
+          <a:p>
+            <a:pPr algn="l">
+              <a:spcAft>
+                <a:spcPts val="1000"/>
+              </a:spcAft>
+            </a:pPr>
+            <a:r>
+              <a:rPr sz="1600" b="0">
+                <a:solidFill>
+                  <a:srgbClr val="222222"/>
+                </a:solidFill>
+                <a:latin typeface="맑은 고딕"/>
+              </a:rPr>
+              <a:t>•  02 listener 정적 등록: READY·BLOCKED·UNKNOWN (3.4)</a:t>
+            </a:r>
+          </a:p>
+          <a:p>
+            <a:pPr algn="l">
+              <a:spcAft>
+                <a:spcPts val="1000"/>
+              </a:spcAft>
+            </a:pPr>
+            <a:r>
+              <a:rPr sz="1600" b="0">
+                <a:solidFill>
+                  <a:srgbClr val="222222"/>
+                </a:solidFill>
+                <a:latin typeface="맑은 고딕"/>
+              </a:rPr>
+              <a:t>•  03 정적 등록 제거와 복원: ORA-12514, 12528 (3.4)</a:t>
+            </a:r>
+          </a:p>
+          <a:p>
+            <a:pPr algn="l">
+              <a:spcAft>
+                <a:spcPts val="1000"/>
+              </a:spcAft>
+            </a:pPr>
+            <a:r>
+              <a:rPr sz="1600" b="0">
+                <a:solidFill>
+                  <a:srgbClr val="222222"/>
+                </a:solidFill>
+                <a:latin typeface="맑은 고딕"/>
+              </a:rPr>
+              <a:t>•  04 DG_CONFIG 설정과 누락: ORA-16053 (3.6)</a:t>
+            </a:r>
+          </a:p>
+          <a:p>
+            <a:pPr algn="l">
+              <a:spcAft>
+                <a:spcPts val="1000"/>
+              </a:spcAft>
+            </a:pPr>
+            <a:r>
+              <a:rPr sz="1600" b="0">
+                <a:solidFill>
+                  <a:srgbClr val="222222"/>
+                </a:solidFill>
+                <a:latin typeface="맑은 고딕"/>
+              </a:rPr>
+              <a:t>•  05 패스워드 파일 불일치: 01017, 16191 (3.5)</a:t>
+            </a:r>
+          </a:p>
+          <a:p>
+            <a:pPr algn="l">
+              <a:spcAft>
+                <a:spcPts val="1000"/>
+              </a:spcAft>
+            </a:pPr>
+            <a:r>
+              <a:rPr sz="1600" b="0">
+                <a:solidFill>
+                  <a:srgbClr val="222222"/>
+                </a:solidFill>
+                <a:latin typeface="맑은 고딕"/>
+              </a:rPr>
+              <a:t>•  06 포트 차단과 해소: 오류 계층 지도 (3.8)</a:t>
             </a:r>
           </a:p>
         </p:txBody>
@@ -13049,7 +16754,7 @@
                 </a:solidFill>
                 <a:latin typeface="맑은 고딕"/>
               </a:rPr>
-              <a:t>tnsnames.ora</a:t>
+              <a:t>Oracle Net을 쓰는 경로</a:t>
             </a:r>
           </a:p>
         </p:txBody>
@@ -13088,7 +16793,7 @@
                 </a:solidFill>
                 <a:latin typeface="맑은 고딕"/>
               </a:rPr>
-              <a:t>양쪽에 같은 내용을 둔다</a:t>
+              <a:t>모두 같은 설정 파일을 공유한다</a:t>
             </a:r>
           </a:p>
         </p:txBody>
@@ -13127,7 +16832,7 @@
                 </a:solidFill>
                 <a:latin typeface="맑은 고딕"/>
               </a:rPr>
-              <a:t>•  CHICAGO / BOSTON — 일반 전송용</a:t>
+              <a:t>•  리두 전송: Primary에서 Standby로</a:t>
             </a:r>
           </a:p>
           <a:p>
@@ -13143,7 +16848,7 @@
                 </a:solidFill>
                 <a:latin typeface="맑은 고딕"/>
               </a:rPr>
-              <a:t>•  CHICAGO_DG / BOSTON_DG — Broker용, SERVICE_NAME은 &lt;db_unique_name&gt;_DGMGRL</a:t>
+              <a:t>•  FAL 갭 해소: Standby에서 FAL 서버로</a:t>
             </a:r>
           </a:p>
           <a:p>
@@ -13159,7 +16864,7 @@
                 </a:solidFill>
                 <a:latin typeface="맑은 고딕"/>
               </a:rPr>
-              <a:t>•  양쪽에 같은 파일을 두는 이유: 역할 전환 이후 반대 방향 전송</a:t>
+              <a:t>•  RMAN DUPLICATE: NOMOUNT auxiliary 접속</a:t>
             </a:r>
           </a:p>
           <a:p>
@@ -13175,7 +16880,7 @@
                 </a:solidFill>
                 <a:latin typeface="맑은 고딕"/>
               </a:rPr>
-              <a:t>•  실습 환경 주의: BOSTON은 boston-srv.localdomain, BOSTON_DG는 boston-srv</a:t>
+              <a:t>•  역할 전환 뒤 반대 방향 전송, Broker DMON 통신</a:t>
             </a:r>
           </a:p>
           <a:p>
@@ -13191,7 +16896,7 @@
                 </a:solidFill>
                 <a:latin typeface="맑은 고딕"/>
               </a:rPr>
-              <a:t>•  둘 다 /etc/hosts에 있어 동작하지만 표기는 통일하는 편이 낫다</a:t>
+              <a:t>•  애플리케이션의 현재 Primary 접속</a:t>
             </a:r>
           </a:p>
         </p:txBody>
@@ -13292,7 +16997,7 @@
                 </a:solidFill>
                 <a:latin typeface="맑은 고딕"/>
               </a:rPr>
-              <a:t>tnsping이 확인하는 것과 못 하는 것</a:t>
+              <a:t>양방향 연결과 대칭 구성</a:t>
             </a:r>
           </a:p>
         </p:txBody>
@@ -13305,8 +17010,8 @@
         </p:nvSpPr>
         <p:spPr>
           <a:xfrm>
-            <a:off x="640080" y="1371600"/>
-            <a:ext cx="10881360" cy="5120640"/>
+            <a:off x="640080" y="1078992"/>
+            <a:ext cx="10881360" cy="457200"/>
           </a:xfrm>
           <a:prstGeom prst="rect">
             <a:avLst/>
@@ -13321,17 +17026,56 @@
           <a:p>
             <a:pPr algn="l">
               <a:spcAft>
+                <a:spcPts val="600"/>
+              </a:spcAft>
+            </a:pPr>
+            <a:r>
+              <a:rPr sz="1500" b="0">
+                <a:solidFill>
+                  <a:srgbClr val="5A6672"/>
+                </a:solidFill>
+                <a:latin typeface="맑은 고딕"/>
+              </a:rPr>
+              <a:t>평상시에는 보이지 않는 반대 방향</a:t>
+            </a:r>
+          </a:p>
+        </p:txBody>
+      </p:sp>
+      <p:sp>
+        <p:nvSpPr>
+          <p:cNvPr id="5" name="TextBox 4"/>
+          <p:cNvSpPr txBox="1"/>
+          <p:nvPr/>
+        </p:nvSpPr>
+        <p:spPr>
+          <a:xfrm>
+            <a:off x="640080" y="1737360"/>
+            <a:ext cx="10881360" cy="4754880"/>
+          </a:xfrm>
+          <a:prstGeom prst="rect">
+            <a:avLst/>
+          </a:prstGeom>
+          <a:noFill/>
+        </p:spPr>
+        <p:txBody>
+          <a:bodyPr wrap="square">
+            <a:spAutoFit/>
+          </a:bodyPr>
+          <a:lstStyle/>
+          <a:p>
+            <a:pPr algn="l">
+              <a:spcAft>
                 <a:spcPts val="1000"/>
               </a:spcAft>
             </a:pPr>
             <a:r>
-              <a:rPr sz="1600" b="0">
+              <a:rPr sz="1700" b="0">
                 <a:solidFill>
                   <a:srgbClr val="222222"/>
                 </a:solidFill>
                 <a:latin typeface="맑은 고딕"/>
               </a:rPr>
-              <a:t>•  확인한다 : 별칭이 풀렸다 / 호스트·포트에 도달했다 / 리스너가 응답했다</a:t>
+              <a:t>•  FAL은 Standby가 Primary에 접속하는 연결</a:t>
             </a:r>
           </a:p>
           <a:p>
@@ -13341,13 +17085,13 @@
               </a:spcAft>
             </a:pPr>
             <a:r>
-              <a:rPr sz="1600" b="0">
+              <a:rPr sz="1700" b="0">
                 <a:solidFill>
                   <a:srgbClr val="222222"/>
                 </a:solidFill>
                 <a:latin typeface="맑은 고딕"/>
               </a:rPr>
-              <a:t>•  확인 못 한다 : 서비스 등록 여부 → ORA-12514</a:t>
+              <a:t>•  Switchover 뒤에는 boston이 chicago로 전송</a:t>
             </a:r>
           </a:p>
           <a:p>
@@ -13357,13 +17101,13 @@
               </a:spcAft>
             </a:pPr>
             <a:r>
-              <a:rPr sz="1600" b="0">
+              <a:rPr sz="1700" b="0">
                 <a:solidFill>
                   <a:srgbClr val="222222"/>
                 </a:solidFill>
                 <a:latin typeface="맑은 고딕"/>
               </a:rPr>
-              <a:t>•  확인 못 한다 : 인스턴스 상태 → ORA-12528</a:t>
+              <a:t>•  Broker DMON은 구성원끼리 서로 접속</a:t>
             </a:r>
           </a:p>
           <a:p>
@@ -13373,29 +17117,13 @@
               </a:spcAft>
             </a:pPr>
             <a:r>
-              <a:rPr sz="1600" b="0">
+              <a:rPr sz="1700" b="0">
                 <a:solidFill>
                   <a:srgbClr val="222222"/>
                 </a:solidFill>
                 <a:latin typeface="맑은 고딕"/>
               </a:rPr>
-              <a:t>•  확인 못 한다 : 인증 통과 여부 → ORA-01017</a:t>
-            </a:r>
-          </a:p>
-          <a:p>
-            <a:pPr algn="l">
-              <a:spcAft>
-                <a:spcPts val="1000"/>
-              </a:spcAft>
-            </a:pPr>
-            <a:r>
-              <a:rPr sz="1600" b="0">
-                <a:solidFill>
-                  <a:srgbClr val="222222"/>
-                </a:solidFill>
-                <a:latin typeface="맑은 고딕"/>
-              </a:rPr>
-              <a:t>•  실무 요령 : OK인데 실패하면 리스너 위쪽, 실패하면 아래쪽</a:t>
+              <a:t>•  별칭, 정적 등록, 방화벽 허용을 양쪽에 똑같이</a:t>
             </a:r>
           </a:p>
         </p:txBody>
@@ -13496,7 +17224,7 @@
                 </a:solidFill>
                 <a:latin typeface="맑은 고딕"/>
               </a:rPr>
-              <a:t>TNS_ADMIN과 sqlnet.ora</a:t>
+              <a:t>구성 파일과 위치</a:t>
             </a:r>
           </a:p>
         </p:txBody>
@@ -13535,7 +17263,7 @@
                 </a:solidFill>
                 <a:latin typeface="맑은 고딕"/>
               </a:rPr>
-              <a:t>"고쳤는데 반영이 안 된다"</a:t>
+              <a:t>인스턴스가 실제로 읽는 파일은 어디인가</a:t>
             </a:r>
           </a:p>
         </p:txBody>
@@ -13574,7 +17302,7 @@
                 </a:solidFill>
                 <a:latin typeface="맑은 고딕"/>
               </a:rPr>
-              <a:t>•  기본 위치는 $ORACLE_HOME/network/admin, TNS_ADMIN이 있으면 그쪽 우선</a:t>
+              <a:t>•  tnsnames.ora: 별칭과 접속 기술자</a:t>
             </a:r>
           </a:p>
           <a:p>
@@ -13590,7 +17318,7 @@
                 </a:solidFill>
                 <a:latin typeface="맑은 고딕"/>
               </a:rPr>
-              <a:t>•  백그라운드 프로세스는 인스턴스를 기동한 셸의 환경을 물려받는다</a:t>
+              <a:t>•  sqlnet.ora: 이름 해석 순서, 타임아웃, TCP 옵션</a:t>
             </a:r>
           </a:p>
           <a:p>
@@ -13606,7 +17334,7 @@
                 </a:solidFill>
                 <a:latin typeface="맑은 고딕"/>
               </a:rPr>
-              <a:t>•  실습 환경 sqlnet.ora : SQLNET.ALLOWED_LOGON_VERSION_SERVER=11 / CLIENT=11</a:t>
+              <a:t>•  listener.ora: 수신 주소와 정적 등록</a:t>
             </a:r>
           </a:p>
           <a:p>
@@ -13622,7 +17350,23 @@
                 </a:solidFill>
                 <a:latin typeface="맑은 고딕"/>
               </a:rPr>
-              <a:t>•  이 값이 두 노드에서 다르면 패스워드 파일이 같아도 ORA-01017이 날 수 있다</a:t>
+              <a:t>•  TNS_ADMIN을 먼저, 없으면 ORACLE_HOME/network/admin</a:t>
+            </a:r>
+          </a:p>
+          <a:p>
+            <a:pPr algn="l">
+              <a:spcAft>
+                <a:spcPts val="1000"/>
+              </a:spcAft>
+            </a:pPr>
+            <a:r>
+              <a:rPr sz="1700" b="0">
+                <a:solidFill>
+                  <a:srgbClr val="222222"/>
+                </a:solidFill>
+                <a:latin typeface="맑은 고딕"/>
+              </a:rPr>
+              <a:t>•  백그라운드 프로세스는 기동 시점 환경을 물려받음</a:t>
             </a:r>
           </a:p>
         </p:txBody>
@@ -13762,7 +17506,7 @@
                 </a:solidFill>
                 <a:latin typeface="맑은 고딕"/>
               </a:rPr>
-              <a:t>정적 등록 — 이 장의 핵심</a:t>
+              <a:t>이름 해석과 tnsnames.ora</a:t>
             </a:r>
           </a:p>
         </p:txBody>
@@ -13845,7 +17589,7 @@
                 </a:solidFill>
                 <a:latin typeface="맑은 고딕"/>
               </a:rPr>
-              <a:t>•  동적 등록은 NOMOUNT에서 통하지 않는다</a:t>
+              <a:t>•  접속 기술자의 두 요소</a:t>
             </a:r>
           </a:p>
           <a:p>
@@ -13861,7 +17605,7 @@
                 </a:solidFill>
                 <a:latin typeface="맑은 고딕"/>
               </a:rPr>
-              <a:t>•  SID_LIST_LISTENER 로 미리 선언한다</a:t>
+              <a:t>•  별칭, 서비스 이름, DB_UNIQUE_NAME</a:t>
             </a:r>
           </a:p>
           <a:p>
@@ -13877,7 +17621,7 @@
                 </a:solidFill>
                 <a:latin typeface="맑은 고딕"/>
               </a:rPr>
-              <a:t>•  제거해서 실패를 재현한다</a:t>
+              <a:t>•  역할 전환에 대비한 클라이언트 접속</a:t>
             </a:r>
           </a:p>
         </p:txBody>
